--- a/cours/Module TIC/Département Français/Licence 1/Cours_TIC_02_Informatique_et_Ordinateur_FR.pptx
+++ b/cours/Module TIC/Département Français/Licence 1/Cours_TIC_02_Informatique_et_Ordinateur_FR.pptx
@@ -4,9 +4,6 @@
   <p:sldMasterIdLst>
     <p:sldMasterId id="2147483648" r:id="rId1"/>
   </p:sldMasterIdLst>
-  <p:notesMasterIdLst>
-    <p:notesMasterId r:id="rId33"/>
-  </p:notesMasterIdLst>
   <p:sldIdLst>
     <p:sldId id="256" r:id="rId7"/>
     <p:sldId id="257" r:id="rId8"/>
@@ -18,6 +15,11 @@
     <p:sldId id="263" r:id="rId14"/>
     <p:sldId id="264" r:id="rId15"/>
     <p:sldId id="265" r:id="rId16"/>
+    <p:sldId id="266" r:id="rId17"/>
+    <p:sldId id="267" r:id="rId18"/>
+    <p:sldId id="268" r:id="rId19"/>
+    <p:sldId id="269" r:id="rId20"/>
+    <p:sldId id="270" r:id="rId21"/>
   </p:sldIdLst>
   <p:sldSz cx="9144000" cy="6858000" type="screen4x3"/>
   <p:notesSz cx="6858000" cy="9144000"/>
@@ -116,372 +118,7 @@
       </a:defRPr>
     </a:lvl9pPr>
   </p:defaultTextStyle>
-  <p:extLst>
-    <p:ext uri="{EFAFB233-063F-42B5-8137-9DF3F51BA10A}">
-      <p15:sldGuideLst xmlns:p15="http://schemas.microsoft.com/office/powerpoint/2012/main">
-        <p15:guide id="1" orient="horz" pos="2160">
-          <p15:clr>
-            <a:srgbClr val="A4A3A4"/>
-          </p15:clr>
-        </p15:guide>
-        <p15:guide id="2" pos="2880">
-          <p15:clr>
-            <a:srgbClr val="A4A3A4"/>
-          </p15:clr>
-        </p15:guide>
-      </p15:sldGuideLst>
-    </p:ext>
-  </p:extLst>
 </p:presentation>
-</file>
-
-<file path=ppt/notesMasters/notesMaster1.xml><?xml version="1.0" encoding="utf-8"?>
-<p:notesMaster xmlns:a="http://schemas.openxmlformats.org/drawingml/2006/main" xmlns:r="http://schemas.openxmlformats.org/officeDocument/2006/relationships" xmlns:p="http://schemas.openxmlformats.org/presentationml/2006/main">
-  <p:cSld>
-    <p:bg>
-      <p:bgRef idx="1001">
-        <a:schemeClr val="bg1"/>
-      </p:bgRef>
-    </p:bg>
-    <p:spTree>
-      <p:nvGrpSpPr>
-        <p:cNvPr id="1" name=""/>
-        <p:cNvGrpSpPr/>
-        <p:nvPr/>
-      </p:nvGrpSpPr>
-      <p:grpSpPr>
-        <a:xfrm>
-          <a:off x="0" y="0"/>
-          <a:ext cx="0" cy="0"/>
-          <a:chOff x="0" y="0"/>
-          <a:chExt cx="0" cy="0"/>
-        </a:xfrm>
-      </p:grpSpPr>
-      <p:sp>
-        <p:nvSpPr>
-          <p:cNvPr id="2" name="Espace réservé de l'en-tête 1"/>
-          <p:cNvSpPr>
-            <a:spLocks noGrp="1"/>
-          </p:cNvSpPr>
-          <p:nvPr>
-            <p:ph type="hdr" sz="quarter"/>
-          </p:nvPr>
-        </p:nvSpPr>
-        <p:spPr>
-          <a:xfrm>
-            <a:off x="0" y="0"/>
-            <a:ext cx="2971800" cy="458788"/>
-          </a:xfrm>
-          <a:prstGeom prst="rect">
-            <a:avLst/>
-          </a:prstGeom>
-        </p:spPr>
-        <p:txBody>
-          <a:bodyPr vert="horz" lIns="91440" tIns="45720" rIns="91440" bIns="45720" rtlCol="0"/>
-          <a:lstStyle>
-            <a:lvl1pPr algn="l">
-              <a:defRPr sz="1200"/>
-            </a:lvl1pPr>
-          </a:lstStyle>
-          <a:p>
-            <a:endParaRPr lang="fr-FR"/>
-          </a:p>
-        </p:txBody>
-      </p:sp>
-      <p:sp>
-        <p:nvSpPr>
-          <p:cNvPr id="3" name="Espace réservé de la date 2"/>
-          <p:cNvSpPr>
-            <a:spLocks noGrp="1"/>
-          </p:cNvSpPr>
-          <p:nvPr>
-            <p:ph type="dt" idx="1"/>
-          </p:nvPr>
-        </p:nvSpPr>
-        <p:spPr>
-          <a:xfrm>
-            <a:off x="3884613" y="0"/>
-            <a:ext cx="2971800" cy="458788"/>
-          </a:xfrm>
-          <a:prstGeom prst="rect">
-            <a:avLst/>
-          </a:prstGeom>
-        </p:spPr>
-        <p:txBody>
-          <a:bodyPr vert="horz" lIns="91440" tIns="45720" rIns="91440" bIns="45720" rtlCol="0"/>
-          <a:lstStyle>
-            <a:lvl1pPr algn="r">
-              <a:defRPr sz="1200"/>
-            </a:lvl1pPr>
-          </a:lstStyle>
-          <a:p>
-            <a:fld id="{B8F0B2C1-4194-45A7-9834-731A4F36BABD}" type="datetimeFigureOut">
-              <a:rPr lang="fr-FR" smtClean="0"/>
-              <a:t>16/05/2026</a:t>
-            </a:fld>
-            <a:endParaRPr lang="fr-FR"/>
-          </a:p>
-        </p:txBody>
-      </p:sp>
-      <p:sp>
-        <p:nvSpPr>
-          <p:cNvPr id="4" name="Espace réservé de l'image des diapositives 3"/>
-          <p:cNvSpPr>
-            <a:spLocks noGrp="1" noRot="1" noChangeAspect="1"/>
-          </p:cNvSpPr>
-          <p:nvPr>
-            <p:ph type="sldImg" idx="2"/>
-          </p:nvPr>
-        </p:nvSpPr>
-        <p:spPr>
-          <a:xfrm>
-            <a:off x="1371600" y="1143000"/>
-            <a:ext cx="4114800" cy="3086100"/>
-          </a:xfrm>
-          <a:prstGeom prst="rect">
-            <a:avLst/>
-          </a:prstGeom>
-          <a:noFill/>
-          <a:ln w="12700">
-            <a:solidFill>
-              <a:prstClr val="black"/>
-            </a:solidFill>
-          </a:ln>
-        </p:spPr>
-        <p:txBody>
-          <a:bodyPr vert="horz" lIns="91440" tIns="45720" rIns="91440" bIns="45720" rtlCol="0" anchor="ctr"/>
-          <a:lstStyle/>
-          <a:p>
-            <a:endParaRPr lang="fr-FR"/>
-          </a:p>
-        </p:txBody>
-      </p:sp>
-      <p:sp>
-        <p:nvSpPr>
-          <p:cNvPr id="5" name="Espace réservé des notes 4"/>
-          <p:cNvSpPr>
-            <a:spLocks noGrp="1"/>
-          </p:cNvSpPr>
-          <p:nvPr>
-            <p:ph type="body" sz="quarter" idx="3"/>
-          </p:nvPr>
-        </p:nvSpPr>
-        <p:spPr>
-          <a:xfrm>
-            <a:off x="685800" y="4400550"/>
-            <a:ext cx="5486400" cy="3600450"/>
-          </a:xfrm>
-          <a:prstGeom prst="rect">
-            <a:avLst/>
-          </a:prstGeom>
-        </p:spPr>
-        <p:txBody>
-          <a:bodyPr vert="horz" lIns="91440" tIns="45720" rIns="91440" bIns="45720" rtlCol="0"/>
-          <a:lstStyle/>
-          <a:p>
-            <a:pPr lvl="0"/>
-            <a:r>
-              <a:rPr lang="fr-FR"/>
-              <a:t>Cliquez pour modifier les styles du texte du masque</a:t>
-            </a:r>
-          </a:p>
-          <a:p>
-            <a:pPr lvl="1"/>
-            <a:r>
-              <a:rPr lang="fr-FR"/>
-              <a:t>Deuxième niveau</a:t>
-            </a:r>
-          </a:p>
-          <a:p>
-            <a:pPr lvl="2"/>
-            <a:r>
-              <a:rPr lang="fr-FR"/>
-              <a:t>Troisième niveau</a:t>
-            </a:r>
-          </a:p>
-          <a:p>
-            <a:pPr lvl="3"/>
-            <a:r>
-              <a:rPr lang="fr-FR"/>
-              <a:t>Quatrième niveau</a:t>
-            </a:r>
-          </a:p>
-          <a:p>
-            <a:pPr lvl="4"/>
-            <a:r>
-              <a:rPr lang="fr-FR"/>
-              <a:t>Cinquième niveau</a:t>
-            </a:r>
-          </a:p>
-        </p:txBody>
-      </p:sp>
-      <p:sp>
-        <p:nvSpPr>
-          <p:cNvPr id="6" name="Espace réservé du pied de page 5"/>
-          <p:cNvSpPr>
-            <a:spLocks noGrp="1"/>
-          </p:cNvSpPr>
-          <p:nvPr>
-            <p:ph type="ftr" sz="quarter" idx="4"/>
-          </p:nvPr>
-        </p:nvSpPr>
-        <p:spPr>
-          <a:xfrm>
-            <a:off x="0" y="8685213"/>
-            <a:ext cx="2971800" cy="458787"/>
-          </a:xfrm>
-          <a:prstGeom prst="rect">
-            <a:avLst/>
-          </a:prstGeom>
-        </p:spPr>
-        <p:txBody>
-          <a:bodyPr vert="horz" lIns="91440" tIns="45720" rIns="91440" bIns="45720" rtlCol="0" anchor="b"/>
-          <a:lstStyle>
-            <a:lvl1pPr algn="l">
-              <a:defRPr sz="1200"/>
-            </a:lvl1pPr>
-          </a:lstStyle>
-          <a:p>
-            <a:endParaRPr lang="fr-FR"/>
-          </a:p>
-        </p:txBody>
-      </p:sp>
-      <p:sp>
-        <p:nvSpPr>
-          <p:cNvPr id="7" name="Espace réservé du numéro de diapositive 6"/>
-          <p:cNvSpPr>
-            <a:spLocks noGrp="1"/>
-          </p:cNvSpPr>
-          <p:nvPr>
-            <p:ph type="sldNum" sz="quarter" idx="5"/>
-          </p:nvPr>
-        </p:nvSpPr>
-        <p:spPr>
-          <a:xfrm>
-            <a:off x="3884613" y="8685213"/>
-            <a:ext cx="2971800" cy="458787"/>
-          </a:xfrm>
-          <a:prstGeom prst="rect">
-            <a:avLst/>
-          </a:prstGeom>
-        </p:spPr>
-        <p:txBody>
-          <a:bodyPr vert="horz" lIns="91440" tIns="45720" rIns="91440" bIns="45720" rtlCol="0" anchor="b"/>
-          <a:lstStyle>
-            <a:lvl1pPr algn="r">
-              <a:defRPr sz="1200"/>
-            </a:lvl1pPr>
-          </a:lstStyle>
-          <a:p>
-            <a:fld id="{EDB5666F-E79B-4A29-9A64-FA4855FAABBD}" type="slidenum">
-              <a:rPr lang="fr-FR" smtClean="0"/>
-              <a:t>‹N°›</a:t>
-            </a:fld>
-            <a:endParaRPr lang="fr-FR"/>
-          </a:p>
-        </p:txBody>
-      </p:sp>
-    </p:spTree>
-    <p:extLst>
-      <p:ext uri="{BB962C8B-B14F-4D97-AF65-F5344CB8AC3E}">
-        <p14:creationId xmlns:p14="http://schemas.microsoft.com/office/powerpoint/2010/main" val="4057233482"/>
-      </p:ext>
-    </p:extLst>
-  </p:cSld>
-  <p:clrMap bg1="lt1" tx1="dk1" bg2="lt2" tx2="dk2" accent1="accent1" accent2="accent2" accent3="accent3" accent4="accent4" accent5="accent5" accent6="accent6" hlink="hlink" folHlink="folHlink"/>
-  <p:notesStyle>
-    <a:lvl1pPr marL="0" algn="l" defTabSz="914400" rtl="0" eaLnBrk="1" latinLnBrk="0" hangingPunct="1">
-      <a:defRPr sz="1200" kern="1200">
-        <a:solidFill>
-          <a:schemeClr val="tx1"/>
-        </a:solidFill>
-        <a:latin typeface="+mn-lt"/>
-        <a:ea typeface="+mn-ea"/>
-        <a:cs typeface="+mn-cs"/>
-      </a:defRPr>
-    </a:lvl1pPr>
-    <a:lvl2pPr marL="457200" algn="l" defTabSz="914400" rtl="0" eaLnBrk="1" latinLnBrk="0" hangingPunct="1">
-      <a:defRPr sz="1200" kern="1200">
-        <a:solidFill>
-          <a:schemeClr val="tx1"/>
-        </a:solidFill>
-        <a:latin typeface="+mn-lt"/>
-        <a:ea typeface="+mn-ea"/>
-        <a:cs typeface="+mn-cs"/>
-      </a:defRPr>
-    </a:lvl2pPr>
-    <a:lvl3pPr marL="914400" algn="l" defTabSz="914400" rtl="0" eaLnBrk="1" latinLnBrk="0" hangingPunct="1">
-      <a:defRPr sz="1200" kern="1200">
-        <a:solidFill>
-          <a:schemeClr val="tx1"/>
-        </a:solidFill>
-        <a:latin typeface="+mn-lt"/>
-        <a:ea typeface="+mn-ea"/>
-        <a:cs typeface="+mn-cs"/>
-      </a:defRPr>
-    </a:lvl3pPr>
-    <a:lvl4pPr marL="1371600" algn="l" defTabSz="914400" rtl="0" eaLnBrk="1" latinLnBrk="0" hangingPunct="1">
-      <a:defRPr sz="1200" kern="1200">
-        <a:solidFill>
-          <a:schemeClr val="tx1"/>
-        </a:solidFill>
-        <a:latin typeface="+mn-lt"/>
-        <a:ea typeface="+mn-ea"/>
-        <a:cs typeface="+mn-cs"/>
-      </a:defRPr>
-    </a:lvl4pPr>
-    <a:lvl5pPr marL="1828800" algn="l" defTabSz="914400" rtl="0" eaLnBrk="1" latinLnBrk="0" hangingPunct="1">
-      <a:defRPr sz="1200" kern="1200">
-        <a:solidFill>
-          <a:schemeClr val="tx1"/>
-        </a:solidFill>
-        <a:latin typeface="+mn-lt"/>
-        <a:ea typeface="+mn-ea"/>
-        <a:cs typeface="+mn-cs"/>
-      </a:defRPr>
-    </a:lvl5pPr>
-    <a:lvl6pPr marL="2286000" algn="l" defTabSz="914400" rtl="0" eaLnBrk="1" latinLnBrk="0" hangingPunct="1">
-      <a:defRPr sz="1200" kern="1200">
-        <a:solidFill>
-          <a:schemeClr val="tx1"/>
-        </a:solidFill>
-        <a:latin typeface="+mn-lt"/>
-        <a:ea typeface="+mn-ea"/>
-        <a:cs typeface="+mn-cs"/>
-      </a:defRPr>
-    </a:lvl6pPr>
-    <a:lvl7pPr marL="2743200" algn="l" defTabSz="914400" rtl="0" eaLnBrk="1" latinLnBrk="0" hangingPunct="1">
-      <a:defRPr sz="1200" kern="1200">
-        <a:solidFill>
-          <a:schemeClr val="tx1"/>
-        </a:solidFill>
-        <a:latin typeface="+mn-lt"/>
-        <a:ea typeface="+mn-ea"/>
-        <a:cs typeface="+mn-cs"/>
-      </a:defRPr>
-    </a:lvl7pPr>
-    <a:lvl8pPr marL="3200400" algn="l" defTabSz="914400" rtl="0" eaLnBrk="1" latinLnBrk="0" hangingPunct="1">
-      <a:defRPr sz="1200" kern="1200">
-        <a:solidFill>
-          <a:schemeClr val="tx1"/>
-        </a:solidFill>
-        <a:latin typeface="+mn-lt"/>
-        <a:ea typeface="+mn-ea"/>
-        <a:cs typeface="+mn-cs"/>
-      </a:defRPr>
-    </a:lvl8pPr>
-    <a:lvl9pPr marL="3657600" algn="l" defTabSz="914400" rtl="0" eaLnBrk="1" latinLnBrk="0" hangingPunct="1">
-      <a:defRPr sz="1200" kern="1200">
-        <a:solidFill>
-          <a:schemeClr val="tx1"/>
-        </a:solidFill>
-        <a:latin typeface="+mn-lt"/>
-        <a:ea typeface="+mn-ea"/>
-        <a:cs typeface="+mn-cs"/>
-      </a:defRPr>
-    </a:lvl9pPr>
-  </p:notesStyle>
-</p:notesMaster>
 </file>
 
 <file path=ppt/slideLayouts/slideLayout1.xml><?xml version="1.0" encoding="utf-8"?>
@@ -522,9 +159,10 @@
           <a:lstStyle/>
           <a:p>
             <a:r>
-              <a:rPr lang="en-US"/>
+              <a:rPr lang="en-US" smtClean="0"/>
               <a:t>Click to edit Master title style</a:t>
             </a:r>
+            <a:endParaRPr lang="en-US"/>
           </a:p>
         </p:txBody>
       </p:sp>
@@ -640,9 +278,10 @@
           </a:lstStyle>
           <a:p>
             <a:r>
-              <a:rPr lang="en-US"/>
+              <a:rPr lang="en-US" smtClean="0"/>
               <a:t>Click to edit Master subtitle style</a:t>
             </a:r>
+            <a:endParaRPr lang="en-US"/>
           </a:p>
         </p:txBody>
       </p:sp>
@@ -663,7 +302,7 @@
           <a:p>
             <a:fld id="{5BCAD085-E8A6-8845-BD4E-CB4CCA059FC4}" type="datetimeFigureOut">
               <a:rPr lang="en-US" smtClean="0"/>
-              <a:t>5/16/2026</a:t>
+              <a:t>1/27/13</a:t>
             </a:fld>
             <a:endParaRPr lang="en-US"/>
           </a:p>
@@ -705,7 +344,7 @@
           <a:p>
             <a:fld id="{C1FF6DA9-008F-8B48-92A6-B652298478BF}" type="slidenum">
               <a:rPr lang="en-US" smtClean="0"/>
-              <a:t>‹N°›</a:t>
+              <a:t>‹#›</a:t>
             </a:fld>
             <a:endParaRPr lang="en-US"/>
           </a:p>
@@ -757,9 +396,10 @@
           <a:lstStyle/>
           <a:p>
             <a:r>
-              <a:rPr lang="en-US"/>
+              <a:rPr lang="en-US" smtClean="0"/>
               <a:t>Click to edit Master title style</a:t>
             </a:r>
+            <a:endParaRPr lang="en-US"/>
           </a:p>
         </p:txBody>
       </p:sp>
@@ -780,37 +420,38 @@
           <a:p>
             <a:pPr lvl="0"/>
             <a:r>
-              <a:rPr lang="en-US"/>
+              <a:rPr lang="en-US" smtClean="0"/>
               <a:t>Click to edit Master text styles</a:t>
             </a:r>
           </a:p>
           <a:p>
             <a:pPr lvl="1"/>
             <a:r>
-              <a:rPr lang="en-US"/>
+              <a:rPr lang="en-US" smtClean="0"/>
               <a:t>Second level</a:t>
             </a:r>
           </a:p>
           <a:p>
             <a:pPr lvl="2"/>
             <a:r>
-              <a:rPr lang="en-US"/>
+              <a:rPr lang="en-US" smtClean="0"/>
               <a:t>Third level</a:t>
             </a:r>
           </a:p>
           <a:p>
             <a:pPr lvl="3"/>
             <a:r>
-              <a:rPr lang="en-US"/>
+              <a:rPr lang="en-US" smtClean="0"/>
               <a:t>Fourth level</a:t>
             </a:r>
           </a:p>
           <a:p>
             <a:pPr lvl="4"/>
             <a:r>
-              <a:rPr lang="en-US"/>
+              <a:rPr lang="en-US" smtClean="0"/>
               <a:t>Fifth level</a:t>
             </a:r>
+            <a:endParaRPr lang="en-US"/>
           </a:p>
         </p:txBody>
       </p:sp>
@@ -831,7 +472,7 @@
           <a:p>
             <a:fld id="{5BCAD085-E8A6-8845-BD4E-CB4CCA059FC4}" type="datetimeFigureOut">
               <a:rPr lang="en-US" smtClean="0"/>
-              <a:t>5/16/2026</a:t>
+              <a:t>1/27/13</a:t>
             </a:fld>
             <a:endParaRPr lang="en-US"/>
           </a:p>
@@ -873,7 +514,7 @@
           <a:p>
             <a:fld id="{C1FF6DA9-008F-8B48-92A6-B652298478BF}" type="slidenum">
               <a:rPr lang="en-US" smtClean="0"/>
-              <a:t>‹N°›</a:t>
+              <a:t>‹#›</a:t>
             </a:fld>
             <a:endParaRPr lang="en-US"/>
           </a:p>
@@ -930,9 +571,10 @@
           <a:lstStyle/>
           <a:p>
             <a:r>
-              <a:rPr lang="en-US"/>
+              <a:rPr lang="en-US" smtClean="0"/>
               <a:t>Click to edit Master title style</a:t>
             </a:r>
+            <a:endParaRPr lang="en-US"/>
           </a:p>
         </p:txBody>
       </p:sp>
@@ -958,37 +600,38 @@
           <a:p>
             <a:pPr lvl="0"/>
             <a:r>
-              <a:rPr lang="en-US"/>
+              <a:rPr lang="en-US" smtClean="0"/>
               <a:t>Click to edit Master text styles</a:t>
             </a:r>
           </a:p>
           <a:p>
             <a:pPr lvl="1"/>
             <a:r>
-              <a:rPr lang="en-US"/>
+              <a:rPr lang="en-US" smtClean="0"/>
               <a:t>Second level</a:t>
             </a:r>
           </a:p>
           <a:p>
             <a:pPr lvl="2"/>
             <a:r>
-              <a:rPr lang="en-US"/>
+              <a:rPr lang="en-US" smtClean="0"/>
               <a:t>Third level</a:t>
             </a:r>
           </a:p>
           <a:p>
             <a:pPr lvl="3"/>
             <a:r>
-              <a:rPr lang="en-US"/>
+              <a:rPr lang="en-US" smtClean="0"/>
               <a:t>Fourth level</a:t>
             </a:r>
           </a:p>
           <a:p>
             <a:pPr lvl="4"/>
             <a:r>
-              <a:rPr lang="en-US"/>
+              <a:rPr lang="en-US" smtClean="0"/>
               <a:t>Fifth level</a:t>
             </a:r>
+            <a:endParaRPr lang="en-US"/>
           </a:p>
         </p:txBody>
       </p:sp>
@@ -1009,7 +652,7 @@
           <a:p>
             <a:fld id="{5BCAD085-E8A6-8845-BD4E-CB4CCA059FC4}" type="datetimeFigureOut">
               <a:rPr lang="en-US" smtClean="0"/>
-              <a:t>5/16/2026</a:t>
+              <a:t>1/27/13</a:t>
             </a:fld>
             <a:endParaRPr lang="en-US"/>
           </a:p>
@@ -1051,7 +694,7 @@
           <a:p>
             <a:fld id="{C1FF6DA9-008F-8B48-92A6-B652298478BF}" type="slidenum">
               <a:rPr lang="en-US" smtClean="0"/>
-              <a:t>‹N°›</a:t>
+              <a:t>‹#›</a:t>
             </a:fld>
             <a:endParaRPr lang="en-US"/>
           </a:p>
@@ -1103,9 +746,10 @@
           <a:lstStyle/>
           <a:p>
             <a:r>
-              <a:rPr lang="en-US"/>
+              <a:rPr lang="en-US" smtClean="0"/>
               <a:t>Click to edit Master title style</a:t>
             </a:r>
+            <a:endParaRPr lang="en-US"/>
           </a:p>
         </p:txBody>
       </p:sp>
@@ -1126,37 +770,38 @@
           <a:p>
             <a:pPr lvl="0"/>
             <a:r>
-              <a:rPr lang="en-US"/>
+              <a:rPr lang="en-US" smtClean="0"/>
               <a:t>Click to edit Master text styles</a:t>
             </a:r>
           </a:p>
           <a:p>
             <a:pPr lvl="1"/>
             <a:r>
-              <a:rPr lang="en-US"/>
+              <a:rPr lang="en-US" smtClean="0"/>
               <a:t>Second level</a:t>
             </a:r>
           </a:p>
           <a:p>
             <a:pPr lvl="2"/>
             <a:r>
-              <a:rPr lang="en-US"/>
+              <a:rPr lang="en-US" smtClean="0"/>
               <a:t>Third level</a:t>
             </a:r>
           </a:p>
           <a:p>
             <a:pPr lvl="3"/>
             <a:r>
-              <a:rPr lang="en-US"/>
+              <a:rPr lang="en-US" smtClean="0"/>
               <a:t>Fourth level</a:t>
             </a:r>
           </a:p>
           <a:p>
             <a:pPr lvl="4"/>
             <a:r>
-              <a:rPr lang="en-US"/>
+              <a:rPr lang="en-US" smtClean="0"/>
               <a:t>Fifth level</a:t>
             </a:r>
+            <a:endParaRPr lang="en-US"/>
           </a:p>
         </p:txBody>
       </p:sp>
@@ -1177,7 +822,7 @@
           <a:p>
             <a:fld id="{5BCAD085-E8A6-8845-BD4E-CB4CCA059FC4}" type="datetimeFigureOut">
               <a:rPr lang="en-US" smtClean="0"/>
-              <a:t>5/16/2026</a:t>
+              <a:t>1/27/13</a:t>
             </a:fld>
             <a:endParaRPr lang="en-US"/>
           </a:p>
@@ -1219,7 +864,7 @@
           <a:p>
             <a:fld id="{C1FF6DA9-008F-8B48-92A6-B652298478BF}" type="slidenum">
               <a:rPr lang="en-US" smtClean="0"/>
-              <a:t>‹N°›</a:t>
+              <a:t>‹#›</a:t>
             </a:fld>
             <a:endParaRPr lang="en-US"/>
           </a:p>
@@ -1280,9 +925,10 @@
           </a:lstStyle>
           <a:p>
             <a:r>
-              <a:rPr lang="en-US"/>
+              <a:rPr lang="en-US" smtClean="0"/>
               <a:t>Click to edit Master title style</a:t>
             </a:r>
+            <a:endParaRPr lang="en-US"/>
           </a:p>
         </p:txBody>
       </p:sp>
@@ -1399,7 +1045,7 @@
           <a:p>
             <a:pPr lvl="0"/>
             <a:r>
-              <a:rPr lang="en-US"/>
+              <a:rPr lang="en-US" smtClean="0"/>
               <a:t>Click to edit Master text styles</a:t>
             </a:r>
           </a:p>
@@ -1422,7 +1068,7 @@
           <a:p>
             <a:fld id="{5BCAD085-E8A6-8845-BD4E-CB4CCA059FC4}" type="datetimeFigureOut">
               <a:rPr lang="en-US" smtClean="0"/>
-              <a:t>5/16/2026</a:t>
+              <a:t>1/27/13</a:t>
             </a:fld>
             <a:endParaRPr lang="en-US"/>
           </a:p>
@@ -1464,7 +1110,7 @@
           <a:p>
             <a:fld id="{C1FF6DA9-008F-8B48-92A6-B652298478BF}" type="slidenum">
               <a:rPr lang="en-US" smtClean="0"/>
-              <a:t>‹N°›</a:t>
+              <a:t>‹#›</a:t>
             </a:fld>
             <a:endParaRPr lang="en-US"/>
           </a:p>
@@ -1516,9 +1162,10 @@
           <a:lstStyle/>
           <a:p>
             <a:r>
-              <a:rPr lang="en-US"/>
+              <a:rPr lang="en-US" smtClean="0"/>
               <a:t>Click to edit Master title style</a:t>
             </a:r>
+            <a:endParaRPr lang="en-US"/>
           </a:p>
         </p:txBody>
       </p:sp>
@@ -1572,37 +1219,38 @@
           <a:p>
             <a:pPr lvl="0"/>
             <a:r>
-              <a:rPr lang="en-US"/>
+              <a:rPr lang="en-US" smtClean="0"/>
               <a:t>Click to edit Master text styles</a:t>
             </a:r>
           </a:p>
           <a:p>
             <a:pPr lvl="1"/>
             <a:r>
-              <a:rPr lang="en-US"/>
+              <a:rPr lang="en-US" smtClean="0"/>
               <a:t>Second level</a:t>
             </a:r>
           </a:p>
           <a:p>
             <a:pPr lvl="2"/>
             <a:r>
-              <a:rPr lang="en-US"/>
+              <a:rPr lang="en-US" smtClean="0"/>
               <a:t>Third level</a:t>
             </a:r>
           </a:p>
           <a:p>
             <a:pPr lvl="3"/>
             <a:r>
-              <a:rPr lang="en-US"/>
+              <a:rPr lang="en-US" smtClean="0"/>
               <a:t>Fourth level</a:t>
             </a:r>
           </a:p>
           <a:p>
             <a:pPr lvl="4"/>
             <a:r>
-              <a:rPr lang="en-US"/>
+              <a:rPr lang="en-US" smtClean="0"/>
               <a:t>Fifth level</a:t>
             </a:r>
+            <a:endParaRPr lang="en-US"/>
           </a:p>
         </p:txBody>
       </p:sp>
@@ -1656,37 +1304,38 @@
           <a:p>
             <a:pPr lvl="0"/>
             <a:r>
-              <a:rPr lang="en-US"/>
+              <a:rPr lang="en-US" smtClean="0"/>
               <a:t>Click to edit Master text styles</a:t>
             </a:r>
           </a:p>
           <a:p>
             <a:pPr lvl="1"/>
             <a:r>
-              <a:rPr lang="en-US"/>
+              <a:rPr lang="en-US" smtClean="0"/>
               <a:t>Second level</a:t>
             </a:r>
           </a:p>
           <a:p>
             <a:pPr lvl="2"/>
             <a:r>
-              <a:rPr lang="en-US"/>
+              <a:rPr lang="en-US" smtClean="0"/>
               <a:t>Third level</a:t>
             </a:r>
           </a:p>
           <a:p>
             <a:pPr lvl="3"/>
             <a:r>
-              <a:rPr lang="en-US"/>
+              <a:rPr lang="en-US" smtClean="0"/>
               <a:t>Fourth level</a:t>
             </a:r>
           </a:p>
           <a:p>
             <a:pPr lvl="4"/>
             <a:r>
-              <a:rPr lang="en-US"/>
+              <a:rPr lang="en-US" smtClean="0"/>
               <a:t>Fifth level</a:t>
             </a:r>
+            <a:endParaRPr lang="en-US"/>
           </a:p>
         </p:txBody>
       </p:sp>
@@ -1707,7 +1356,7 @@
           <a:p>
             <a:fld id="{5BCAD085-E8A6-8845-BD4E-CB4CCA059FC4}" type="datetimeFigureOut">
               <a:rPr lang="en-US" smtClean="0"/>
-              <a:t>5/16/2026</a:t>
+              <a:t>1/27/13</a:t>
             </a:fld>
             <a:endParaRPr lang="en-US"/>
           </a:p>
@@ -1749,7 +1398,7 @@
           <a:p>
             <a:fld id="{C1FF6DA9-008F-8B48-92A6-B652298478BF}" type="slidenum">
               <a:rPr lang="en-US" smtClean="0"/>
-              <a:t>‹N°›</a:t>
+              <a:t>‹#›</a:t>
             </a:fld>
             <a:endParaRPr lang="en-US"/>
           </a:p>
@@ -1805,9 +1454,10 @@
           </a:lstStyle>
           <a:p>
             <a:r>
-              <a:rPr lang="en-US"/>
+              <a:rPr lang="en-US" smtClean="0"/>
               <a:t>Click to edit Master title style</a:t>
             </a:r>
+            <a:endParaRPr lang="en-US"/>
           </a:p>
         </p:txBody>
       </p:sp>
@@ -1870,7 +1520,7 @@
           <a:p>
             <a:pPr lvl="0"/>
             <a:r>
-              <a:rPr lang="en-US"/>
+              <a:rPr lang="en-US" smtClean="0"/>
               <a:t>Click to edit Master text styles</a:t>
             </a:r>
           </a:p>
@@ -1926,37 +1576,38 @@
           <a:p>
             <a:pPr lvl="0"/>
             <a:r>
-              <a:rPr lang="en-US"/>
+              <a:rPr lang="en-US" smtClean="0"/>
               <a:t>Click to edit Master text styles</a:t>
             </a:r>
           </a:p>
           <a:p>
             <a:pPr lvl="1"/>
             <a:r>
-              <a:rPr lang="en-US"/>
+              <a:rPr lang="en-US" smtClean="0"/>
               <a:t>Second level</a:t>
             </a:r>
           </a:p>
           <a:p>
             <a:pPr lvl="2"/>
             <a:r>
-              <a:rPr lang="en-US"/>
+              <a:rPr lang="en-US" smtClean="0"/>
               <a:t>Third level</a:t>
             </a:r>
           </a:p>
           <a:p>
             <a:pPr lvl="3"/>
             <a:r>
-              <a:rPr lang="en-US"/>
+              <a:rPr lang="en-US" smtClean="0"/>
               <a:t>Fourth level</a:t>
             </a:r>
           </a:p>
           <a:p>
             <a:pPr lvl="4"/>
             <a:r>
-              <a:rPr lang="en-US"/>
+              <a:rPr lang="en-US" smtClean="0"/>
               <a:t>Fifth level</a:t>
             </a:r>
+            <a:endParaRPr lang="en-US"/>
           </a:p>
         </p:txBody>
       </p:sp>
@@ -2019,7 +1670,7 @@
           <a:p>
             <a:pPr lvl="0"/>
             <a:r>
-              <a:rPr lang="en-US"/>
+              <a:rPr lang="en-US" smtClean="0"/>
               <a:t>Click to edit Master text styles</a:t>
             </a:r>
           </a:p>
@@ -2075,37 +1726,38 @@
           <a:p>
             <a:pPr lvl="0"/>
             <a:r>
-              <a:rPr lang="en-US"/>
+              <a:rPr lang="en-US" smtClean="0"/>
               <a:t>Click to edit Master text styles</a:t>
             </a:r>
           </a:p>
           <a:p>
             <a:pPr lvl="1"/>
             <a:r>
-              <a:rPr lang="en-US"/>
+              <a:rPr lang="en-US" smtClean="0"/>
               <a:t>Second level</a:t>
             </a:r>
           </a:p>
           <a:p>
             <a:pPr lvl="2"/>
             <a:r>
-              <a:rPr lang="en-US"/>
+              <a:rPr lang="en-US" smtClean="0"/>
               <a:t>Third level</a:t>
             </a:r>
           </a:p>
           <a:p>
             <a:pPr lvl="3"/>
             <a:r>
-              <a:rPr lang="en-US"/>
+              <a:rPr lang="en-US" smtClean="0"/>
               <a:t>Fourth level</a:t>
             </a:r>
           </a:p>
           <a:p>
             <a:pPr lvl="4"/>
             <a:r>
-              <a:rPr lang="en-US"/>
+              <a:rPr lang="en-US" smtClean="0"/>
               <a:t>Fifth level</a:t>
             </a:r>
+            <a:endParaRPr lang="en-US"/>
           </a:p>
         </p:txBody>
       </p:sp>
@@ -2126,7 +1778,7 @@
           <a:p>
             <a:fld id="{5BCAD085-E8A6-8845-BD4E-CB4CCA059FC4}" type="datetimeFigureOut">
               <a:rPr lang="en-US" smtClean="0"/>
-              <a:t>5/16/2026</a:t>
+              <a:t>1/27/13</a:t>
             </a:fld>
             <a:endParaRPr lang="en-US"/>
           </a:p>
@@ -2168,7 +1820,7 @@
           <a:p>
             <a:fld id="{C1FF6DA9-008F-8B48-92A6-B652298478BF}" type="slidenum">
               <a:rPr lang="en-US" smtClean="0"/>
-              <a:t>‹N°›</a:t>
+              <a:t>‹#›</a:t>
             </a:fld>
             <a:endParaRPr lang="en-US"/>
           </a:p>
@@ -2220,9 +1872,10 @@
           <a:lstStyle/>
           <a:p>
             <a:r>
-              <a:rPr lang="en-US"/>
+              <a:rPr lang="en-US" smtClean="0"/>
               <a:t>Click to edit Master title style</a:t>
             </a:r>
+            <a:endParaRPr lang="en-US"/>
           </a:p>
         </p:txBody>
       </p:sp>
@@ -2243,7 +1896,7 @@
           <a:p>
             <a:fld id="{5BCAD085-E8A6-8845-BD4E-CB4CCA059FC4}" type="datetimeFigureOut">
               <a:rPr lang="en-US" smtClean="0"/>
-              <a:t>5/16/2026</a:t>
+              <a:t>1/27/13</a:t>
             </a:fld>
             <a:endParaRPr lang="en-US"/>
           </a:p>
@@ -2285,7 +1938,7 @@
           <a:p>
             <a:fld id="{C1FF6DA9-008F-8B48-92A6-B652298478BF}" type="slidenum">
               <a:rPr lang="en-US" smtClean="0"/>
-              <a:t>‹N°›</a:t>
+              <a:t>‹#›</a:t>
             </a:fld>
             <a:endParaRPr lang="en-US"/>
           </a:p>
@@ -2338,7 +1991,7 @@
           <a:p>
             <a:fld id="{5BCAD085-E8A6-8845-BD4E-CB4CCA059FC4}" type="datetimeFigureOut">
               <a:rPr lang="en-US" smtClean="0"/>
-              <a:t>5/16/2026</a:t>
+              <a:t>1/27/13</a:t>
             </a:fld>
             <a:endParaRPr lang="en-US"/>
           </a:p>
@@ -2380,7 +2033,7 @@
           <a:p>
             <a:fld id="{C1FF6DA9-008F-8B48-92A6-B652298478BF}" type="slidenum">
               <a:rPr lang="en-US" smtClean="0"/>
-              <a:t>‹N°›</a:t>
+              <a:t>‹#›</a:t>
             </a:fld>
             <a:endParaRPr lang="en-US"/>
           </a:p>
@@ -2441,9 +2094,10 @@
           </a:lstStyle>
           <a:p>
             <a:r>
-              <a:rPr lang="en-US"/>
+              <a:rPr lang="en-US" smtClean="0"/>
               <a:t>Click to edit Master title style</a:t>
             </a:r>
+            <a:endParaRPr lang="en-US"/>
           </a:p>
         </p:txBody>
       </p:sp>
@@ -2497,37 +2151,38 @@
           <a:p>
             <a:pPr lvl="0"/>
             <a:r>
-              <a:rPr lang="en-US"/>
+              <a:rPr lang="en-US" smtClean="0"/>
               <a:t>Click to edit Master text styles</a:t>
             </a:r>
           </a:p>
           <a:p>
             <a:pPr lvl="1"/>
             <a:r>
-              <a:rPr lang="en-US"/>
+              <a:rPr lang="en-US" smtClean="0"/>
               <a:t>Second level</a:t>
             </a:r>
           </a:p>
           <a:p>
             <a:pPr lvl="2"/>
             <a:r>
-              <a:rPr lang="en-US"/>
+              <a:rPr lang="en-US" smtClean="0"/>
               <a:t>Third level</a:t>
             </a:r>
           </a:p>
           <a:p>
             <a:pPr lvl="3"/>
             <a:r>
-              <a:rPr lang="en-US"/>
+              <a:rPr lang="en-US" smtClean="0"/>
               <a:t>Fourth level</a:t>
             </a:r>
           </a:p>
           <a:p>
             <a:pPr lvl="4"/>
             <a:r>
-              <a:rPr lang="en-US"/>
+              <a:rPr lang="en-US" smtClean="0"/>
               <a:t>Fifth level</a:t>
             </a:r>
+            <a:endParaRPr lang="en-US"/>
           </a:p>
         </p:txBody>
       </p:sp>
@@ -2590,7 +2245,7 @@
           <a:p>
             <a:pPr lvl="0"/>
             <a:r>
-              <a:rPr lang="en-US"/>
+              <a:rPr lang="en-US" smtClean="0"/>
               <a:t>Click to edit Master text styles</a:t>
             </a:r>
           </a:p>
@@ -2613,7 +2268,7 @@
           <a:p>
             <a:fld id="{5BCAD085-E8A6-8845-BD4E-CB4CCA059FC4}" type="datetimeFigureOut">
               <a:rPr lang="en-US" smtClean="0"/>
-              <a:t>5/16/2026</a:t>
+              <a:t>1/27/13</a:t>
             </a:fld>
             <a:endParaRPr lang="en-US"/>
           </a:p>
@@ -2655,7 +2310,7 @@
           <a:p>
             <a:fld id="{C1FF6DA9-008F-8B48-92A6-B652298478BF}" type="slidenum">
               <a:rPr lang="en-US" smtClean="0"/>
-              <a:t>‹N°›</a:t>
+              <a:t>‹#›</a:t>
             </a:fld>
             <a:endParaRPr lang="en-US"/>
           </a:p>
@@ -2716,9 +2371,10 @@
           </a:lstStyle>
           <a:p>
             <a:r>
-              <a:rPr lang="en-US"/>
+              <a:rPr lang="en-US" smtClean="0"/>
               <a:t>Click to edit Master title style</a:t>
             </a:r>
+            <a:endParaRPr lang="en-US"/>
           </a:p>
         </p:txBody>
       </p:sp>
@@ -2842,7 +2498,7 @@
           <a:p>
             <a:pPr lvl="0"/>
             <a:r>
-              <a:rPr lang="en-US"/>
+              <a:rPr lang="en-US" smtClean="0"/>
               <a:t>Click to edit Master text styles</a:t>
             </a:r>
           </a:p>
@@ -2865,7 +2521,7 @@
           <a:p>
             <a:fld id="{5BCAD085-E8A6-8845-BD4E-CB4CCA059FC4}" type="datetimeFigureOut">
               <a:rPr lang="en-US" smtClean="0"/>
-              <a:t>5/16/2026</a:t>
+              <a:t>1/27/13</a:t>
             </a:fld>
             <a:endParaRPr lang="en-US"/>
           </a:p>
@@ -2907,7 +2563,7 @@
           <a:p>
             <a:fld id="{C1FF6DA9-008F-8B48-92A6-B652298478BF}" type="slidenum">
               <a:rPr lang="en-US" smtClean="0"/>
-              <a:t>‹N°›</a:t>
+              <a:t>‹#›</a:t>
             </a:fld>
             <a:endParaRPr lang="en-US"/>
           </a:p>
@@ -2974,9 +2630,10 @@
           <a:lstStyle/>
           <a:p>
             <a:r>
-              <a:rPr lang="en-US"/>
+              <a:rPr lang="en-US" smtClean="0"/>
               <a:t>Click to edit Master title style</a:t>
             </a:r>
+            <a:endParaRPr lang="en-US"/>
           </a:p>
         </p:txBody>
       </p:sp>
@@ -3007,37 +2664,38 @@
           <a:p>
             <a:pPr lvl="0"/>
             <a:r>
-              <a:rPr lang="en-US"/>
+              <a:rPr lang="en-US" smtClean="0"/>
               <a:t>Click to edit Master text styles</a:t>
             </a:r>
           </a:p>
           <a:p>
             <a:pPr lvl="1"/>
             <a:r>
-              <a:rPr lang="en-US"/>
+              <a:rPr lang="en-US" smtClean="0"/>
               <a:t>Second level</a:t>
             </a:r>
           </a:p>
           <a:p>
             <a:pPr lvl="2"/>
             <a:r>
-              <a:rPr lang="en-US"/>
+              <a:rPr lang="en-US" smtClean="0"/>
               <a:t>Third level</a:t>
             </a:r>
           </a:p>
           <a:p>
             <a:pPr lvl="3"/>
             <a:r>
-              <a:rPr lang="en-US"/>
+              <a:rPr lang="en-US" smtClean="0"/>
               <a:t>Fourth level</a:t>
             </a:r>
           </a:p>
           <a:p>
             <a:pPr lvl="4"/>
             <a:r>
-              <a:rPr lang="en-US"/>
+              <a:rPr lang="en-US" smtClean="0"/>
               <a:t>Fifth level</a:t>
             </a:r>
+            <a:endParaRPr lang="en-US"/>
           </a:p>
         </p:txBody>
       </p:sp>
@@ -3076,7 +2734,7 @@
           <a:p>
             <a:fld id="{5BCAD085-E8A6-8845-BD4E-CB4CCA059FC4}" type="datetimeFigureOut">
               <a:rPr lang="en-US" smtClean="0"/>
-              <a:t>5/16/2026</a:t>
+              <a:t>1/27/13</a:t>
             </a:fld>
             <a:endParaRPr lang="en-US"/>
           </a:p>
@@ -3154,7 +2812,7 @@
           <a:p>
             <a:fld id="{C1FF6DA9-008F-8B48-92A6-B652298478BF}" type="slidenum">
               <a:rPr lang="en-US" smtClean="0"/>
-              <a:t>‹N°›</a:t>
+              <a:t>‹#›</a:t>
             </a:fld>
             <a:endParaRPr lang="en-US"/>
           </a:p>
@@ -3437,6 +3095,14 @@
 <file path=ppt/slides/slide1.xml><?xml version="1.0" encoding="utf-8"?>
 <p:sld xmlns:a="http://schemas.openxmlformats.org/drawingml/2006/main" xmlns:p="http://schemas.openxmlformats.org/presentationml/2006/main" xmlns:r="http://schemas.openxmlformats.org/officeDocument/2006/relationships">
   <p:cSld>
+    <p:bg>
+      <p:bgPr>
+        <a:solidFill>
+          <a:srgbClr val="1A5C33"/>
+        </a:solidFill>
+        <a:effectLst/>
+      </p:bgPr>
+    </p:bg>
     <p:spTree>
       <p:nvGrpSpPr>
         <p:cNvPr id="1" name=""/>
@@ -3446,56 +3112,14 @@
       <p:grpSpPr/>
       <p:sp>
         <p:nvSpPr>
-          <p:cNvPr id="2" name="Title 1"/>
-          <p:cNvSpPr>
-            <a:spLocks noGrp="1"/>
-          </p:cNvSpPr>
-          <p:nvPr>
-            <p:ph type="ctrTitle"/>
-          </p:nvPr>
-        </p:nvSpPr>
-        <p:spPr/>
-        <p:txBody>
-          <a:bodyPr/>
-          <a:lstStyle/>
-          <a:p>
-            <a:r>
-              <a:t>Informatique et Architecture de l'Ordinateur</a:t>
-            </a:r>
-          </a:p>
-        </p:txBody>
-      </p:sp>
-      <p:sp>
-        <p:nvSpPr>
-          <p:cNvPr id="3" name="Subtitle 2"/>
-          <p:cNvSpPr>
-            <a:spLocks noGrp="1"/>
-          </p:cNvSpPr>
-          <p:nvPr>
-            <p:ph type="subTitle" idx="1"/>
-          </p:nvPr>
-        </p:nvSpPr>
-        <p:spPr/>
-        <p:txBody>
-          <a:bodyPr/>
-          <a:lstStyle/>
-          <a:p>
-            <a:r>
-              <a:t>Cours TIC 02 | 1h30 (90 min) | BELACEL Madani</a:t>
-            </a:r>
-          </a:p>
-        </p:txBody>
-      </p:sp>
-      <p:sp>
-        <p:nvSpPr>
-          <p:cNvPr id="4" name="TextBox 3"/>
+          <p:cNvPr id="2" name="TextBox 1"/>
           <p:cNvSpPr txBox="1"/>
           <p:nvPr/>
         </p:nvSpPr>
         <p:spPr>
           <a:xfrm>
-            <a:off x="365760" y="6446520"/>
-            <a:ext cx="8412480" cy="320040"/>
+            <a:off x="731520" y="1371600"/>
+            <a:ext cx="7680960" cy="1371600"/>
           </a:xfrm>
           <a:prstGeom prst="rect">
             <a:avLst/>
@@ -3503,20 +3127,90 @@
           <a:noFill/>
         </p:spPr>
         <p:txBody>
-          <a:bodyPr wrap="none">
+          <a:bodyPr wrap="square">
             <a:spAutoFit/>
           </a:bodyPr>
           <a:lstStyle/>
           <a:p>
             <a:pPr algn="ctr">
-              <a:defRPr sz="900">
-                <a:solidFill>
-                  <a:srgbClr val="404040"/>
-                </a:solidFill>
-              </a:defRPr>
-            </a:pPr>
-            <a:r>
-              <a:t>Cours TIC 02  •  Diapositive 1/10</a:t>
+              <a:defRPr sz="3200" b="1">
+                <a:solidFill>
+                  <a:srgbClr val="FFFFFF"/>
+                </a:solidFill>
+              </a:defRPr>
+            </a:pPr>
+            <a:r>
+              <a:t>Cours TIC 02 — Informatique et Architecture de l'Ordinateur</a:t>
+            </a:r>
+          </a:p>
+        </p:txBody>
+      </p:sp>
+      <p:sp>
+        <p:nvSpPr>
+          <p:cNvPr id="3" name="TextBox 2"/>
+          <p:cNvSpPr txBox="1"/>
+          <p:nvPr/>
+        </p:nvSpPr>
+        <p:spPr>
+          <a:xfrm>
+            <a:off x="731520" y="2926080"/>
+            <a:ext cx="7680960" cy="548640"/>
+          </a:xfrm>
+          <a:prstGeom prst="rect">
+            <a:avLst/>
+          </a:prstGeom>
+          <a:noFill/>
+        </p:spPr>
+        <p:txBody>
+          <a:bodyPr wrap="square">
+            <a:spAutoFit/>
+          </a:bodyPr>
+          <a:lstStyle/>
+          <a:p>
+            <a:pPr algn="ctr">
+              <a:defRPr sz="2000" b="0">
+                <a:solidFill>
+                  <a:srgbClr val="C5D9C7"/>
+                </a:solidFill>
+              </a:defRPr>
+            </a:pPr>
+            <a:r>
+              <a:t>Module TIC — Dr. BELACEL Madani</a:t>
+            </a:r>
+          </a:p>
+        </p:txBody>
+      </p:sp>
+      <p:sp>
+        <p:nvSpPr>
+          <p:cNvPr id="4" name="TextBox 3"/>
+          <p:cNvSpPr txBox="1"/>
+          <p:nvPr/>
+        </p:nvSpPr>
+        <p:spPr>
+          <a:xfrm>
+            <a:off x="731520" y="3657600"/>
+            <a:ext cx="7680960" cy="457200"/>
+          </a:xfrm>
+          <a:prstGeom prst="rect">
+            <a:avLst/>
+          </a:prstGeom>
+          <a:noFill/>
+        </p:spPr>
+        <p:txBody>
+          <a:bodyPr wrap="square">
+            <a:spAutoFit/>
+          </a:bodyPr>
+          <a:lstStyle/>
+          <a:p>
+            <a:pPr algn="ctr">
+              <a:defRPr sz="1600" b="0">
+                <a:solidFill>
+                  <a:srgbClr val="A0CFA0"/>
+                </a:solidFill>
+              </a:defRPr>
+            </a:pPr>
+            <a:r>
+              <a:t>Université de Mostaganem — MCB</a:t>
             </a:r>
           </a:p>
         </p:txBody>
@@ -3526,15 +3220,20 @@
   <p:clrMapOvr>
     <a:masterClrMapping/>
   </p:clrMapOvr>
-  <p:transition spd="med">
-    <p:fade/>
-  </p:transition>
 </p:sld>
 </file>
 
 <file path=ppt/slides/slide10.xml><?xml version="1.0" encoding="utf-8"?>
 <p:sld xmlns:a="http://schemas.openxmlformats.org/drawingml/2006/main" xmlns:p="http://schemas.openxmlformats.org/presentationml/2006/main" xmlns:r="http://schemas.openxmlformats.org/officeDocument/2006/relationships">
   <p:cSld>
+    <p:bg>
+      <p:bgPr>
+        <a:solidFill>
+          <a:srgbClr val="FFFFFF"/>
+        </a:solidFill>
+        <a:effectLst/>
+      </p:bgPr>
+    </p:bg>
     <p:spTree>
       <p:nvGrpSpPr>
         <p:cNvPr id="1" name=""/>
@@ -3544,83 +3243,57 @@
       <p:grpSpPr/>
       <p:sp>
         <p:nvSpPr>
-          <p:cNvPr id="2" name="Title 1"/>
-          <p:cNvSpPr>
-            <a:spLocks noGrp="1"/>
-          </p:cNvSpPr>
-          <p:nvPr>
-            <p:ph type="title"/>
-          </p:nvPr>
-        </p:nvSpPr>
-        <p:spPr/>
-        <p:txBody>
-          <a:bodyPr/>
-          <a:lstStyle/>
-          <a:p>
-            <a:r>
-              <a:t>Conclusion</a:t>
-            </a:r>
-          </a:p>
-        </p:txBody>
-      </p:sp>
-      <p:sp>
-        <p:nvSpPr>
-          <p:cNvPr id="3" name="Content Placeholder 2"/>
-          <p:cNvSpPr>
-            <a:spLocks noGrp="1"/>
-          </p:cNvSpPr>
-          <p:nvPr>
-            <p:ph idx="1"/>
-          </p:nvPr>
-        </p:nvSpPr>
-        <p:spPr/>
-        <p:txBody>
-          <a:bodyPr/>
-          <a:lstStyle/>
-          <a:p>
-            <a:pPr>
-              <a:defRPr sz="2000"/>
-            </a:pPr>
-            <a:r>
-              <a:t>✅ Autonomie numérique</a:t>
-            </a:r>
-          </a:p>
-          <a:p>
-            <a:pPr>
-              <a:defRPr sz="2000"/>
-            </a:pPr>
-            <a:r>
-              <a:t>✅ TD 02 — 1h30</a:t>
-            </a:r>
-          </a:p>
-          <a:p>
-            <a:pPr>
-              <a:defRPr sz="2000"/>
-            </a:pPr>
-            <a:r>
-              <a:t>✅ Prochain : Windows</a:t>
-            </a:r>
-          </a:p>
-          <a:p>
-            <a:pPr>
-              <a:defRPr sz="2000"/>
-            </a:pPr>
-            <a:r>
-              <a:t>✅ Questions ?</a:t>
-            </a:r>
-          </a:p>
-        </p:txBody>
-      </p:sp>
-      <p:sp>
-        <p:nvSpPr>
-          <p:cNvPr id="4" name="TextBox 3"/>
+          <p:cNvPr id="2" name="Rectangle 1"/>
+          <p:cNvSpPr/>
+          <p:nvPr/>
+        </p:nvSpPr>
+        <p:spPr>
+          <a:xfrm>
+            <a:off x="0" y="0"/>
+            <a:ext cx="109728" cy="6858000"/>
+          </a:xfrm>
+          <a:prstGeom prst="rect">
+            <a:avLst/>
+          </a:prstGeom>
+          <a:solidFill>
+            <a:srgbClr val="2C6E49"/>
+          </a:solidFill>
+          <a:ln>
+            <a:noFill/>
+          </a:ln>
+        </p:spPr>
+        <p:style>
+          <a:lnRef idx="1">
+            <a:schemeClr val="accent1"/>
+          </a:lnRef>
+          <a:fillRef idx="3">
+            <a:schemeClr val="accent1"/>
+          </a:fillRef>
+          <a:effectRef idx="2">
+            <a:schemeClr val="accent1"/>
+          </a:effectRef>
+          <a:fontRef idx="minor">
+            <a:schemeClr val="lt1"/>
+          </a:fontRef>
+        </p:style>
+        <p:txBody>
+          <a:bodyPr rtlCol="0" anchor="ctr"/>
+          <a:lstStyle/>
+          <a:p>
+            <a:pPr algn="ctr"/>
+          </a:p>
+        </p:txBody>
+      </p:sp>
+      <p:sp>
+        <p:nvSpPr>
+          <p:cNvPr id="3" name="TextBox 2"/>
           <p:cNvSpPr txBox="1"/>
           <p:nvPr/>
         </p:nvSpPr>
         <p:spPr>
           <a:xfrm>
-            <a:off x="365760" y="6446520"/>
-            <a:ext cx="8412480" cy="320040"/>
+            <a:off x="457200" y="365760"/>
+            <a:ext cx="8229600" cy="640080"/>
           </a:xfrm>
           <a:prstGeom prst="rect">
             <a:avLst/>
@@ -3628,20 +3301,73 @@
           <a:noFill/>
         </p:spPr>
         <p:txBody>
-          <a:bodyPr wrap="none">
+          <a:bodyPr wrap="square">
             <a:spAutoFit/>
           </a:bodyPr>
           <a:lstStyle/>
           <a:p>
-            <a:pPr algn="ctr">
-              <a:defRPr sz="900">
-                <a:solidFill>
-                  <a:srgbClr val="404040"/>
-                </a:solidFill>
-              </a:defRPr>
-            </a:pPr>
-            <a:r>
-              <a:t>Cours TIC 02  •  Diapositive 10/10</a:t>
+            <a:pPr algn="l">
+              <a:defRPr sz="2200" b="1">
+                <a:solidFill>
+                  <a:srgbClr val="1A5C33"/>
+                </a:solidFill>
+              </a:defRPr>
+            </a:pPr>
+            <a:r>
+              <a:t>3. Modèle de von Neumann(15 min)</a:t>
+            </a:r>
+          </a:p>
+        </p:txBody>
+      </p:sp>
+      <p:sp>
+        <p:nvSpPr>
+          <p:cNvPr id="4" name="TextBox 3"/>
+          <p:cNvSpPr txBox="1"/>
+          <p:nvPr/>
+        </p:nvSpPr>
+        <p:spPr>
+          <a:xfrm>
+            <a:off x="457200" y="1371600"/>
+            <a:ext cx="7772400" cy="4572000"/>
+          </a:xfrm>
+          <a:prstGeom prst="rect">
+            <a:avLst/>
+          </a:prstGeom>
+          <a:noFill/>
+        </p:spPr>
+        <p:txBody>
+          <a:bodyPr wrap="square">
+            <a:spAutoFit/>
+          </a:bodyPr>
+          <a:lstStyle/>
+          <a:p>
+            <a:pPr>
+              <a:spcAft>
+                <a:spcPts val="600"/>
+              </a:spcAft>
+              <a:defRPr sz="1400">
+                <a:solidFill>
+                  <a:srgbClr val="222222"/>
+                </a:solidFill>
+              </a:defRPr>
+            </a:pPr>
+            <a:r>
+              <a:t>• Un ordinateur est une machine programmable capable de : recevoir des données (Entrée), les traiter (CPU), les stocker temporairement (RAM), les restituer (Sortie) et les conserver (Stockage secondaire).</a:t>
+            </a:r>
+          </a:p>
+          <a:p>
+            <a:pPr>
+              <a:spcAft>
+                <a:spcPts val="600"/>
+              </a:spcAft>
+              <a:defRPr sz="1400">
+                <a:solidFill>
+                  <a:srgbClr val="222222"/>
+                </a:solidFill>
+              </a:defRPr>
+            </a:pPr>
+            <a:r>
+              <a:t>• Ce fonctionnement suit lemodèle de von Neumann(1945), toujours utilisé aujourd'hui.</a:t>
             </a:r>
           </a:p>
         </p:txBody>
@@ -3651,15 +3377,20 @@
   <p:clrMapOvr>
     <a:masterClrMapping/>
   </p:clrMapOvr>
-  <p:transition spd="med">
-    <p:fade/>
-  </p:transition>
 </p:sld>
 </file>
 
-<file path=ppt/slides/slide2.xml><?xml version="1.0" encoding="utf-8"?>
+<file path=ppt/slides/slide11.xml><?xml version="1.0" encoding="utf-8"?>
 <p:sld xmlns:a="http://schemas.openxmlformats.org/drawingml/2006/main" xmlns:p="http://schemas.openxmlformats.org/presentationml/2006/main" xmlns:r="http://schemas.openxmlformats.org/officeDocument/2006/relationships">
   <p:cSld>
+    <p:bg>
+      <p:bgPr>
+        <a:solidFill>
+          <a:srgbClr val="FFFFFF"/>
+        </a:solidFill>
+        <a:effectLst/>
+      </p:bgPr>
+    </p:bg>
     <p:spTree>
       <p:nvGrpSpPr>
         <p:cNvPr id="1" name=""/>
@@ -3669,83 +3400,57 @@
       <p:grpSpPr/>
       <p:sp>
         <p:nvSpPr>
-          <p:cNvPr id="2" name="Title 1"/>
-          <p:cNvSpPr>
-            <a:spLocks noGrp="1"/>
-          </p:cNvSpPr>
-          <p:nvPr>
-            <p:ph type="title"/>
-          </p:nvPr>
-        </p:nvSpPr>
-        <p:spPr/>
-        <p:txBody>
-          <a:bodyPr/>
-          <a:lstStyle/>
-          <a:p>
-            <a:r>
-              <a:t>Objectifs pédagogiques</a:t>
-            </a:r>
-          </a:p>
-        </p:txBody>
-      </p:sp>
-      <p:sp>
-        <p:nvSpPr>
-          <p:cNvPr id="3" name="Content Placeholder 2"/>
-          <p:cNvSpPr>
-            <a:spLocks noGrp="1"/>
-          </p:cNvSpPr>
-          <p:nvPr>
-            <p:ph idx="1"/>
-          </p:nvPr>
-        </p:nvSpPr>
-        <p:spPr/>
-        <p:txBody>
-          <a:bodyPr/>
-          <a:lstStyle/>
-          <a:p>
-            <a:pPr>
-              <a:defRPr sz="2000"/>
-            </a:pPr>
-            <a:r>
-              <a:t>🎯 Définir informatique, hardware, software</a:t>
-            </a:r>
-          </a:p>
-          <a:p>
-            <a:pPr>
-              <a:defRPr sz="2000"/>
-            </a:pPr>
-            <a:r>
-              <a:t>🎯 Modèle von Neumann</a:t>
-            </a:r>
-          </a:p>
-          <a:p>
-            <a:pPr>
-              <a:defRPr sz="2000"/>
-            </a:pPr>
-            <a:r>
-              <a:t>🎯 Identifier composants PC</a:t>
-            </a:r>
-          </a:p>
-          <a:p>
-            <a:pPr>
-              <a:defRPr sz="2000"/>
-            </a:pPr>
-            <a:r>
-              <a:t>🎯 Bonnes pratiques étudiantes</a:t>
-            </a:r>
-          </a:p>
-        </p:txBody>
-      </p:sp>
-      <p:sp>
-        <p:nvSpPr>
-          <p:cNvPr id="4" name="TextBox 3"/>
+          <p:cNvPr id="2" name="Rectangle 1"/>
+          <p:cNvSpPr/>
+          <p:nvPr/>
+        </p:nvSpPr>
+        <p:spPr>
+          <a:xfrm>
+            <a:off x="0" y="0"/>
+            <a:ext cx="109728" cy="6858000"/>
+          </a:xfrm>
+          <a:prstGeom prst="rect">
+            <a:avLst/>
+          </a:prstGeom>
+          <a:solidFill>
+            <a:srgbClr val="2C6E49"/>
+          </a:solidFill>
+          <a:ln>
+            <a:noFill/>
+          </a:ln>
+        </p:spPr>
+        <p:style>
+          <a:lnRef idx="1">
+            <a:schemeClr val="accent1"/>
+          </a:lnRef>
+          <a:fillRef idx="3">
+            <a:schemeClr val="accent1"/>
+          </a:fillRef>
+          <a:effectRef idx="2">
+            <a:schemeClr val="accent1"/>
+          </a:effectRef>
+          <a:fontRef idx="minor">
+            <a:schemeClr val="lt1"/>
+          </a:fontRef>
+        </p:style>
+        <p:txBody>
+          <a:bodyPr rtlCol="0" anchor="ctr"/>
+          <a:lstStyle/>
+          <a:p>
+            <a:pPr algn="ctr"/>
+          </a:p>
+        </p:txBody>
+      </p:sp>
+      <p:sp>
+        <p:nvSpPr>
+          <p:cNvPr id="3" name="TextBox 2"/>
           <p:cNvSpPr txBox="1"/>
           <p:nvPr/>
         </p:nvSpPr>
         <p:spPr>
           <a:xfrm>
-            <a:off x="365760" y="6446520"/>
-            <a:ext cx="8412480" cy="320040"/>
+            <a:off x="457200" y="365760"/>
+            <a:ext cx="8229600" cy="640080"/>
           </a:xfrm>
           <a:prstGeom prst="rect">
             <a:avLst/>
@@ -3753,20 +3458,133 @@
           <a:noFill/>
         </p:spPr>
         <p:txBody>
-          <a:bodyPr wrap="none">
+          <a:bodyPr wrap="square">
             <a:spAutoFit/>
           </a:bodyPr>
           <a:lstStyle/>
           <a:p>
-            <a:pPr algn="ctr">
-              <a:defRPr sz="900">
-                <a:solidFill>
-                  <a:srgbClr val="404040"/>
-                </a:solidFill>
-              </a:defRPr>
-            </a:pPr>
-            <a:r>
-              <a:t>Cours TIC 02  •  Diapositive 2/10</a:t>
+            <a:pPr algn="l">
+              <a:defRPr sz="2200" b="1">
+                <a:solidFill>
+                  <a:srgbClr val="1A5C33"/>
+                </a:solidFill>
+              </a:defRPr>
+            </a:pPr>
+            <a:r>
+              <a:t>4. Composants Matériels(15 min)</a:t>
+            </a:r>
+          </a:p>
+        </p:txBody>
+      </p:sp>
+      <p:sp>
+        <p:nvSpPr>
+          <p:cNvPr id="4" name="TextBox 3"/>
+          <p:cNvSpPr txBox="1"/>
+          <p:nvPr/>
+        </p:nvSpPr>
+        <p:spPr>
+          <a:xfrm>
+            <a:off x="457200" y="1371600"/>
+            <a:ext cx="7772400" cy="4572000"/>
+          </a:xfrm>
+          <a:prstGeom prst="rect">
+            <a:avLst/>
+          </a:prstGeom>
+          <a:noFill/>
+        </p:spPr>
+        <p:txBody>
+          <a:bodyPr wrap="square">
+            <a:spAutoFit/>
+          </a:bodyPr>
+          <a:lstStyle/>
+          <a:p>
+            <a:pPr>
+              <a:spcAft>
+                <a:spcPts val="600"/>
+              </a:spcAft>
+              <a:defRPr sz="1400">
+                <a:solidFill>
+                  <a:srgbClr val="222222"/>
+                </a:solidFill>
+              </a:defRPr>
+            </a:pPr>
+            <a:r>
+              <a:t>• Processeur (CPU): le cerveau de l'ordinateur</a:t>
+            </a:r>
+          </a:p>
+          <a:p>
+            <a:pPr>
+              <a:spcAft>
+                <a:spcPts val="600"/>
+              </a:spcAft>
+              <a:defRPr sz="1400">
+                <a:solidFill>
+                  <a:srgbClr val="222222"/>
+                </a:solidFill>
+              </a:defRPr>
+            </a:pPr>
+            <a:r>
+              <a:t>• Carte mère: interconnexion des composants</a:t>
+            </a:r>
+          </a:p>
+          <a:p>
+            <a:pPr>
+              <a:spcAft>
+                <a:spcPts val="600"/>
+              </a:spcAft>
+              <a:defRPr sz="1400">
+                <a:solidFill>
+                  <a:srgbClr val="222222"/>
+                </a:solidFill>
+              </a:defRPr>
+            </a:pPr>
+            <a:r>
+              <a:t>• RAM: mémoire vive volatile, très rapide</a:t>
+            </a:r>
+          </a:p>
+          <a:p>
+            <a:pPr>
+              <a:spcAft>
+                <a:spcPts val="600"/>
+              </a:spcAft>
+              <a:defRPr sz="1400">
+                <a:solidFill>
+                  <a:srgbClr val="222222"/>
+                </a:solidFill>
+              </a:defRPr>
+            </a:pPr>
+            <a:r>
+              <a:t>• Stockage: HDD ou SSD (plus rapide)</a:t>
+            </a:r>
+          </a:p>
+          <a:p>
+            <a:pPr>
+              <a:spcAft>
+                <a:spcPts val="600"/>
+              </a:spcAft>
+              <a:defRPr sz="1400">
+                <a:solidFill>
+                  <a:srgbClr val="222222"/>
+                </a:solidFill>
+              </a:defRPr>
+            </a:pPr>
+            <a:r>
+              <a:t>• Périphériques: entrée (clavier, souris), sortie (écran, imprimante), stockage externe (clé USB)</a:t>
+            </a:r>
+          </a:p>
+          <a:p>
+            <a:pPr>
+              <a:spcAft>
+                <a:spcPts val="600"/>
+              </a:spcAft>
+              <a:defRPr sz="1400">
+                <a:solidFill>
+                  <a:srgbClr val="222222"/>
+                </a:solidFill>
+              </a:defRPr>
+            </a:pPr>
+            <a:r>
+              <a:t>• Point important :la RAM perd les données non sauvegardées à l'extinction.</a:t>
             </a:r>
           </a:p>
         </p:txBody>
@@ -3776,15 +3594,20 @@
   <p:clrMapOvr>
     <a:masterClrMapping/>
   </p:clrMapOvr>
-  <p:transition spd="med">
-    <p:fade/>
-  </p:transition>
 </p:sld>
 </file>
 
-<file path=ppt/slides/slide3.xml><?xml version="1.0" encoding="utf-8"?>
+<file path=ppt/slides/slide12.xml><?xml version="1.0" encoding="utf-8"?>
 <p:sld xmlns:a="http://schemas.openxmlformats.org/drawingml/2006/main" xmlns:p="http://schemas.openxmlformats.org/presentationml/2006/main" xmlns:r="http://schemas.openxmlformats.org/officeDocument/2006/relationships">
   <p:cSld>
+    <p:bg>
+      <p:bgPr>
+        <a:solidFill>
+          <a:srgbClr val="FFFFFF"/>
+        </a:solidFill>
+        <a:effectLst/>
+      </p:bgPr>
+    </p:bg>
     <p:spTree>
       <p:nvGrpSpPr>
         <p:cNvPr id="1" name=""/>
@@ -3794,83 +3617,57 @@
       <p:grpSpPr/>
       <p:sp>
         <p:nvSpPr>
-          <p:cNvPr id="2" name="Title 1"/>
-          <p:cNvSpPr>
-            <a:spLocks noGrp="1"/>
-          </p:cNvSpPr>
-          <p:nvPr>
-            <p:ph type="title"/>
-          </p:nvPr>
-        </p:nvSpPr>
-        <p:spPr/>
-        <p:txBody>
-          <a:bodyPr/>
-          <a:lstStyle/>
-          <a:p>
-            <a:r>
-              <a:t>Plan du cours (1h30)</a:t>
-            </a:r>
-          </a:p>
-        </p:txBody>
-      </p:sp>
-      <p:sp>
-        <p:nvSpPr>
-          <p:cNvPr id="3" name="Content Placeholder 2"/>
-          <p:cNvSpPr>
-            <a:spLocks noGrp="1"/>
-          </p:cNvSpPr>
-          <p:nvPr>
-            <p:ph idx="1"/>
-          </p:nvPr>
-        </p:nvSpPr>
-        <p:spPr/>
-        <p:txBody>
-          <a:bodyPr/>
-          <a:lstStyle/>
-          <a:p>
-            <a:pPr>
-              <a:defRPr sz="2000"/>
-            </a:pPr>
-            <a:r>
-              <a:t>📋 8 parties — 90 minutes</a:t>
-            </a:r>
-          </a:p>
-          <a:p>
-            <a:pPr>
-              <a:defRPr sz="2000"/>
-            </a:pPr>
-            <a:r>
-              <a:t>📋 Intro → Informatique → von Neumann</a:t>
-            </a:r>
-          </a:p>
-          <a:p>
-            <a:pPr>
-              <a:defRPr sz="2000"/>
-            </a:pPr>
-            <a:r>
-              <a:t>📋 Hardware → Software → Interaction</a:t>
-            </a:r>
-          </a:p>
-          <a:p>
-            <a:pPr>
-              <a:defRPr sz="2000"/>
-            </a:pPr>
-            <a:r>
-              <a:t>📋 Bonnes pratiques → Conclusion</a:t>
-            </a:r>
-          </a:p>
-        </p:txBody>
-      </p:sp>
-      <p:sp>
-        <p:nvSpPr>
-          <p:cNvPr id="4" name="TextBox 3"/>
+          <p:cNvPr id="2" name="Rectangle 1"/>
+          <p:cNvSpPr/>
+          <p:nvPr/>
+        </p:nvSpPr>
+        <p:spPr>
+          <a:xfrm>
+            <a:off x="0" y="0"/>
+            <a:ext cx="109728" cy="6858000"/>
+          </a:xfrm>
+          <a:prstGeom prst="rect">
+            <a:avLst/>
+          </a:prstGeom>
+          <a:solidFill>
+            <a:srgbClr val="2C6E49"/>
+          </a:solidFill>
+          <a:ln>
+            <a:noFill/>
+          </a:ln>
+        </p:spPr>
+        <p:style>
+          <a:lnRef idx="1">
+            <a:schemeClr val="accent1"/>
+          </a:lnRef>
+          <a:fillRef idx="3">
+            <a:schemeClr val="accent1"/>
+          </a:fillRef>
+          <a:effectRef idx="2">
+            <a:schemeClr val="accent1"/>
+          </a:effectRef>
+          <a:fontRef idx="minor">
+            <a:schemeClr val="lt1"/>
+          </a:fontRef>
+        </p:style>
+        <p:txBody>
+          <a:bodyPr rtlCol="0" anchor="ctr"/>
+          <a:lstStyle/>
+          <a:p>
+            <a:pPr algn="ctr"/>
+          </a:p>
+        </p:txBody>
+      </p:sp>
+      <p:sp>
+        <p:nvSpPr>
+          <p:cNvPr id="3" name="TextBox 2"/>
           <p:cNvSpPr txBox="1"/>
           <p:nvPr/>
         </p:nvSpPr>
         <p:spPr>
           <a:xfrm>
-            <a:off x="365760" y="6446520"/>
-            <a:ext cx="8412480" cy="320040"/>
+            <a:off x="457200" y="365760"/>
+            <a:ext cx="8229600" cy="640080"/>
           </a:xfrm>
           <a:prstGeom prst="rect">
             <a:avLst/>
@@ -3878,20 +3675,103 @@
           <a:noFill/>
         </p:spPr>
         <p:txBody>
-          <a:bodyPr wrap="none">
+          <a:bodyPr wrap="square">
             <a:spAutoFit/>
           </a:bodyPr>
           <a:lstStyle/>
           <a:p>
-            <a:pPr algn="ctr">
-              <a:defRPr sz="900">
-                <a:solidFill>
-                  <a:srgbClr val="404040"/>
-                </a:solidFill>
-              </a:defRPr>
-            </a:pPr>
-            <a:r>
-              <a:t>Cours TIC 02  •  Diapositive 3/10</a:t>
+            <a:pPr algn="l">
+              <a:defRPr sz="2200" b="1">
+                <a:solidFill>
+                  <a:srgbClr val="1A5C33"/>
+                </a:solidFill>
+              </a:defRPr>
+            </a:pPr>
+            <a:r>
+              <a:t>5. Logiciels (Software)(15 min)</a:t>
+            </a:r>
+          </a:p>
+        </p:txBody>
+      </p:sp>
+      <p:sp>
+        <p:nvSpPr>
+          <p:cNvPr id="4" name="TextBox 3"/>
+          <p:cNvSpPr txBox="1"/>
+          <p:nvPr/>
+        </p:nvSpPr>
+        <p:spPr>
+          <a:xfrm>
+            <a:off x="457200" y="1371600"/>
+            <a:ext cx="7772400" cy="4572000"/>
+          </a:xfrm>
+          <a:prstGeom prst="rect">
+            <a:avLst/>
+          </a:prstGeom>
+          <a:noFill/>
+        </p:spPr>
+        <p:txBody>
+          <a:bodyPr wrap="square">
+            <a:spAutoFit/>
+          </a:bodyPr>
+          <a:lstStyle/>
+          <a:p>
+            <a:pPr>
+              <a:spcAft>
+                <a:spcPts val="600"/>
+              </a:spcAft>
+              <a:defRPr sz="1400">
+                <a:solidFill>
+                  <a:srgbClr val="222222"/>
+                </a:solidFill>
+              </a:defRPr>
+            </a:pPr>
+            <a:r>
+              <a:t>• Système d'exploitation: Windows, Linux, macOS</a:t>
+            </a:r>
+          </a:p>
+          <a:p>
+            <a:pPr>
+              <a:spcAft>
+                <a:spcPts val="600"/>
+              </a:spcAft>
+              <a:defRPr sz="1400">
+                <a:solidFill>
+                  <a:srgbClr val="222222"/>
+                </a:solidFill>
+              </a:defRPr>
+            </a:pPr>
+            <a:r>
+              <a:t>• Logiciels applicatifs: Word, PowerPoint, navigateurs, Moodle</a:t>
+            </a:r>
+          </a:p>
+          <a:p>
+            <a:pPr>
+              <a:spcAft>
+                <a:spcPts val="600"/>
+              </a:spcAft>
+              <a:defRPr sz="1400">
+                <a:solidFill>
+                  <a:srgbClr val="222222"/>
+                </a:solidFill>
+              </a:defRPr>
+            </a:pPr>
+            <a:r>
+              <a:t>• Logiciels utilitaires: antivirus, compresseurs</a:t>
+            </a:r>
+          </a:p>
+          <a:p>
+            <a:pPr>
+              <a:spcAft>
+                <a:spcPts val="600"/>
+              </a:spcAft>
+              <a:defRPr sz="1400">
+                <a:solidFill>
+                  <a:srgbClr val="222222"/>
+                </a:solidFill>
+              </a:defRPr>
+            </a:pPr>
+            <a:r>
+              <a:t>• Le hardware est tangible ; le software est intangible mais indispensable.</a:t>
             </a:r>
           </a:p>
         </p:txBody>
@@ -3901,15 +3781,20 @@
   <p:clrMapOvr>
     <a:masterClrMapping/>
   </p:clrMapOvr>
-  <p:transition spd="med">
-    <p:fade/>
-  </p:transition>
 </p:sld>
 </file>
 
-<file path=ppt/slides/slide4.xml><?xml version="1.0" encoding="utf-8"?>
+<file path=ppt/slides/slide13.xml><?xml version="1.0" encoding="utf-8"?>
 <p:sld xmlns:a="http://schemas.openxmlformats.org/drawingml/2006/main" xmlns:p="http://schemas.openxmlformats.org/presentationml/2006/main" xmlns:r="http://schemas.openxmlformats.org/officeDocument/2006/relationships">
   <p:cSld>
+    <p:bg>
+      <p:bgPr>
+        <a:solidFill>
+          <a:srgbClr val="E8F0E9"/>
+        </a:solidFill>
+        <a:effectLst/>
+      </p:bgPr>
+    </p:bg>
     <p:spTree>
       <p:nvGrpSpPr>
         <p:cNvPr id="1" name=""/>
@@ -3919,83 +3804,14 @@
       <p:grpSpPr/>
       <p:sp>
         <p:nvSpPr>
-          <p:cNvPr id="2" name="Title 1"/>
-          <p:cNvSpPr>
-            <a:spLocks noGrp="1"/>
-          </p:cNvSpPr>
-          <p:nvPr>
-            <p:ph type="title"/>
-          </p:nvPr>
-        </p:nvSpPr>
-        <p:spPr/>
-        <p:txBody>
-          <a:bodyPr/>
-          <a:lstStyle/>
-          <a:p>
-            <a:r>
-              <a:t>Qu'est-ce que l'informatique ?</a:t>
-            </a:r>
-          </a:p>
-        </p:txBody>
-      </p:sp>
-      <p:sp>
-        <p:nvSpPr>
-          <p:cNvPr id="3" name="Content Placeholder 2"/>
-          <p:cNvSpPr>
-            <a:spLocks noGrp="1"/>
-          </p:cNvSpPr>
-          <p:nvPr>
-            <p:ph idx="1"/>
-          </p:nvPr>
-        </p:nvSpPr>
-        <p:spPr/>
-        <p:txBody>
-          <a:bodyPr/>
-          <a:lstStyle/>
-          <a:p>
-            <a:pPr>
-              <a:defRPr sz="2000"/>
-            </a:pPr>
-            <a:r>
-              <a:t>💡 Traitement automatique</a:t>
-            </a:r>
-          </a:p>
-          <a:p>
-            <a:pPr>
-              <a:defRPr sz="2000"/>
-            </a:pPr>
-            <a:r>
-              <a:t>💡 Hardware + Software</a:t>
-            </a:r>
-          </a:p>
-          <a:p>
-            <a:pPr>
-              <a:defRPr sz="2000"/>
-            </a:pPr>
-            <a:r>
-              <a:t>💡 Approche utilisateur</a:t>
-            </a:r>
-          </a:p>
-          <a:p>
-            <a:pPr>
-              <a:defRPr sz="2000"/>
-            </a:pPr>
-            <a:r>
-              <a:t>💡 Science et pratique</a:t>
-            </a:r>
-          </a:p>
-        </p:txBody>
-      </p:sp>
-      <p:sp>
-        <p:nvSpPr>
-          <p:cNvPr id="4" name="TextBox 3"/>
+          <p:cNvPr id="2" name="TextBox 1"/>
           <p:cNvSpPr txBox="1"/>
           <p:nvPr/>
         </p:nvSpPr>
         <p:spPr>
           <a:xfrm>
-            <a:off x="365760" y="6446520"/>
-            <a:ext cx="8412480" cy="320040"/>
+            <a:off x="548640" y="365760"/>
+            <a:ext cx="7772400" cy="640080"/>
           </a:xfrm>
           <a:prstGeom prst="rect">
             <a:avLst/>
@@ -4003,20 +3819,126 @@
           <a:noFill/>
         </p:spPr>
         <p:txBody>
-          <a:bodyPr wrap="none">
+          <a:bodyPr wrap="square">
             <a:spAutoFit/>
           </a:bodyPr>
           <a:lstStyle/>
           <a:p>
             <a:pPr algn="ctr">
-              <a:defRPr sz="900">
-                <a:solidFill>
-                  <a:srgbClr val="404040"/>
-                </a:solidFill>
-              </a:defRPr>
-            </a:pPr>
-            <a:r>
-              <a:t>Cours TIC 02  •  Diapositive 4/10</a:t>
+              <a:defRPr sz="2600" b="1">
+                <a:solidFill>
+                  <a:srgbClr val="1A5C33"/>
+                </a:solidFill>
+              </a:defRPr>
+            </a:pPr>
+            <a:r>
+              <a:t>📝 Points clés à retenir</a:t>
+            </a:r>
+          </a:p>
+        </p:txBody>
+      </p:sp>
+      <p:sp>
+        <p:nvSpPr>
+          <p:cNvPr id="3" name="TextBox 2"/>
+          <p:cNvSpPr txBox="1"/>
+          <p:nvPr/>
+        </p:nvSpPr>
+        <p:spPr>
+          <a:xfrm>
+            <a:off x="548640" y="1828800"/>
+            <a:ext cx="7772400" cy="4572000"/>
+          </a:xfrm>
+          <a:prstGeom prst="rect">
+            <a:avLst/>
+          </a:prstGeom>
+          <a:noFill/>
+        </p:spPr>
+        <p:txBody>
+          <a:bodyPr wrap="square">
+            <a:spAutoFit/>
+          </a:bodyPr>
+          <a:lstStyle/>
+          <a:p>
+            <a:pPr>
+              <a:spcAft>
+                <a:spcPts val="600"/>
+              </a:spcAft>
+              <a:defRPr sz="1600">
+                <a:solidFill>
+                  <a:srgbClr val="222222"/>
+                </a:solidFill>
+              </a:defRPr>
+            </a:pPr>
+            <a:r>
+              <a:t>• Référentiel :titres et structure alignés sur Canvas Univ-Mosta (elearning.univ-usto.dz) ; bonnes pratiques benchmark 10 universités algériennes (voirBENCHMARK_10_UNIVERSITES_ELEARNING.md).</a:t>
+            </a:r>
+          </a:p>
+          <a:p>
+            <a:pPr>
+              <a:spcAft>
+                <a:spcPts val="600"/>
+              </a:spcAft>
+              <a:defRPr sz="1600">
+                <a:solidFill>
+                  <a:srgbClr val="222222"/>
+                </a:solidFill>
+              </a:defRPr>
+            </a:pPr>
+            <a:r>
+              <a:t>• En termes de savoir :- Décrire le modèle de von Neumann (CPU, mémoire, E/S, bus)</a:t>
+            </a:r>
+            <a:br/>
+            <a:r>
+              <a:t>- Distinguer hardware et software</a:t>
+            </a:r>
+            <a:br/>
+            <a:r>
+              <a:t>- Expliquer le rôle du système d'exploitation</a:t>
+            </a:r>
+          </a:p>
+          <a:p>
+            <a:pPr>
+              <a:spcAft>
+                <a:spcPts val="600"/>
+              </a:spcAft>
+              <a:defRPr sz="1600">
+                <a:solidFill>
+                  <a:srgbClr val="222222"/>
+                </a:solidFill>
+              </a:defRPr>
+            </a:pPr>
+            <a:r>
+              <a:t>• Structure Machine 1 — Univ. Biskra (elearning.univ-biskra.dz) ; Goupille — Technologie des ordinateurs</a:t>
+            </a:r>
+          </a:p>
+          <a:p>
+            <a:pPr>
+              <a:spcAft>
+                <a:spcPts val="600"/>
+              </a:spcAft>
+              <a:defRPr sz="1600">
+                <a:solidFill>
+                  <a:srgbClr val="222222"/>
+                </a:solidFill>
+              </a:defRPr>
+            </a:pPr>
+            <a:r>
+              <a:t>• Introduction : Pourquoi comprendre l'ordinateur ?</a:t>
+            </a:r>
+          </a:p>
+          <a:p>
+            <a:pPr>
+              <a:spcAft>
+                <a:spcPts val="600"/>
+              </a:spcAft>
+              <a:defRPr sz="1600">
+                <a:solidFill>
+                  <a:srgbClr val="222222"/>
+                </a:solidFill>
+              </a:defRPr>
+            </a:pPr>
+            <a:r>
+              <a:t>• Comprendre le fonctionnement de l'ordinateur est essentiel pour tout étudiant, même en filière Langues. Cela permet de mieux utiliser ses outils (Word, navigateur, Moodle), éviter les pertes de données, diagnostiquer les problèmes simples et organiser efficacement son espace de travail numérique.</a:t>
             </a:r>
           </a:p>
         </p:txBody>
@@ -4026,15 +3948,20 @@
   <p:clrMapOvr>
     <a:masterClrMapping/>
   </p:clrMapOvr>
-  <p:transition spd="med">
-    <p:fade/>
-  </p:transition>
 </p:sld>
 </file>
 
-<file path=ppt/slides/slide5.xml><?xml version="1.0" encoding="utf-8"?>
+<file path=ppt/slides/slide14.xml><?xml version="1.0" encoding="utf-8"?>
 <p:sld xmlns:a="http://schemas.openxmlformats.org/drawingml/2006/main" xmlns:p="http://schemas.openxmlformats.org/presentationml/2006/main" xmlns:r="http://schemas.openxmlformats.org/officeDocument/2006/relationships">
   <p:cSld>
+    <p:bg>
+      <p:bgPr>
+        <a:solidFill>
+          <a:srgbClr val="FFFFFF"/>
+        </a:solidFill>
+        <a:effectLst/>
+      </p:bgPr>
+    </p:bg>
     <p:spTree>
       <p:nvGrpSpPr>
         <p:cNvPr id="1" name=""/>
@@ -4044,83 +3971,14 @@
       <p:grpSpPr/>
       <p:sp>
         <p:nvSpPr>
-          <p:cNvPr id="2" name="Title 1"/>
-          <p:cNvSpPr>
-            <a:spLocks noGrp="1"/>
-          </p:cNvSpPr>
-          <p:nvPr>
-            <p:ph type="title"/>
-          </p:nvPr>
-        </p:nvSpPr>
-        <p:spPr/>
-        <p:txBody>
-          <a:bodyPr/>
-          <a:lstStyle/>
-          <a:p>
-            <a:r>
-              <a:t>Modèle de von Neumann</a:t>
-            </a:r>
-          </a:p>
-        </p:txBody>
-      </p:sp>
-      <p:sp>
-        <p:nvSpPr>
-          <p:cNvPr id="3" name="Content Placeholder 2"/>
-          <p:cNvSpPr>
-            <a:spLocks noGrp="1"/>
-          </p:cNvSpPr>
-          <p:nvPr>
-            <p:ph idx="1"/>
-          </p:nvPr>
-        </p:nvSpPr>
-        <p:spPr/>
-        <p:txBody>
-          <a:bodyPr/>
-          <a:lstStyle/>
-          <a:p>
-            <a:pPr>
-              <a:defRPr sz="2000"/>
-            </a:pPr>
-            <a:r>
-              <a:t>📖 Entrée → Traitement</a:t>
-            </a:r>
-          </a:p>
-          <a:p>
-            <a:pPr>
-              <a:defRPr sz="2000"/>
-            </a:pPr>
-            <a:r>
-              <a:t>📖 RAM volatile</a:t>
-            </a:r>
-          </a:p>
-          <a:p>
-            <a:pPr>
-              <a:defRPr sz="2000"/>
-            </a:pPr>
-            <a:r>
-              <a:t>📖 Sortie → Stockage</a:t>
-            </a:r>
-          </a:p>
-          <a:p>
-            <a:pPr>
-              <a:defRPr sz="2000"/>
-            </a:pPr>
-            <a:r>
-              <a:t>📖 Schéma fonctionnel</a:t>
-            </a:r>
-          </a:p>
-        </p:txBody>
-      </p:sp>
-      <p:sp>
-        <p:nvSpPr>
-          <p:cNvPr id="4" name="TextBox 3"/>
+          <p:cNvPr id="2" name="TextBox 1"/>
           <p:cNvSpPr txBox="1"/>
           <p:nvPr/>
         </p:nvSpPr>
         <p:spPr>
           <a:xfrm>
-            <a:off x="365760" y="6446520"/>
-            <a:ext cx="8412480" cy="320040"/>
+            <a:off x="548640" y="365760"/>
+            <a:ext cx="7772400" cy="640080"/>
           </a:xfrm>
           <a:prstGeom prst="rect">
             <a:avLst/>
@@ -4128,20 +3986,118 @@
           <a:noFill/>
         </p:spPr>
         <p:txBody>
-          <a:bodyPr wrap="none">
+          <a:bodyPr wrap="square">
             <a:spAutoFit/>
           </a:bodyPr>
           <a:lstStyle/>
           <a:p>
             <a:pPr algn="ctr">
-              <a:defRPr sz="900">
-                <a:solidFill>
-                  <a:srgbClr val="404040"/>
-                </a:solidFill>
-              </a:defRPr>
-            </a:pPr>
-            <a:r>
-              <a:t>Cours TIC 02  •  Diapositive 5/10</a:t>
+              <a:defRPr sz="2600" b="1">
+                <a:solidFill>
+                  <a:srgbClr val="1A5C33"/>
+                </a:solidFill>
+              </a:defRPr>
+            </a:pPr>
+            <a:r>
+              <a:t>✏️ Exercices d'application</a:t>
+            </a:r>
+          </a:p>
+        </p:txBody>
+      </p:sp>
+      <p:sp>
+        <p:nvSpPr>
+          <p:cNvPr id="3" name="TextBox 2"/>
+          <p:cNvSpPr txBox="1"/>
+          <p:nvPr/>
+        </p:nvSpPr>
+        <p:spPr>
+          <a:xfrm>
+            <a:off x="548640" y="1828800"/>
+            <a:ext cx="7772400" cy="4572000"/>
+          </a:xfrm>
+          <a:prstGeom prst="rect">
+            <a:avLst/>
+          </a:prstGeom>
+          <a:noFill/>
+        </p:spPr>
+        <p:txBody>
+          <a:bodyPr wrap="square">
+            <a:spAutoFit/>
+          </a:bodyPr>
+          <a:lstStyle/>
+          <a:p>
+            <a:pPr>
+              <a:spcAft>
+                <a:spcPts val="600"/>
+              </a:spcAft>
+              <a:defRPr sz="1500">
+                <a:solidFill>
+                  <a:srgbClr val="222222"/>
+                </a:solidFill>
+              </a:defRPr>
+            </a:pPr>
+            <a:r>
+              <a:t>• Définir les concepts principaux du cours</a:t>
+            </a:r>
+          </a:p>
+          <a:p>
+            <a:pPr>
+              <a:spcAft>
+                <a:spcPts val="600"/>
+              </a:spcAft>
+              <a:defRPr sz="1500">
+                <a:solidFill>
+                  <a:srgbClr val="222222"/>
+                </a:solidFill>
+              </a:defRPr>
+            </a:pPr>
+            <a:r>
+              <a:t>• Identifier les applications pratiques</a:t>
+            </a:r>
+          </a:p>
+          <a:p>
+            <a:pPr>
+              <a:spcAft>
+                <a:spcPts val="600"/>
+              </a:spcAft>
+              <a:defRPr sz="1500">
+                <a:solidFill>
+                  <a:srgbClr val="222222"/>
+                </a:solidFill>
+              </a:defRPr>
+            </a:pPr>
+            <a:r>
+              <a:t>• Résoudre les exercices du TD</a:t>
+            </a:r>
+          </a:p>
+          <a:p>
+            <a:pPr>
+              <a:spcAft>
+                <a:spcPts val="600"/>
+              </a:spcAft>
+              <a:defRPr sz="1500">
+                <a:solidFill>
+                  <a:srgbClr val="222222"/>
+                </a:solidFill>
+              </a:defRPr>
+            </a:pPr>
+            <a:r>
+              <a:t>• Synthétiser les points clés en un paragraphe</a:t>
+            </a:r>
+          </a:p>
+          <a:p>
+            <a:pPr>
+              <a:spcAft>
+                <a:spcPts val="600"/>
+              </a:spcAft>
+              <a:defRPr sz="1500">
+                <a:solidFill>
+                  <a:srgbClr val="222222"/>
+                </a:solidFill>
+              </a:defRPr>
+            </a:pPr>
+            <a:r>
+              <a:t>• Préparer une courte présentation orale</a:t>
             </a:r>
           </a:p>
         </p:txBody>
@@ -4151,15 +4107,20 @@
   <p:clrMapOvr>
     <a:masterClrMapping/>
   </p:clrMapOvr>
-  <p:transition spd="med">
-    <p:fade/>
-  </p:transition>
 </p:sld>
 </file>
 
-<file path=ppt/slides/slide6.xml><?xml version="1.0" encoding="utf-8"?>
+<file path=ppt/slides/slide15.xml><?xml version="1.0" encoding="utf-8"?>
 <p:sld xmlns:a="http://schemas.openxmlformats.org/drawingml/2006/main" xmlns:p="http://schemas.openxmlformats.org/presentationml/2006/main" xmlns:r="http://schemas.openxmlformats.org/officeDocument/2006/relationships">
   <p:cSld>
+    <p:bg>
+      <p:bgPr>
+        <a:solidFill>
+          <a:srgbClr val="1A5C33"/>
+        </a:solidFill>
+        <a:effectLst/>
+      </p:bgPr>
+    </p:bg>
     <p:spTree>
       <p:nvGrpSpPr>
         <p:cNvPr id="1" name=""/>
@@ -4169,83 +4130,14 @@
       <p:grpSpPr/>
       <p:sp>
         <p:nvSpPr>
-          <p:cNvPr id="2" name="Title 1"/>
-          <p:cNvSpPr>
-            <a:spLocks noGrp="1"/>
-          </p:cNvSpPr>
-          <p:nvPr>
-            <p:ph type="title"/>
-          </p:nvPr>
-        </p:nvSpPr>
-        <p:spPr/>
-        <p:txBody>
-          <a:bodyPr/>
-          <a:lstStyle/>
-          <a:p>
-            <a:r>
-              <a:t>Composants Hardware</a:t>
-            </a:r>
-          </a:p>
-        </p:txBody>
-      </p:sp>
-      <p:sp>
-        <p:nvSpPr>
-          <p:cNvPr id="3" name="Content Placeholder 2"/>
-          <p:cNvSpPr>
-            <a:spLocks noGrp="1"/>
-          </p:cNvSpPr>
-          <p:nvPr>
-            <p:ph idx="1"/>
-          </p:nvPr>
-        </p:nvSpPr>
-        <p:spPr/>
-        <p:txBody>
-          <a:bodyPr/>
-          <a:lstStyle/>
-          <a:p>
-            <a:pPr>
-              <a:defRPr sz="2000"/>
-            </a:pPr>
-            <a:r>
-              <a:t>🖥️ CPU, carte mère, RAM</a:t>
-            </a:r>
-          </a:p>
-          <a:p>
-            <a:pPr>
-              <a:defRPr sz="2000"/>
-            </a:pPr>
-            <a:r>
-              <a:t>🖥️ SSD / HDD</a:t>
-            </a:r>
-          </a:p>
-          <a:p>
-            <a:pPr>
-              <a:defRPr sz="2000"/>
-            </a:pPr>
-            <a:r>
-              <a:t>🖥️ Périphériques entrée/sortie</a:t>
-            </a:r>
-          </a:p>
-          <a:p>
-            <a:pPr>
-              <a:defRPr sz="2000"/>
-            </a:pPr>
-            <a:r>
-              <a:t>🖥️ Schéma PC</a:t>
-            </a:r>
-          </a:p>
-        </p:txBody>
-      </p:sp>
-      <p:sp>
-        <p:nvSpPr>
-          <p:cNvPr id="4" name="TextBox 3"/>
+          <p:cNvPr id="2" name="TextBox 1"/>
           <p:cNvSpPr txBox="1"/>
           <p:nvPr/>
         </p:nvSpPr>
         <p:spPr>
           <a:xfrm>
-            <a:off x="365760" y="6446520"/>
-            <a:ext cx="8412480" cy="320040"/>
+            <a:off x="731520" y="1371600"/>
+            <a:ext cx="7680960" cy="914400"/>
           </a:xfrm>
           <a:prstGeom prst="rect">
             <a:avLst/>
@@ -4253,20 +4145,67 @@
           <a:noFill/>
         </p:spPr>
         <p:txBody>
-          <a:bodyPr wrap="none">
+          <a:bodyPr wrap="square">
             <a:spAutoFit/>
           </a:bodyPr>
           <a:lstStyle/>
           <a:p>
             <a:pPr algn="ctr">
-              <a:defRPr sz="900">
-                <a:solidFill>
-                  <a:srgbClr val="404040"/>
-                </a:solidFill>
-              </a:defRPr>
-            </a:pPr>
-            <a:r>
-              <a:t>Cours TIC 02  •  Diapositive 6/10</a:t>
+              <a:defRPr sz="2800" b="1">
+                <a:solidFill>
+                  <a:srgbClr val="FFFFFF"/>
+                </a:solidFill>
+              </a:defRPr>
+            </a:pPr>
+            <a:r>
+              <a:t>🎓 Conclusion</a:t>
+            </a:r>
+          </a:p>
+        </p:txBody>
+      </p:sp>
+      <p:sp>
+        <p:nvSpPr>
+          <p:cNvPr id="3" name="TextBox 2"/>
+          <p:cNvSpPr txBox="1"/>
+          <p:nvPr/>
+        </p:nvSpPr>
+        <p:spPr>
+          <a:xfrm>
+            <a:off x="731520" y="2743200"/>
+            <a:ext cx="7680960" cy="1828800"/>
+          </a:xfrm>
+          <a:prstGeom prst="rect">
+            <a:avLst/>
+          </a:prstGeom>
+          <a:noFill/>
+        </p:spPr>
+        <p:txBody>
+          <a:bodyPr wrap="square">
+            <a:spAutoFit/>
+          </a:bodyPr>
+          <a:lstStyle/>
+          <a:p>
+            <a:pPr algn="ctr">
+              <a:defRPr sz="1800" b="0">
+                <a:solidFill>
+                  <a:srgbClr val="C5D9C7"/>
+                </a:solidFill>
+              </a:defRPr>
+            </a:pPr>
+            <a:r>
+              <a:t>Dr. BELACEL Madani</a:t>
+            </a:r>
+            <a:br/>
+            <a:r>
+              <a:t>Maître de Conférences B</a:t>
+            </a:r>
+            <a:br/>
+            <a:r>
+              <a:t>Université de Mostaganem</a:t>
+            </a:r>
+            <a:br/>
+            <a:r>
+              <a:t>madani.belacel@univ-mosta.dz</a:t>
             </a:r>
           </a:p>
         </p:txBody>
@@ -4276,15 +4215,20 @@
   <p:clrMapOvr>
     <a:masterClrMapping/>
   </p:clrMapOvr>
-  <p:transition spd="med">
-    <p:fade/>
-  </p:transition>
 </p:sld>
 </file>
 
-<file path=ppt/slides/slide7.xml><?xml version="1.0" encoding="utf-8"?>
+<file path=ppt/slides/slide2.xml><?xml version="1.0" encoding="utf-8"?>
 <p:sld xmlns:a="http://schemas.openxmlformats.org/drawingml/2006/main" xmlns:p="http://schemas.openxmlformats.org/presentationml/2006/main" xmlns:r="http://schemas.openxmlformats.org/officeDocument/2006/relationships">
   <p:cSld>
+    <p:bg>
+      <p:bgPr>
+        <a:solidFill>
+          <a:srgbClr val="FFFFFF"/>
+        </a:solidFill>
+        <a:effectLst/>
+      </p:bgPr>
+    </p:bg>
     <p:spTree>
       <p:nvGrpSpPr>
         <p:cNvPr id="1" name=""/>
@@ -4294,83 +4238,14 @@
       <p:grpSpPr/>
       <p:sp>
         <p:nvSpPr>
-          <p:cNvPr id="2" name="Title 1"/>
-          <p:cNvSpPr>
-            <a:spLocks noGrp="1"/>
-          </p:cNvSpPr>
-          <p:nvPr>
-            <p:ph type="title"/>
-          </p:nvPr>
-        </p:nvSpPr>
-        <p:spPr/>
-        <p:txBody>
-          <a:bodyPr/>
-          <a:lstStyle/>
-          <a:p>
-            <a:r>
-              <a:t>Logiciels et OS</a:t>
-            </a:r>
-          </a:p>
-        </p:txBody>
-      </p:sp>
-      <p:sp>
-        <p:nvSpPr>
-          <p:cNvPr id="3" name="Content Placeholder 2"/>
-          <p:cNvSpPr>
-            <a:spLocks noGrp="1"/>
-          </p:cNvSpPr>
-          <p:nvPr>
-            <p:ph idx="1"/>
-          </p:nvPr>
-        </p:nvSpPr>
-        <p:spPr/>
-        <p:txBody>
-          <a:bodyPr/>
-          <a:lstStyle/>
-          <a:p>
-            <a:pPr>
-              <a:defRPr sz="2000"/>
-            </a:pPr>
-            <a:r>
-              <a:t>💾 Windows, Linux, macOS</a:t>
-            </a:r>
-          </a:p>
-          <a:p>
-            <a:pPr>
-              <a:defRPr sz="2000"/>
-            </a:pPr>
-            <a:r>
-              <a:t>💾 Applications bureautiques</a:t>
-            </a:r>
-          </a:p>
-          <a:p>
-            <a:pPr>
-              <a:defRPr sz="2000"/>
-            </a:pPr>
-            <a:r>
-              <a:t>💾 Utilitaires</a:t>
-            </a:r>
-          </a:p>
-          <a:p>
-            <a:pPr>
-              <a:defRPr sz="2000"/>
-            </a:pPr>
-            <a:r>
-              <a:t>💾 Hardware vs Software</a:t>
-            </a:r>
-          </a:p>
-        </p:txBody>
-      </p:sp>
-      <p:sp>
-        <p:nvSpPr>
-          <p:cNvPr id="4" name="TextBox 3"/>
+          <p:cNvPr id="2" name="TextBox 1"/>
           <p:cNvSpPr txBox="1"/>
           <p:nvPr/>
         </p:nvSpPr>
         <p:spPr>
           <a:xfrm>
-            <a:off x="365760" y="6446520"/>
-            <a:ext cx="8412480" cy="320040"/>
+            <a:off x="548640" y="365760"/>
+            <a:ext cx="7772400" cy="640080"/>
           </a:xfrm>
           <a:prstGeom prst="rect">
             <a:avLst/>
@@ -4378,20 +4253,123 @@
           <a:noFill/>
         </p:spPr>
         <p:txBody>
-          <a:bodyPr wrap="none">
+          <a:bodyPr wrap="square">
             <a:spAutoFit/>
           </a:bodyPr>
           <a:lstStyle/>
           <a:p>
-            <a:pPr algn="ctr">
-              <a:defRPr sz="900">
-                <a:solidFill>
-                  <a:srgbClr val="404040"/>
-                </a:solidFill>
-              </a:defRPr>
-            </a:pPr>
-            <a:r>
-              <a:t>Cours TIC 02  •  Diapositive 7/10</a:t>
+            <a:pPr algn="l">
+              <a:defRPr sz="2600" b="1">
+                <a:solidFill>
+                  <a:srgbClr val="1A5C33"/>
+                </a:solidFill>
+              </a:defRPr>
+            </a:pPr>
+            <a:r>
+              <a:t>🎯 Objectifs pédagogiques</a:t>
+            </a:r>
+          </a:p>
+        </p:txBody>
+      </p:sp>
+      <p:sp>
+        <p:nvSpPr>
+          <p:cNvPr id="3" name="TextBox 2"/>
+          <p:cNvSpPr txBox="1"/>
+          <p:nvPr/>
+        </p:nvSpPr>
+        <p:spPr>
+          <a:xfrm>
+            <a:off x="548640" y="1828800"/>
+            <a:ext cx="7772400" cy="4572000"/>
+          </a:xfrm>
+          <a:prstGeom prst="rect">
+            <a:avLst/>
+          </a:prstGeom>
+          <a:noFill/>
+        </p:spPr>
+        <p:txBody>
+          <a:bodyPr wrap="square">
+            <a:spAutoFit/>
+          </a:bodyPr>
+          <a:lstStyle/>
+          <a:p>
+            <a:pPr>
+              <a:spcAft>
+                <a:spcPts val="600"/>
+              </a:spcAft>
+              <a:defRPr sz="1500">
+                <a:solidFill>
+                  <a:srgbClr val="222222"/>
+                </a:solidFill>
+              </a:defRPr>
+            </a:pPr>
+            <a:r>
+              <a:t>• En termes de savoir :- Décrire le modèle de von Neumann (CPU, mémoire, E/S, bus)</a:t>
+            </a:r>
+            <a:br/>
+            <a:r>
+              <a:t>- Distinguer hardware et software</a:t>
+            </a:r>
+            <a:br/>
+            <a:r>
+              <a:t>- Expliquer le rôle du système d'exploitation</a:t>
+            </a:r>
+          </a:p>
+          <a:p>
+            <a:pPr>
+              <a:spcAft>
+                <a:spcPts val="600"/>
+              </a:spcAft>
+              <a:defRPr sz="1500">
+                <a:solidFill>
+                  <a:srgbClr val="222222"/>
+                </a:solidFill>
+              </a:defRPr>
+            </a:pPr>
+            <a:r>
+              <a:t>• En termes de savoir-faire :- Identifier les composants d'un PC portable de cours</a:t>
+            </a:r>
+            <a:br/>
+            <a:r>
+              <a:t>- Gérer l'espace disque et les formats de fichiers</a:t>
+            </a:r>
+            <a:br/>
+            <a:r>
+              <a:t>- Diagnostiquer un problème simple (câble, redémarrage)</a:t>
+            </a:r>
+          </a:p>
+          <a:p>
+            <a:pPr>
+              <a:spcAft>
+                <a:spcPts val="600"/>
+              </a:spcAft>
+              <a:defRPr sz="1500">
+                <a:solidFill>
+                  <a:srgbClr val="222222"/>
+                </a:solidFill>
+              </a:defRPr>
+            </a:pPr>
+            <a:r>
+              <a:t>• En termes de savoir-être :- Prendre soin du matériel universitaire</a:t>
+            </a:r>
+            <a:br/>
+            <a:r>
+              <a:t>- Organiser son espace de travail numérique</a:t>
+            </a:r>
+          </a:p>
+          <a:p>
+            <a:pPr>
+              <a:spcAft>
+                <a:spcPts val="600"/>
+              </a:spcAft>
+              <a:defRPr sz="1500">
+                <a:solidFill>
+                  <a:srgbClr val="222222"/>
+                </a:solidFill>
+              </a:defRPr>
+            </a:pPr>
+            <a:r>
+              <a:t>• Mode d'évaluation :TD 40 % + QCM 20 % + mini-projet schéma machine 20 % + examen 20 %</a:t>
             </a:r>
           </a:p>
         </p:txBody>
@@ -4401,15 +4379,20 @@
   <p:clrMapOvr>
     <a:masterClrMapping/>
   </p:clrMapOvr>
-  <p:transition spd="med">
-    <p:fade/>
-  </p:transition>
 </p:sld>
 </file>
 
-<file path=ppt/slides/slide8.xml><?xml version="1.0" encoding="utf-8"?>
+<file path=ppt/slides/slide3.xml><?xml version="1.0" encoding="utf-8"?>
 <p:sld xmlns:a="http://schemas.openxmlformats.org/drawingml/2006/main" xmlns:p="http://schemas.openxmlformats.org/presentationml/2006/main" xmlns:r="http://schemas.openxmlformats.org/officeDocument/2006/relationships">
   <p:cSld>
+    <p:bg>
+      <p:bgPr>
+        <a:solidFill>
+          <a:srgbClr val="FFFFFF"/>
+        </a:solidFill>
+        <a:effectLst/>
+      </p:bgPr>
+    </p:bg>
     <p:spTree>
       <p:nvGrpSpPr>
         <p:cNvPr id="1" name=""/>
@@ -4419,83 +4402,14 @@
       <p:grpSpPr/>
       <p:sp>
         <p:nvSpPr>
-          <p:cNvPr id="2" name="Title 1"/>
-          <p:cNvSpPr>
-            <a:spLocks noGrp="1"/>
-          </p:cNvSpPr>
-          <p:nvPr>
-            <p:ph type="title"/>
-          </p:nvPr>
-        </p:nvSpPr>
-        <p:spPr/>
-        <p:txBody>
-          <a:bodyPr/>
-          <a:lstStyle/>
-          <a:p>
-            <a:r>
-              <a:t>Interaction HW / SW</a:t>
-            </a:r>
-          </a:p>
-        </p:txBody>
-      </p:sp>
-      <p:sp>
-        <p:nvSpPr>
-          <p:cNvPr id="3" name="Content Placeholder 2"/>
-          <p:cNvSpPr>
-            <a:spLocks noGrp="1"/>
-          </p:cNvSpPr>
-          <p:nvPr>
-            <p:ph idx="1"/>
-          </p:nvPr>
-        </p:nvSpPr>
-        <p:spPr/>
-        <p:txBody>
-          <a:bodyPr/>
-          <a:lstStyle/>
-          <a:p>
-            <a:pPr>
-              <a:defRPr sz="2000"/>
-            </a:pPr>
-            <a:r>
-              <a:t>⚙️ Exemple frappe clavier</a:t>
-            </a:r>
-          </a:p>
-          <a:p>
-            <a:pPr>
-              <a:defRPr sz="2000"/>
-            </a:pPr>
-            <a:r>
-              <a:t>⚙️ OS intermédiaire</a:t>
-            </a:r>
-          </a:p>
-          <a:p>
-            <a:pPr>
-              <a:defRPr sz="2000"/>
-            </a:pPr>
-            <a:r>
-              <a:t>⚙️ Interdépendance</a:t>
-            </a:r>
-          </a:p>
-          <a:p>
-            <a:pPr>
-              <a:defRPr sz="2000"/>
-            </a:pPr>
-            <a:r>
-              <a:t>⚙️ Dépannage simple</a:t>
-            </a:r>
-          </a:p>
-        </p:txBody>
-      </p:sp>
-      <p:sp>
-        <p:nvSpPr>
-          <p:cNvPr id="4" name="TextBox 3"/>
+          <p:cNvPr id="2" name="TextBox 1"/>
           <p:cNvSpPr txBox="1"/>
           <p:nvPr/>
         </p:nvSpPr>
         <p:spPr>
           <a:xfrm>
-            <a:off x="365760" y="6446520"/>
-            <a:ext cx="8412480" cy="320040"/>
+            <a:off x="548640" y="365760"/>
+            <a:ext cx="7772400" cy="640080"/>
           </a:xfrm>
           <a:prstGeom prst="rect">
             <a:avLst/>
@@ -4503,20 +4417,193 @@
           <a:noFill/>
         </p:spPr>
         <p:txBody>
-          <a:bodyPr wrap="none">
+          <a:bodyPr wrap="square">
             <a:spAutoFit/>
           </a:bodyPr>
           <a:lstStyle/>
           <a:p>
-            <a:pPr algn="ctr">
-              <a:defRPr sz="900">
-                <a:solidFill>
-                  <a:srgbClr val="404040"/>
-                </a:solidFill>
-              </a:defRPr>
-            </a:pPr>
-            <a:r>
-              <a:t>Cours TIC 02  •  Diapositive 8/10</a:t>
+            <a:pPr algn="l">
+              <a:defRPr sz="2600" b="1">
+                <a:solidFill>
+                  <a:srgbClr val="1A5C33"/>
+                </a:solidFill>
+              </a:defRPr>
+            </a:pPr>
+            <a:r>
+              <a:t>📋 Plan du cours</a:t>
+            </a:r>
+          </a:p>
+        </p:txBody>
+      </p:sp>
+      <p:sp>
+        <p:nvSpPr>
+          <p:cNvPr id="3" name="TextBox 2"/>
+          <p:cNvSpPr txBox="1"/>
+          <p:nvPr/>
+        </p:nvSpPr>
+        <p:spPr>
+          <a:xfrm>
+            <a:off x="548640" y="1828800"/>
+            <a:ext cx="7772400" cy="4572000"/>
+          </a:xfrm>
+          <a:prstGeom prst="rect">
+            <a:avLst/>
+          </a:prstGeom>
+          <a:noFill/>
+        </p:spPr>
+        <p:txBody>
+          <a:bodyPr wrap="square">
+            <a:spAutoFit/>
+          </a:bodyPr>
+          <a:lstStyle/>
+          <a:p>
+            <a:pPr>
+              <a:spcAft>
+                <a:spcPts val="600"/>
+              </a:spcAft>
+              <a:defRPr sz="1600">
+                <a:solidFill>
+                  <a:srgbClr val="222222"/>
+                </a:solidFill>
+              </a:defRPr>
+            </a:pPr>
+            <a:r>
+              <a:t>• Fiche cours — Plateforme e-learning (Moodle)</a:t>
+            </a:r>
+          </a:p>
+          <a:p>
+            <a:pPr>
+              <a:spcAft>
+                <a:spcPts val="600"/>
+              </a:spcAft>
+              <a:defRPr sz="1600">
+                <a:solidFill>
+                  <a:srgbClr val="222222"/>
+                </a:solidFill>
+              </a:defRPr>
+            </a:pPr>
+            <a:r>
+              <a:t>• Objectifs de l'enseignement</a:t>
+            </a:r>
+          </a:p>
+          <a:p>
+            <a:pPr>
+              <a:spcAft>
+                <a:spcPts val="600"/>
+              </a:spcAft>
+              <a:defRPr sz="1600">
+                <a:solidFill>
+                  <a:srgbClr val="222222"/>
+                </a:solidFill>
+              </a:defRPr>
+            </a:pPr>
+            <a:r>
+              <a:t>• Bibliographie et ressources externes</a:t>
+            </a:r>
+          </a:p>
+          <a:p>
+            <a:pPr>
+              <a:spcAft>
+                <a:spcPts val="600"/>
+              </a:spcAft>
+              <a:defRPr sz="1600">
+                <a:solidFill>
+                  <a:srgbClr val="222222"/>
+                </a:solidFill>
+              </a:defRPr>
+            </a:pPr>
+            <a:r>
+              <a:t>• Plan du Cours</a:t>
+            </a:r>
+          </a:p>
+          <a:p>
+            <a:pPr>
+              <a:spcAft>
+                <a:spcPts val="600"/>
+              </a:spcAft>
+              <a:defRPr sz="1600">
+                <a:solidFill>
+                  <a:srgbClr val="222222"/>
+                </a:solidFill>
+              </a:defRPr>
+            </a:pPr>
+            <a:r>
+              <a:t>• 1. Introduction(10 min)</a:t>
+            </a:r>
+          </a:p>
+          <a:p>
+            <a:pPr>
+              <a:spcAft>
+                <a:spcPts val="600"/>
+              </a:spcAft>
+              <a:defRPr sz="1600">
+                <a:solidFill>
+                  <a:srgbClr val="222222"/>
+                </a:solidFill>
+              </a:defRPr>
+            </a:pPr>
+            <a:r>
+              <a:t>• 2. Qu'est-ce que l'Informatique ?(10 min)</a:t>
+            </a:r>
+          </a:p>
+          <a:p>
+            <a:pPr>
+              <a:spcAft>
+                <a:spcPts val="600"/>
+              </a:spcAft>
+              <a:defRPr sz="1600">
+                <a:solidFill>
+                  <a:srgbClr val="222222"/>
+                </a:solidFill>
+              </a:defRPr>
+            </a:pPr>
+            <a:r>
+              <a:t>• 3. Modèle de von Neumann(15 min)</a:t>
+            </a:r>
+          </a:p>
+          <a:p>
+            <a:pPr>
+              <a:spcAft>
+                <a:spcPts val="600"/>
+              </a:spcAft>
+              <a:defRPr sz="1600">
+                <a:solidFill>
+                  <a:srgbClr val="222222"/>
+                </a:solidFill>
+              </a:defRPr>
+            </a:pPr>
+            <a:r>
+              <a:t>• 4. Composants Matériels(15 min)</a:t>
+            </a:r>
+          </a:p>
+          <a:p>
+            <a:pPr>
+              <a:spcAft>
+                <a:spcPts val="600"/>
+              </a:spcAft>
+              <a:defRPr sz="1600">
+                <a:solidFill>
+                  <a:srgbClr val="222222"/>
+                </a:solidFill>
+              </a:defRPr>
+            </a:pPr>
+            <a:r>
+              <a:t>• 5. Logiciels (Software)(15 min)</a:t>
+            </a:r>
+          </a:p>
+          <a:p>
+            <a:pPr>
+              <a:spcAft>
+                <a:spcPts val="600"/>
+              </a:spcAft>
+              <a:defRPr sz="1600">
+                <a:solidFill>
+                  <a:srgbClr val="222222"/>
+                </a:solidFill>
+              </a:defRPr>
+            </a:pPr>
+            <a:r>
+              <a:t>• 6. Interaction Hardware / Software(10 min)</a:t>
             </a:r>
           </a:p>
         </p:txBody>
@@ -4526,15 +4613,20 @@
   <p:clrMapOvr>
     <a:masterClrMapping/>
   </p:clrMapOvr>
-  <p:transition spd="med">
-    <p:fade/>
-  </p:transition>
 </p:sld>
 </file>
 
-<file path=ppt/slides/slide9.xml><?xml version="1.0" encoding="utf-8"?>
+<file path=ppt/slides/slide4.xml><?xml version="1.0" encoding="utf-8"?>
 <p:sld xmlns:a="http://schemas.openxmlformats.org/drawingml/2006/main" xmlns:p="http://schemas.openxmlformats.org/presentationml/2006/main" xmlns:r="http://schemas.openxmlformats.org/officeDocument/2006/relationships">
   <p:cSld>
+    <p:bg>
+      <p:bgPr>
+        <a:solidFill>
+          <a:srgbClr val="FFFFFF"/>
+        </a:solidFill>
+        <a:effectLst/>
+      </p:bgPr>
+    </p:bg>
     <p:spTree>
       <p:nvGrpSpPr>
         <p:cNvPr id="1" name=""/>
@@ -4544,83 +4636,57 @@
       <p:grpSpPr/>
       <p:sp>
         <p:nvSpPr>
-          <p:cNvPr id="2" name="Title 1"/>
-          <p:cNvSpPr>
-            <a:spLocks noGrp="1"/>
-          </p:cNvSpPr>
-          <p:nvPr>
-            <p:ph type="title"/>
-          </p:nvPr>
-        </p:nvSpPr>
-        <p:spPr/>
-        <p:txBody>
-          <a:bodyPr/>
-          <a:lstStyle/>
-          <a:p>
-            <a:r>
-              <a:t>Bonnes pratiques</a:t>
-            </a:r>
-          </a:p>
-        </p:txBody>
-      </p:sp>
-      <p:sp>
-        <p:nvSpPr>
-          <p:cNvPr id="3" name="Content Placeholder 2"/>
-          <p:cNvSpPr>
-            <a:spLocks noGrp="1"/>
-          </p:cNvSpPr>
-          <p:nvPr>
-            <p:ph idx="1"/>
-          </p:nvPr>
-        </p:nvSpPr>
-        <p:spPr/>
-        <p:txBody>
-          <a:bodyPr/>
-          <a:lstStyle/>
-          <a:p>
-            <a:pPr>
-              <a:defRPr sz="2000"/>
-            </a:pPr>
-            <a:r>
-              <a:t>✔️ Ctrl+S + Cloud</a:t>
-            </a:r>
-          </a:p>
-          <a:p>
-            <a:pPr>
-              <a:defRPr sz="2000"/>
-            </a:pPr>
-            <a:r>
-              <a:t>✔️ Organisation dossiers</a:t>
-            </a:r>
-          </a:p>
-          <a:p>
-            <a:pPr>
-              <a:defRPr sz="2000"/>
-            </a:pPr>
-            <a:r>
-              <a:t>✔️ Mises à jour</a:t>
-            </a:r>
-          </a:p>
-          <a:p>
-            <a:pPr>
-              <a:defRPr sz="2000"/>
-            </a:pPr>
-            <a:r>
-              <a:t>✔️ Antivirus actif</a:t>
-            </a:r>
-          </a:p>
-        </p:txBody>
-      </p:sp>
-      <p:sp>
-        <p:nvSpPr>
-          <p:cNvPr id="4" name="TextBox 3"/>
+          <p:cNvPr id="2" name="Rectangle 1"/>
+          <p:cNvSpPr/>
+          <p:nvPr/>
+        </p:nvSpPr>
+        <p:spPr>
+          <a:xfrm>
+            <a:off x="0" y="0"/>
+            <a:ext cx="109728" cy="6858000"/>
+          </a:xfrm>
+          <a:prstGeom prst="rect">
+            <a:avLst/>
+          </a:prstGeom>
+          <a:solidFill>
+            <a:srgbClr val="2C6E49"/>
+          </a:solidFill>
+          <a:ln>
+            <a:noFill/>
+          </a:ln>
+        </p:spPr>
+        <p:style>
+          <a:lnRef idx="1">
+            <a:schemeClr val="accent1"/>
+          </a:lnRef>
+          <a:fillRef idx="3">
+            <a:schemeClr val="accent1"/>
+          </a:fillRef>
+          <a:effectRef idx="2">
+            <a:schemeClr val="accent1"/>
+          </a:effectRef>
+          <a:fontRef idx="minor">
+            <a:schemeClr val="lt1"/>
+          </a:fontRef>
+        </p:style>
+        <p:txBody>
+          <a:bodyPr rtlCol="0" anchor="ctr"/>
+          <a:lstStyle/>
+          <a:p>
+            <a:pPr algn="ctr"/>
+          </a:p>
+        </p:txBody>
+      </p:sp>
+      <p:sp>
+        <p:nvSpPr>
+          <p:cNvPr id="3" name="TextBox 2"/>
           <p:cNvSpPr txBox="1"/>
           <p:nvPr/>
         </p:nvSpPr>
         <p:spPr>
           <a:xfrm>
-            <a:off x="365760" y="6446520"/>
-            <a:ext cx="8412480" cy="320040"/>
+            <a:off x="457200" y="365760"/>
+            <a:ext cx="8229600" cy="640080"/>
           </a:xfrm>
           <a:prstGeom prst="rect">
             <a:avLst/>
@@ -4628,20 +4694,88 @@
           <a:noFill/>
         </p:spPr>
         <p:txBody>
-          <a:bodyPr wrap="none">
+          <a:bodyPr wrap="square">
             <a:spAutoFit/>
           </a:bodyPr>
           <a:lstStyle/>
           <a:p>
-            <a:pPr algn="ctr">
-              <a:defRPr sz="900">
-                <a:solidFill>
-                  <a:srgbClr val="404040"/>
-                </a:solidFill>
-              </a:defRPr>
-            </a:pPr>
-            <a:r>
-              <a:t>Cours TIC 02  •  Diapositive 9/10</a:t>
+            <a:pPr algn="l">
+              <a:defRPr sz="2200" b="1">
+                <a:solidFill>
+                  <a:srgbClr val="1A5C33"/>
+                </a:solidFill>
+              </a:defRPr>
+            </a:pPr>
+            <a:r>
+              <a:t>Fiche cours — Plateforme e-learning (Moodle)</a:t>
+            </a:r>
+          </a:p>
+        </p:txBody>
+      </p:sp>
+      <p:sp>
+        <p:nvSpPr>
+          <p:cNvPr id="4" name="TextBox 3"/>
+          <p:cNvSpPr txBox="1"/>
+          <p:nvPr/>
+        </p:nvSpPr>
+        <p:spPr>
+          <a:xfrm>
+            <a:off x="457200" y="1371600"/>
+            <a:ext cx="7772400" cy="4572000"/>
+          </a:xfrm>
+          <a:prstGeom prst="rect">
+            <a:avLst/>
+          </a:prstGeom>
+          <a:noFill/>
+        </p:spPr>
+        <p:txBody>
+          <a:bodyPr wrap="square">
+            <a:spAutoFit/>
+          </a:bodyPr>
+          <a:lstStyle/>
+          <a:p>
+            <a:pPr>
+              <a:spcAft>
+                <a:spcPts val="600"/>
+              </a:spcAft>
+              <a:defRPr sz="1400">
+                <a:solidFill>
+                  <a:srgbClr val="222222"/>
+                </a:solidFill>
+              </a:defRPr>
+            </a:pPr>
+            <a:r>
+              <a:t>• Référentiel :titres et structure alignés sur Canvas Univ-Mosta (elearning.univ-usto.dz) ; bonnes pratiques benchmark 10 universités algériennes (voirBENCHMARK_10_UNIVERSITES_ELEARNING.md).</a:t>
+            </a:r>
+          </a:p>
+          <a:p>
+            <a:pPr>
+              <a:spcAft>
+                <a:spcPts val="600"/>
+              </a:spcAft>
+              <a:defRPr sz="1400">
+                <a:solidFill>
+                  <a:srgbClr val="222222"/>
+                </a:solidFill>
+              </a:defRPr>
+            </a:pPr>
+            <a:r>
+              <a:t>• Public visé :Licence 1 Langues, ENS 1ère année</a:t>
+            </a:r>
+          </a:p>
+          <a:p>
+            <a:pPr>
+              <a:spcAft>
+                <a:spcPts val="600"/>
+              </a:spcAft>
+              <a:defRPr sz="1400">
+                <a:solidFill>
+                  <a:srgbClr val="222222"/>
+                </a:solidFill>
+              </a:defRPr>
+            </a:pPr>
+            <a:r>
+              <a:t>• Compétences pré-requises :Séance TIC 01 ; notions de fichiers et dossiers</a:t>
             </a:r>
           </a:p>
         </p:txBody>
@@ -4651,9 +4785,931 @@
   <p:clrMapOvr>
     <a:masterClrMapping/>
   </p:clrMapOvr>
-  <p:transition spd="med">
-    <p:fade/>
-  </p:transition>
+</p:sld>
+</file>
+
+<file path=ppt/slides/slide5.xml><?xml version="1.0" encoding="utf-8"?>
+<p:sld xmlns:a="http://schemas.openxmlformats.org/drawingml/2006/main" xmlns:p="http://schemas.openxmlformats.org/presentationml/2006/main" xmlns:r="http://schemas.openxmlformats.org/officeDocument/2006/relationships">
+  <p:cSld>
+    <p:bg>
+      <p:bgPr>
+        <a:solidFill>
+          <a:srgbClr val="FFFFFF"/>
+        </a:solidFill>
+        <a:effectLst/>
+      </p:bgPr>
+    </p:bg>
+    <p:spTree>
+      <p:nvGrpSpPr>
+        <p:cNvPr id="1" name=""/>
+        <p:cNvGrpSpPr/>
+        <p:nvPr/>
+      </p:nvGrpSpPr>
+      <p:grpSpPr/>
+      <p:sp>
+        <p:nvSpPr>
+          <p:cNvPr id="2" name="Rectangle 1"/>
+          <p:cNvSpPr/>
+          <p:nvPr/>
+        </p:nvSpPr>
+        <p:spPr>
+          <a:xfrm>
+            <a:off x="0" y="0"/>
+            <a:ext cx="109728" cy="6858000"/>
+          </a:xfrm>
+          <a:prstGeom prst="rect">
+            <a:avLst/>
+          </a:prstGeom>
+          <a:solidFill>
+            <a:srgbClr val="2C6E49"/>
+          </a:solidFill>
+          <a:ln>
+            <a:noFill/>
+          </a:ln>
+        </p:spPr>
+        <p:style>
+          <a:lnRef idx="1">
+            <a:schemeClr val="accent1"/>
+          </a:lnRef>
+          <a:fillRef idx="3">
+            <a:schemeClr val="accent1"/>
+          </a:fillRef>
+          <a:effectRef idx="2">
+            <a:schemeClr val="accent1"/>
+          </a:effectRef>
+          <a:fontRef idx="minor">
+            <a:schemeClr val="lt1"/>
+          </a:fontRef>
+        </p:style>
+        <p:txBody>
+          <a:bodyPr rtlCol="0" anchor="ctr"/>
+          <a:lstStyle/>
+          <a:p>
+            <a:pPr algn="ctr"/>
+          </a:p>
+        </p:txBody>
+      </p:sp>
+      <p:sp>
+        <p:nvSpPr>
+          <p:cNvPr id="3" name="TextBox 2"/>
+          <p:cNvSpPr txBox="1"/>
+          <p:nvPr/>
+        </p:nvSpPr>
+        <p:spPr>
+          <a:xfrm>
+            <a:off x="457200" y="365760"/>
+            <a:ext cx="8229600" cy="640080"/>
+          </a:xfrm>
+          <a:prstGeom prst="rect">
+            <a:avLst/>
+          </a:prstGeom>
+          <a:noFill/>
+        </p:spPr>
+        <p:txBody>
+          <a:bodyPr wrap="square">
+            <a:spAutoFit/>
+          </a:bodyPr>
+          <a:lstStyle/>
+          <a:p>
+            <a:pPr algn="l">
+              <a:defRPr sz="2200" b="1">
+                <a:solidFill>
+                  <a:srgbClr val="1A5C33"/>
+                </a:solidFill>
+              </a:defRPr>
+            </a:pPr>
+            <a:r>
+              <a:t>Objectifs de l'enseignement</a:t>
+            </a:r>
+          </a:p>
+        </p:txBody>
+      </p:sp>
+      <p:sp>
+        <p:nvSpPr>
+          <p:cNvPr id="4" name="TextBox 3"/>
+          <p:cNvSpPr txBox="1"/>
+          <p:nvPr/>
+        </p:nvSpPr>
+        <p:spPr>
+          <a:xfrm>
+            <a:off x="457200" y="1371600"/>
+            <a:ext cx="7772400" cy="4572000"/>
+          </a:xfrm>
+          <a:prstGeom prst="rect">
+            <a:avLst/>
+          </a:prstGeom>
+          <a:noFill/>
+        </p:spPr>
+        <p:txBody>
+          <a:bodyPr wrap="square">
+            <a:spAutoFit/>
+          </a:bodyPr>
+          <a:lstStyle/>
+          <a:p>
+            <a:pPr>
+              <a:spcAft>
+                <a:spcPts val="600"/>
+              </a:spcAft>
+              <a:defRPr sz="1400">
+                <a:solidFill>
+                  <a:srgbClr val="222222"/>
+                </a:solidFill>
+              </a:defRPr>
+            </a:pPr>
+            <a:r>
+              <a:t>• En termes de savoir :- Décrire le modèle de von Neumann (CPU, mémoire, E/S, bus)</a:t>
+            </a:r>
+            <a:br/>
+            <a:r>
+              <a:t>- Distinguer hardware et software</a:t>
+            </a:r>
+            <a:br/>
+            <a:r>
+              <a:t>- Expliquer le rôle du système d'exploitation</a:t>
+            </a:r>
+          </a:p>
+          <a:p>
+            <a:pPr>
+              <a:spcAft>
+                <a:spcPts val="600"/>
+              </a:spcAft>
+              <a:defRPr sz="1400">
+                <a:solidFill>
+                  <a:srgbClr val="222222"/>
+                </a:solidFill>
+              </a:defRPr>
+            </a:pPr>
+            <a:r>
+              <a:t>• En termes de savoir-faire :- Identifier les composants d'un PC portable de cours</a:t>
+            </a:r>
+            <a:br/>
+            <a:r>
+              <a:t>- Gérer l'espace disque et les formats de fichiers</a:t>
+            </a:r>
+            <a:br/>
+            <a:r>
+              <a:t>- Diagnostiquer un problème simple (câble, redémarrage)</a:t>
+            </a:r>
+          </a:p>
+          <a:p>
+            <a:pPr>
+              <a:spcAft>
+                <a:spcPts val="600"/>
+              </a:spcAft>
+              <a:defRPr sz="1400">
+                <a:solidFill>
+                  <a:srgbClr val="222222"/>
+                </a:solidFill>
+              </a:defRPr>
+            </a:pPr>
+            <a:r>
+              <a:t>• En termes de savoir-être :- Prendre soin du matériel universitaire</a:t>
+            </a:r>
+            <a:br/>
+            <a:r>
+              <a:t>- Organiser son espace de travail numérique</a:t>
+            </a:r>
+          </a:p>
+          <a:p>
+            <a:pPr>
+              <a:spcAft>
+                <a:spcPts val="600"/>
+              </a:spcAft>
+              <a:defRPr sz="1400">
+                <a:solidFill>
+                  <a:srgbClr val="222222"/>
+                </a:solidFill>
+              </a:defRPr>
+            </a:pPr>
+            <a:r>
+              <a:t>• Mode d'évaluation :TD 40 % + QCM 20 % + mini-projet schéma machine 20 % + examen 20 %</a:t>
+            </a:r>
+          </a:p>
+        </p:txBody>
+      </p:sp>
+    </p:spTree>
+  </p:cSld>
+  <p:clrMapOvr>
+    <a:masterClrMapping/>
+  </p:clrMapOvr>
+</p:sld>
+</file>
+
+<file path=ppt/slides/slide6.xml><?xml version="1.0" encoding="utf-8"?>
+<p:sld xmlns:a="http://schemas.openxmlformats.org/drawingml/2006/main" xmlns:p="http://schemas.openxmlformats.org/presentationml/2006/main" xmlns:r="http://schemas.openxmlformats.org/officeDocument/2006/relationships">
+  <p:cSld>
+    <p:bg>
+      <p:bgPr>
+        <a:solidFill>
+          <a:srgbClr val="FFFFFF"/>
+        </a:solidFill>
+        <a:effectLst/>
+      </p:bgPr>
+    </p:bg>
+    <p:spTree>
+      <p:nvGrpSpPr>
+        <p:cNvPr id="1" name=""/>
+        <p:cNvGrpSpPr/>
+        <p:nvPr/>
+      </p:nvGrpSpPr>
+      <p:grpSpPr/>
+      <p:sp>
+        <p:nvSpPr>
+          <p:cNvPr id="2" name="Rectangle 1"/>
+          <p:cNvSpPr/>
+          <p:nvPr/>
+        </p:nvSpPr>
+        <p:spPr>
+          <a:xfrm>
+            <a:off x="0" y="0"/>
+            <a:ext cx="109728" cy="6858000"/>
+          </a:xfrm>
+          <a:prstGeom prst="rect">
+            <a:avLst/>
+          </a:prstGeom>
+          <a:solidFill>
+            <a:srgbClr val="2C6E49"/>
+          </a:solidFill>
+          <a:ln>
+            <a:noFill/>
+          </a:ln>
+        </p:spPr>
+        <p:style>
+          <a:lnRef idx="1">
+            <a:schemeClr val="accent1"/>
+          </a:lnRef>
+          <a:fillRef idx="3">
+            <a:schemeClr val="accent1"/>
+          </a:fillRef>
+          <a:effectRef idx="2">
+            <a:schemeClr val="accent1"/>
+          </a:effectRef>
+          <a:fontRef idx="minor">
+            <a:schemeClr val="lt1"/>
+          </a:fontRef>
+        </p:style>
+        <p:txBody>
+          <a:bodyPr rtlCol="0" anchor="ctr"/>
+          <a:lstStyle/>
+          <a:p>
+            <a:pPr algn="ctr"/>
+          </a:p>
+        </p:txBody>
+      </p:sp>
+      <p:sp>
+        <p:nvSpPr>
+          <p:cNvPr id="3" name="TextBox 2"/>
+          <p:cNvSpPr txBox="1"/>
+          <p:nvPr/>
+        </p:nvSpPr>
+        <p:spPr>
+          <a:xfrm>
+            <a:off x="457200" y="365760"/>
+            <a:ext cx="8229600" cy="640080"/>
+          </a:xfrm>
+          <a:prstGeom prst="rect">
+            <a:avLst/>
+          </a:prstGeom>
+          <a:noFill/>
+        </p:spPr>
+        <p:txBody>
+          <a:bodyPr wrap="square">
+            <a:spAutoFit/>
+          </a:bodyPr>
+          <a:lstStyle/>
+          <a:p>
+            <a:pPr algn="l">
+              <a:defRPr sz="2200" b="1">
+                <a:solidFill>
+                  <a:srgbClr val="1A5C33"/>
+                </a:solidFill>
+              </a:defRPr>
+            </a:pPr>
+            <a:r>
+              <a:t>Bibliographie et ressources externes</a:t>
+            </a:r>
+          </a:p>
+        </p:txBody>
+      </p:sp>
+      <p:sp>
+        <p:nvSpPr>
+          <p:cNvPr id="4" name="TextBox 3"/>
+          <p:cNvSpPr txBox="1"/>
+          <p:nvPr/>
+        </p:nvSpPr>
+        <p:spPr>
+          <a:xfrm>
+            <a:off x="457200" y="1371600"/>
+            <a:ext cx="7772400" cy="4572000"/>
+          </a:xfrm>
+          <a:prstGeom prst="rect">
+            <a:avLst/>
+          </a:prstGeom>
+          <a:noFill/>
+        </p:spPr>
+        <p:txBody>
+          <a:bodyPr wrap="square">
+            <a:spAutoFit/>
+          </a:bodyPr>
+          <a:lstStyle/>
+          <a:p>
+            <a:pPr>
+              <a:spcAft>
+                <a:spcPts val="600"/>
+              </a:spcAft>
+              <a:defRPr sz="1400">
+                <a:solidFill>
+                  <a:srgbClr val="222222"/>
+                </a:solidFill>
+              </a:defRPr>
+            </a:pPr>
+            <a:r>
+              <a:t>• Structure Machine 1 — Univ. Biskra (elearning.univ-biskra.dz) ; Goupille — Technologie des ordinateurs</a:t>
+            </a:r>
+          </a:p>
+          <a:p>
+            <a:pPr>
+              <a:spcAft>
+                <a:spcPts val="600"/>
+              </a:spcAft>
+              <a:defRPr sz="1400">
+                <a:solidFill>
+                  <a:srgbClr val="222222"/>
+                </a:solidFill>
+              </a:defRPr>
+            </a:pPr>
+            <a:r>
+              <a:t>• Contact enseignant :BELACEL Madani —madani.belacel@univ-mosta.dz</a:t>
+            </a:r>
+          </a:p>
+        </p:txBody>
+      </p:sp>
+    </p:spTree>
+  </p:cSld>
+  <p:clrMapOvr>
+    <a:masterClrMapping/>
+  </p:clrMapOvr>
+</p:sld>
+</file>
+
+<file path=ppt/slides/slide7.xml><?xml version="1.0" encoding="utf-8"?>
+<p:sld xmlns:a="http://schemas.openxmlformats.org/drawingml/2006/main" xmlns:p="http://schemas.openxmlformats.org/presentationml/2006/main" xmlns:r="http://schemas.openxmlformats.org/officeDocument/2006/relationships">
+  <p:cSld>
+    <p:bg>
+      <p:bgPr>
+        <a:solidFill>
+          <a:srgbClr val="FFFFFF"/>
+        </a:solidFill>
+        <a:effectLst/>
+      </p:bgPr>
+    </p:bg>
+    <p:spTree>
+      <p:nvGrpSpPr>
+        <p:cNvPr id="1" name=""/>
+        <p:cNvGrpSpPr/>
+        <p:nvPr/>
+      </p:nvGrpSpPr>
+      <p:grpSpPr/>
+      <p:sp>
+        <p:nvSpPr>
+          <p:cNvPr id="2" name="Rectangle 1"/>
+          <p:cNvSpPr/>
+          <p:nvPr/>
+        </p:nvSpPr>
+        <p:spPr>
+          <a:xfrm>
+            <a:off x="0" y="0"/>
+            <a:ext cx="109728" cy="6858000"/>
+          </a:xfrm>
+          <a:prstGeom prst="rect">
+            <a:avLst/>
+          </a:prstGeom>
+          <a:solidFill>
+            <a:srgbClr val="2C6E49"/>
+          </a:solidFill>
+          <a:ln>
+            <a:noFill/>
+          </a:ln>
+        </p:spPr>
+        <p:style>
+          <a:lnRef idx="1">
+            <a:schemeClr val="accent1"/>
+          </a:lnRef>
+          <a:fillRef idx="3">
+            <a:schemeClr val="accent1"/>
+          </a:fillRef>
+          <a:effectRef idx="2">
+            <a:schemeClr val="accent1"/>
+          </a:effectRef>
+          <a:fontRef idx="minor">
+            <a:schemeClr val="lt1"/>
+          </a:fontRef>
+        </p:style>
+        <p:txBody>
+          <a:bodyPr rtlCol="0" anchor="ctr"/>
+          <a:lstStyle/>
+          <a:p>
+            <a:pPr algn="ctr"/>
+          </a:p>
+        </p:txBody>
+      </p:sp>
+      <p:sp>
+        <p:nvSpPr>
+          <p:cNvPr id="3" name="TextBox 2"/>
+          <p:cNvSpPr txBox="1"/>
+          <p:nvPr/>
+        </p:nvSpPr>
+        <p:spPr>
+          <a:xfrm>
+            <a:off x="457200" y="365760"/>
+            <a:ext cx="8229600" cy="640080"/>
+          </a:xfrm>
+          <a:prstGeom prst="rect">
+            <a:avLst/>
+          </a:prstGeom>
+          <a:noFill/>
+        </p:spPr>
+        <p:txBody>
+          <a:bodyPr wrap="square">
+            <a:spAutoFit/>
+          </a:bodyPr>
+          <a:lstStyle/>
+          <a:p>
+            <a:pPr algn="l">
+              <a:defRPr sz="2200" b="1">
+                <a:solidFill>
+                  <a:srgbClr val="1A5C33"/>
+                </a:solidFill>
+              </a:defRPr>
+            </a:pPr>
+            <a:r>
+              <a:t>Plan du Cours</a:t>
+            </a:r>
+          </a:p>
+        </p:txBody>
+      </p:sp>
+      <p:sp>
+        <p:nvSpPr>
+          <p:cNvPr id="4" name="TextBox 3"/>
+          <p:cNvSpPr txBox="1"/>
+          <p:nvPr/>
+        </p:nvSpPr>
+        <p:spPr>
+          <a:xfrm>
+            <a:off x="457200" y="1371600"/>
+            <a:ext cx="7772400" cy="4572000"/>
+          </a:xfrm>
+          <a:prstGeom prst="rect">
+            <a:avLst/>
+          </a:prstGeom>
+          <a:noFill/>
+        </p:spPr>
+        <p:txBody>
+          <a:bodyPr wrap="square">
+            <a:spAutoFit/>
+          </a:bodyPr>
+          <a:lstStyle/>
+          <a:p>
+            <a:pPr>
+              <a:spcAft>
+                <a:spcPts val="600"/>
+              </a:spcAft>
+              <a:defRPr sz="1400">
+                <a:solidFill>
+                  <a:srgbClr val="222222"/>
+                </a:solidFill>
+              </a:defRPr>
+            </a:pPr>
+            <a:r>
+              <a:t>• Introduction : Pourquoi comprendre l'ordinateur ?</a:t>
+            </a:r>
+          </a:p>
+          <a:p>
+            <a:pPr>
+              <a:spcAft>
+                <a:spcPts val="600"/>
+              </a:spcAft>
+              <a:defRPr sz="1400">
+                <a:solidFill>
+                  <a:srgbClr val="222222"/>
+                </a:solidFill>
+              </a:defRPr>
+            </a:pPr>
+            <a:r>
+              <a:t>• Définition de l'informatique</a:t>
+            </a:r>
+          </a:p>
+          <a:p>
+            <a:pPr>
+              <a:spcAft>
+                <a:spcPts val="600"/>
+              </a:spcAft>
+              <a:defRPr sz="1400">
+                <a:solidFill>
+                  <a:srgbClr val="222222"/>
+                </a:solidFill>
+              </a:defRPr>
+            </a:pPr>
+            <a:r>
+              <a:t>• L'ordinateur : concept et modèle de von Neumann</a:t>
+            </a:r>
+          </a:p>
+          <a:p>
+            <a:pPr>
+              <a:spcAft>
+                <a:spcPts val="600"/>
+              </a:spcAft>
+              <a:defRPr sz="1400">
+                <a:solidFill>
+                  <a:srgbClr val="222222"/>
+                </a:solidFill>
+              </a:defRPr>
+            </a:pPr>
+            <a:r>
+              <a:t>• Composants matériels (Hardware)</a:t>
+            </a:r>
+          </a:p>
+          <a:p>
+            <a:pPr>
+              <a:spcAft>
+                <a:spcPts val="600"/>
+              </a:spcAft>
+              <a:defRPr sz="1400">
+                <a:solidFill>
+                  <a:srgbClr val="222222"/>
+                </a:solidFill>
+              </a:defRPr>
+            </a:pPr>
+            <a:r>
+              <a:t>• Logiciels et systèmes d'exploitation (Software)</a:t>
+            </a:r>
+          </a:p>
+          <a:p>
+            <a:pPr>
+              <a:spcAft>
+                <a:spcPts val="600"/>
+              </a:spcAft>
+              <a:defRPr sz="1400">
+                <a:solidFill>
+                  <a:srgbClr val="222222"/>
+                </a:solidFill>
+              </a:defRPr>
+            </a:pPr>
+            <a:r>
+              <a:t>• Interaction entre Hardware et Software</a:t>
+            </a:r>
+          </a:p>
+          <a:p>
+            <a:pPr>
+              <a:spcAft>
+                <a:spcPts val="600"/>
+              </a:spcAft>
+              <a:defRPr sz="1400">
+                <a:solidFill>
+                  <a:srgbClr val="222222"/>
+                </a:solidFill>
+              </a:defRPr>
+            </a:pPr>
+            <a:r>
+              <a:t>• Bonnes pratiques pour étudiants universitaires</a:t>
+            </a:r>
+          </a:p>
+          <a:p>
+            <a:pPr>
+              <a:spcAft>
+                <a:spcPts val="600"/>
+              </a:spcAft>
+              <a:defRPr sz="1400">
+                <a:solidFill>
+                  <a:srgbClr val="222222"/>
+                </a:solidFill>
+              </a:defRPr>
+            </a:pPr>
+            <a:r>
+              <a:t>• Conclusion et transition vers Windows</a:t>
+            </a:r>
+          </a:p>
+        </p:txBody>
+      </p:sp>
+    </p:spTree>
+  </p:cSld>
+  <p:clrMapOvr>
+    <a:masterClrMapping/>
+  </p:clrMapOvr>
+</p:sld>
+</file>
+
+<file path=ppt/slides/slide8.xml><?xml version="1.0" encoding="utf-8"?>
+<p:sld xmlns:a="http://schemas.openxmlformats.org/drawingml/2006/main" xmlns:p="http://schemas.openxmlformats.org/presentationml/2006/main" xmlns:r="http://schemas.openxmlformats.org/officeDocument/2006/relationships">
+  <p:cSld>
+    <p:bg>
+      <p:bgPr>
+        <a:solidFill>
+          <a:srgbClr val="FFFFFF"/>
+        </a:solidFill>
+        <a:effectLst/>
+      </p:bgPr>
+    </p:bg>
+    <p:spTree>
+      <p:nvGrpSpPr>
+        <p:cNvPr id="1" name=""/>
+        <p:cNvGrpSpPr/>
+        <p:nvPr/>
+      </p:nvGrpSpPr>
+      <p:grpSpPr/>
+      <p:sp>
+        <p:nvSpPr>
+          <p:cNvPr id="2" name="Rectangle 1"/>
+          <p:cNvSpPr/>
+          <p:nvPr/>
+        </p:nvSpPr>
+        <p:spPr>
+          <a:xfrm>
+            <a:off x="0" y="0"/>
+            <a:ext cx="109728" cy="6858000"/>
+          </a:xfrm>
+          <a:prstGeom prst="rect">
+            <a:avLst/>
+          </a:prstGeom>
+          <a:solidFill>
+            <a:srgbClr val="2C6E49"/>
+          </a:solidFill>
+          <a:ln>
+            <a:noFill/>
+          </a:ln>
+        </p:spPr>
+        <p:style>
+          <a:lnRef idx="1">
+            <a:schemeClr val="accent1"/>
+          </a:lnRef>
+          <a:fillRef idx="3">
+            <a:schemeClr val="accent1"/>
+          </a:fillRef>
+          <a:effectRef idx="2">
+            <a:schemeClr val="accent1"/>
+          </a:effectRef>
+          <a:fontRef idx="minor">
+            <a:schemeClr val="lt1"/>
+          </a:fontRef>
+        </p:style>
+        <p:txBody>
+          <a:bodyPr rtlCol="0" anchor="ctr"/>
+          <a:lstStyle/>
+          <a:p>
+            <a:pPr algn="ctr"/>
+          </a:p>
+        </p:txBody>
+      </p:sp>
+      <p:sp>
+        <p:nvSpPr>
+          <p:cNvPr id="3" name="TextBox 2"/>
+          <p:cNvSpPr txBox="1"/>
+          <p:nvPr/>
+        </p:nvSpPr>
+        <p:spPr>
+          <a:xfrm>
+            <a:off x="457200" y="365760"/>
+            <a:ext cx="8229600" cy="640080"/>
+          </a:xfrm>
+          <a:prstGeom prst="rect">
+            <a:avLst/>
+          </a:prstGeom>
+          <a:noFill/>
+        </p:spPr>
+        <p:txBody>
+          <a:bodyPr wrap="square">
+            <a:spAutoFit/>
+          </a:bodyPr>
+          <a:lstStyle/>
+          <a:p>
+            <a:pPr algn="l">
+              <a:defRPr sz="2200" b="1">
+                <a:solidFill>
+                  <a:srgbClr val="1A5C33"/>
+                </a:solidFill>
+              </a:defRPr>
+            </a:pPr>
+            <a:r>
+              <a:t>1. Introduction(10 min)</a:t>
+            </a:r>
+          </a:p>
+        </p:txBody>
+      </p:sp>
+      <p:sp>
+        <p:nvSpPr>
+          <p:cNvPr id="4" name="TextBox 3"/>
+          <p:cNvSpPr txBox="1"/>
+          <p:nvPr/>
+        </p:nvSpPr>
+        <p:spPr>
+          <a:xfrm>
+            <a:off x="457200" y="1371600"/>
+            <a:ext cx="7772400" cy="4572000"/>
+          </a:xfrm>
+          <a:prstGeom prst="rect">
+            <a:avLst/>
+          </a:prstGeom>
+          <a:noFill/>
+        </p:spPr>
+        <p:txBody>
+          <a:bodyPr wrap="square">
+            <a:spAutoFit/>
+          </a:bodyPr>
+          <a:lstStyle/>
+          <a:p>
+            <a:pPr>
+              <a:spcAft>
+                <a:spcPts val="600"/>
+              </a:spcAft>
+              <a:defRPr sz="1400">
+                <a:solidFill>
+                  <a:srgbClr val="222222"/>
+                </a:solidFill>
+              </a:defRPr>
+            </a:pPr>
+            <a:r>
+              <a:t>• Comprendre le fonctionnement de l'ordinateur est essentiel pour tout étudiant, même en filière Langues. Cela permet de mieux utiliser ses outils (Word, navigateur, Moodle), éviter les pertes de données, diagnostiquer les problèmes simples et organiser efficacement son espace de travail numérique.</a:t>
+            </a:r>
+          </a:p>
+          <a:p>
+            <a:pPr>
+              <a:spcAft>
+                <a:spcPts val="600"/>
+              </a:spcAft>
+              <a:defRPr sz="1400">
+                <a:solidFill>
+                  <a:srgbClr val="222222"/>
+                </a:solidFill>
+              </a:defRPr>
+            </a:pPr>
+            <a:r>
+              <a:t>• L'ordinateur est devenule principal instrument de travail universitaire.</a:t>
+            </a:r>
+          </a:p>
+        </p:txBody>
+      </p:sp>
+    </p:spTree>
+  </p:cSld>
+  <p:clrMapOvr>
+    <a:masterClrMapping/>
+  </p:clrMapOvr>
+</p:sld>
+</file>
+
+<file path=ppt/slides/slide9.xml><?xml version="1.0" encoding="utf-8"?>
+<p:sld xmlns:a="http://schemas.openxmlformats.org/drawingml/2006/main" xmlns:p="http://schemas.openxmlformats.org/presentationml/2006/main" xmlns:r="http://schemas.openxmlformats.org/officeDocument/2006/relationships">
+  <p:cSld>
+    <p:bg>
+      <p:bgPr>
+        <a:solidFill>
+          <a:srgbClr val="FFFFFF"/>
+        </a:solidFill>
+        <a:effectLst/>
+      </p:bgPr>
+    </p:bg>
+    <p:spTree>
+      <p:nvGrpSpPr>
+        <p:cNvPr id="1" name=""/>
+        <p:cNvGrpSpPr/>
+        <p:nvPr/>
+      </p:nvGrpSpPr>
+      <p:grpSpPr/>
+      <p:sp>
+        <p:nvSpPr>
+          <p:cNvPr id="2" name="Rectangle 1"/>
+          <p:cNvSpPr/>
+          <p:nvPr/>
+        </p:nvSpPr>
+        <p:spPr>
+          <a:xfrm>
+            <a:off x="0" y="0"/>
+            <a:ext cx="109728" cy="6858000"/>
+          </a:xfrm>
+          <a:prstGeom prst="rect">
+            <a:avLst/>
+          </a:prstGeom>
+          <a:solidFill>
+            <a:srgbClr val="2C6E49"/>
+          </a:solidFill>
+          <a:ln>
+            <a:noFill/>
+          </a:ln>
+        </p:spPr>
+        <p:style>
+          <a:lnRef idx="1">
+            <a:schemeClr val="accent1"/>
+          </a:lnRef>
+          <a:fillRef idx="3">
+            <a:schemeClr val="accent1"/>
+          </a:fillRef>
+          <a:effectRef idx="2">
+            <a:schemeClr val="accent1"/>
+          </a:effectRef>
+          <a:fontRef idx="minor">
+            <a:schemeClr val="lt1"/>
+          </a:fontRef>
+        </p:style>
+        <p:txBody>
+          <a:bodyPr rtlCol="0" anchor="ctr"/>
+          <a:lstStyle/>
+          <a:p>
+            <a:pPr algn="ctr"/>
+          </a:p>
+        </p:txBody>
+      </p:sp>
+      <p:sp>
+        <p:nvSpPr>
+          <p:cNvPr id="3" name="TextBox 2"/>
+          <p:cNvSpPr txBox="1"/>
+          <p:nvPr/>
+        </p:nvSpPr>
+        <p:spPr>
+          <a:xfrm>
+            <a:off x="457200" y="365760"/>
+            <a:ext cx="8229600" cy="640080"/>
+          </a:xfrm>
+          <a:prstGeom prst="rect">
+            <a:avLst/>
+          </a:prstGeom>
+          <a:noFill/>
+        </p:spPr>
+        <p:txBody>
+          <a:bodyPr wrap="square">
+            <a:spAutoFit/>
+          </a:bodyPr>
+          <a:lstStyle/>
+          <a:p>
+            <a:pPr algn="l">
+              <a:defRPr sz="2200" b="1">
+                <a:solidFill>
+                  <a:srgbClr val="1A5C33"/>
+                </a:solidFill>
+              </a:defRPr>
+            </a:pPr>
+            <a:r>
+              <a:t>2. Qu'est-ce que l'Informatique ?(10 min)</a:t>
+            </a:r>
+          </a:p>
+        </p:txBody>
+      </p:sp>
+      <p:sp>
+        <p:nvSpPr>
+          <p:cNvPr id="4" name="TextBox 3"/>
+          <p:cNvSpPr txBox="1"/>
+          <p:nvPr/>
+        </p:nvSpPr>
+        <p:spPr>
+          <a:xfrm>
+            <a:off x="457200" y="1371600"/>
+            <a:ext cx="7772400" cy="4572000"/>
+          </a:xfrm>
+          <a:prstGeom prst="rect">
+            <a:avLst/>
+          </a:prstGeom>
+          <a:noFill/>
+        </p:spPr>
+        <p:txBody>
+          <a:bodyPr wrap="square">
+            <a:spAutoFit/>
+          </a:bodyPr>
+          <a:lstStyle/>
+          <a:p>
+            <a:pPr>
+              <a:spcAft>
+                <a:spcPts val="600"/>
+              </a:spcAft>
+              <a:defRPr sz="1400">
+                <a:solidFill>
+                  <a:srgbClr val="222222"/>
+                </a:solidFill>
+              </a:defRPr>
+            </a:pPr>
+            <a:r>
+              <a:t>• L'informatiqueest la science dutraitement automatique de l'informationà l'aide d'algorithmes exécutés par des machines. Elle inclut la théorie, le matériel (hardware), les logiciels (software) et les réseaux.</a:t>
+            </a:r>
+          </a:p>
+          <a:p>
+            <a:pPr>
+              <a:spcAft>
+                <a:spcPts val="600"/>
+              </a:spcAft>
+              <a:defRPr sz="1400">
+                <a:solidFill>
+                  <a:srgbClr val="222222"/>
+                </a:solidFill>
+              </a:defRPr>
+            </a:pPr>
+            <a:r>
+              <a:t>• Approcheutilisateur: comprendre suffisamment pour bien utiliser l'ordinateur dans ses études.</a:t>
+            </a:r>
+          </a:p>
+        </p:txBody>
+      </p:sp>
+    </p:spTree>
+  </p:cSld>
+  <p:clrMapOvr>
+    <a:masterClrMapping/>
+  </p:clrMapOvr>
 </p:sld>
 </file>
 
@@ -4975,319 +6031,4 @@
   </a:objectDefaults>
   <a:extraClrSchemeLst/>
 </a:theme>
-</file>
-
-<file path=ppt/theme/theme2.xml><?xml version="1.0" encoding="utf-8"?>
-<a:theme xmlns:a="http://schemas.openxmlformats.org/drawingml/2006/main" name="Thème Office">
-  <a:themeElements>
-    <a:clrScheme name="Office">
-      <a:dk1>
-        <a:sysClr val="windowText" lastClr="000000"/>
-      </a:dk1>
-      <a:lt1>
-        <a:sysClr val="window" lastClr="FFFFFF"/>
-      </a:lt1>
-      <a:dk2>
-        <a:srgbClr val="0E2841"/>
-      </a:dk2>
-      <a:lt2>
-        <a:srgbClr val="E8E8E8"/>
-      </a:lt2>
-      <a:accent1>
-        <a:srgbClr val="156082"/>
-      </a:accent1>
-      <a:accent2>
-        <a:srgbClr val="E97132"/>
-      </a:accent2>
-      <a:accent3>
-        <a:srgbClr val="196B24"/>
-      </a:accent3>
-      <a:accent4>
-        <a:srgbClr val="0F9ED5"/>
-      </a:accent4>
-      <a:accent5>
-        <a:srgbClr val="A02B93"/>
-      </a:accent5>
-      <a:accent6>
-        <a:srgbClr val="4EA72E"/>
-      </a:accent6>
-      <a:hlink>
-        <a:srgbClr val="467886"/>
-      </a:hlink>
-      <a:folHlink>
-        <a:srgbClr val="96607D"/>
-      </a:folHlink>
-    </a:clrScheme>
-    <a:fontScheme name="Office">
-      <a:majorFont>
-        <a:latin typeface="Aptos Display" panose="02110004020202020204"/>
-        <a:ea typeface=""/>
-        <a:cs typeface=""/>
-        <a:font script="Jpan" typeface="游ゴシック Light"/>
-        <a:font script="Hang" typeface="맑은 고딕"/>
-        <a:font script="Hans" typeface="等线 Light"/>
-        <a:font script="Hant" typeface="新細明體"/>
-        <a:font script="Arab" typeface="Times New Roman"/>
-        <a:font script="Hebr" typeface="Times New Roman"/>
-        <a:font script="Thai" typeface="Angsana New"/>
-        <a:font script="Ethi" typeface="Nyala"/>
-        <a:font script="Beng" typeface="Vrinda"/>
-        <a:font script="Gujr" typeface="Shruti"/>
-        <a:font script="Khmr" typeface="MoolBoran"/>
-        <a:font script="Knda" typeface="Tunga"/>
-        <a:font script="Guru" typeface="Raavi"/>
-        <a:font script="Cans" typeface="Euphemia"/>
-        <a:font script="Cher" typeface="Plantagenet Cherokee"/>
-        <a:font script="Yiii" typeface="Microsoft Yi Baiti"/>
-        <a:font script="Tibt" typeface="Microsoft Himalaya"/>
-        <a:font script="Thaa" typeface="MV Boli"/>
-        <a:font script="Deva" typeface="Mangal"/>
-        <a:font script="Telu" typeface="Gautami"/>
-        <a:font script="Taml" typeface="Latha"/>
-        <a:font script="Syrc" typeface="Estrangelo Edessa"/>
-        <a:font script="Orya" typeface="Kalinga"/>
-        <a:font script="Mlym" typeface="Kartika"/>
-        <a:font script="Laoo" typeface="DokChampa"/>
-        <a:font script="Sinh" typeface="Iskoola Pota"/>
-        <a:font script="Mong" typeface="Mongolian Baiti"/>
-        <a:font script="Viet" typeface="Times New Roman"/>
-        <a:font script="Uigh" typeface="Microsoft Uighur"/>
-        <a:font script="Geor" typeface="Sylfaen"/>
-        <a:font script="Armn" typeface="Arial"/>
-        <a:font script="Bugi" typeface="Leelawadee UI"/>
-        <a:font script="Bopo" typeface="Microsoft JhengHei"/>
-        <a:font script="Java" typeface="Javanese Text"/>
-        <a:font script="Lisu" typeface="Segoe UI"/>
-        <a:font script="Mymr" typeface="Myanmar Text"/>
-        <a:font script="Nkoo" typeface="Ebrima"/>
-        <a:font script="Olck" typeface="Nirmala UI"/>
-        <a:font script="Osma" typeface="Ebrima"/>
-        <a:font script="Phag" typeface="Phagspa"/>
-        <a:font script="Syrn" typeface="Estrangelo Edessa"/>
-        <a:font script="Syrj" typeface="Estrangelo Edessa"/>
-        <a:font script="Syre" typeface="Estrangelo Edessa"/>
-        <a:font script="Sora" typeface="Nirmala UI"/>
-        <a:font script="Tale" typeface="Microsoft Tai Le"/>
-        <a:font script="Talu" typeface="Microsoft New Tai Lue"/>
-        <a:font script="Tfng" typeface="Ebrima"/>
-      </a:majorFont>
-      <a:minorFont>
-        <a:latin typeface="Aptos" panose="02110004020202020204"/>
-        <a:ea typeface=""/>
-        <a:cs typeface=""/>
-        <a:font script="Jpan" typeface="游ゴシック"/>
-        <a:font script="Hang" typeface="맑은 고딕"/>
-        <a:font script="Hans" typeface="等线"/>
-        <a:font script="Hant" typeface="新細明體"/>
-        <a:font script="Arab" typeface="Arial"/>
-        <a:font script="Hebr" typeface="Arial"/>
-        <a:font script="Thai" typeface="Cordia New"/>
-        <a:font script="Ethi" typeface="Nyala"/>
-        <a:font script="Beng" typeface="Vrinda"/>
-        <a:font script="Gujr" typeface="Shruti"/>
-        <a:font script="Khmr" typeface="DaunPenh"/>
-        <a:font script="Knda" typeface="Tunga"/>
-        <a:font script="Guru" typeface="Raavi"/>
-        <a:font script="Cans" typeface="Euphemia"/>
-        <a:font script="Cher" typeface="Plantagenet Cherokee"/>
-        <a:font script="Yiii" typeface="Microsoft Yi Baiti"/>
-        <a:font script="Tibt" typeface="Microsoft Himalaya"/>
-        <a:font script="Thaa" typeface="MV Boli"/>
-        <a:font script="Deva" typeface="Mangal"/>
-        <a:font script="Telu" typeface="Gautami"/>
-        <a:font script="Taml" typeface="Latha"/>
-        <a:font script="Syrc" typeface="Estrangelo Edessa"/>
-        <a:font script="Orya" typeface="Kalinga"/>
-        <a:font script="Mlym" typeface="Kartika"/>
-        <a:font script="Laoo" typeface="DokChampa"/>
-        <a:font script="Sinh" typeface="Iskoola Pota"/>
-        <a:font script="Mong" typeface="Mongolian Baiti"/>
-        <a:font script="Viet" typeface="Arial"/>
-        <a:font script="Uigh" typeface="Microsoft Uighur"/>
-        <a:font script="Geor" typeface="Sylfaen"/>
-        <a:font script="Armn" typeface="Arial"/>
-        <a:font script="Bugi" typeface="Leelawadee UI"/>
-        <a:font script="Bopo" typeface="Microsoft JhengHei"/>
-        <a:font script="Java" typeface="Javanese Text"/>
-        <a:font script="Lisu" typeface="Segoe UI"/>
-        <a:font script="Mymr" typeface="Myanmar Text"/>
-        <a:font script="Nkoo" typeface="Ebrima"/>
-        <a:font script="Olck" typeface="Nirmala UI"/>
-        <a:font script="Osma" typeface="Ebrima"/>
-        <a:font script="Phag" typeface="Phagspa"/>
-        <a:font script="Syrn" typeface="Estrangelo Edessa"/>
-        <a:font script="Syrj" typeface="Estrangelo Edessa"/>
-        <a:font script="Syre" typeface="Estrangelo Edessa"/>
-        <a:font script="Sora" typeface="Nirmala UI"/>
-        <a:font script="Tale" typeface="Microsoft Tai Le"/>
-        <a:font script="Talu" typeface="Microsoft New Tai Lue"/>
-        <a:font script="Tfng" typeface="Ebrima"/>
-      </a:minorFont>
-    </a:fontScheme>
-    <a:fmtScheme name="Office">
-      <a:fillStyleLst>
-        <a:solidFill>
-          <a:schemeClr val="phClr"/>
-        </a:solidFill>
-        <a:gradFill rotWithShape="1">
-          <a:gsLst>
-            <a:gs pos="0">
-              <a:schemeClr val="phClr">
-                <a:lumMod val="110000"/>
-                <a:satMod val="105000"/>
-                <a:tint val="67000"/>
-              </a:schemeClr>
-            </a:gs>
-            <a:gs pos="50000">
-              <a:schemeClr val="phClr">
-                <a:lumMod val="105000"/>
-                <a:satMod val="103000"/>
-                <a:tint val="73000"/>
-              </a:schemeClr>
-            </a:gs>
-            <a:gs pos="100000">
-              <a:schemeClr val="phClr">
-                <a:lumMod val="105000"/>
-                <a:satMod val="109000"/>
-                <a:tint val="81000"/>
-              </a:schemeClr>
-            </a:gs>
-          </a:gsLst>
-          <a:lin ang="5400000" scaled="0"/>
-        </a:gradFill>
-        <a:gradFill rotWithShape="1">
-          <a:gsLst>
-            <a:gs pos="0">
-              <a:schemeClr val="phClr">
-                <a:satMod val="103000"/>
-                <a:lumMod val="102000"/>
-                <a:tint val="94000"/>
-              </a:schemeClr>
-            </a:gs>
-            <a:gs pos="50000">
-              <a:schemeClr val="phClr">
-                <a:satMod val="110000"/>
-                <a:lumMod val="100000"/>
-                <a:shade val="100000"/>
-              </a:schemeClr>
-            </a:gs>
-            <a:gs pos="100000">
-              <a:schemeClr val="phClr">
-                <a:lumMod val="99000"/>
-                <a:satMod val="120000"/>
-                <a:shade val="78000"/>
-              </a:schemeClr>
-            </a:gs>
-          </a:gsLst>
-          <a:lin ang="5400000" scaled="0"/>
-        </a:gradFill>
-      </a:fillStyleLst>
-      <a:lnStyleLst>
-        <a:ln w="12700" cap="flat" cmpd="sng" algn="ctr">
-          <a:solidFill>
-            <a:schemeClr val="phClr"/>
-          </a:solidFill>
-          <a:prstDash val="solid"/>
-          <a:miter lim="800000"/>
-        </a:ln>
-        <a:ln w="19050" cap="flat" cmpd="sng" algn="ctr">
-          <a:solidFill>
-            <a:schemeClr val="phClr"/>
-          </a:solidFill>
-          <a:prstDash val="solid"/>
-          <a:miter lim="800000"/>
-        </a:ln>
-        <a:ln w="25400" cap="flat" cmpd="sng" algn="ctr">
-          <a:solidFill>
-            <a:schemeClr val="phClr"/>
-          </a:solidFill>
-          <a:prstDash val="solid"/>
-          <a:miter lim="800000"/>
-        </a:ln>
-      </a:lnStyleLst>
-      <a:effectStyleLst>
-        <a:effectStyle>
-          <a:effectLst/>
-        </a:effectStyle>
-        <a:effectStyle>
-          <a:effectLst/>
-        </a:effectStyle>
-        <a:effectStyle>
-          <a:effectLst>
-            <a:outerShdw blurRad="57150" dist="19050" dir="5400000" algn="ctr" rotWithShape="0">
-              <a:srgbClr val="000000">
-                <a:alpha val="63000"/>
-              </a:srgbClr>
-            </a:outerShdw>
-          </a:effectLst>
-        </a:effectStyle>
-      </a:effectStyleLst>
-      <a:bgFillStyleLst>
-        <a:solidFill>
-          <a:schemeClr val="phClr"/>
-        </a:solidFill>
-        <a:solidFill>
-          <a:schemeClr val="phClr">
-            <a:tint val="95000"/>
-            <a:satMod val="170000"/>
-          </a:schemeClr>
-        </a:solidFill>
-        <a:gradFill rotWithShape="1">
-          <a:gsLst>
-            <a:gs pos="0">
-              <a:schemeClr val="phClr">
-                <a:tint val="93000"/>
-                <a:satMod val="150000"/>
-                <a:shade val="98000"/>
-                <a:lumMod val="102000"/>
-              </a:schemeClr>
-            </a:gs>
-            <a:gs pos="50000">
-              <a:schemeClr val="phClr">
-                <a:tint val="98000"/>
-                <a:satMod val="130000"/>
-                <a:shade val="90000"/>
-                <a:lumMod val="103000"/>
-              </a:schemeClr>
-            </a:gs>
-            <a:gs pos="100000">
-              <a:schemeClr val="phClr">
-                <a:shade val="63000"/>
-                <a:satMod val="120000"/>
-              </a:schemeClr>
-            </a:gs>
-          </a:gsLst>
-          <a:lin ang="5400000" scaled="0"/>
-        </a:gradFill>
-      </a:bgFillStyleLst>
-    </a:fmtScheme>
-  </a:themeElements>
-  <a:objectDefaults>
-    <a:lnDef>
-      <a:spPr/>
-      <a:bodyPr/>
-      <a:lstStyle/>
-      <a:style>
-        <a:lnRef idx="2">
-          <a:schemeClr val="accent1"/>
-        </a:lnRef>
-        <a:fillRef idx="0">
-          <a:schemeClr val="accent1"/>
-        </a:fillRef>
-        <a:effectRef idx="1">
-          <a:schemeClr val="accent1"/>
-        </a:effectRef>
-        <a:fontRef idx="minor">
-          <a:schemeClr val="tx1"/>
-        </a:fontRef>
-      </a:style>
-    </a:lnDef>
-  </a:objectDefaults>
-  <a:extraClrSchemeLst/>
-  <a:extLst>
-    <a:ext uri="{05A4C25C-085E-4340-85A3-A5531E510DB2}">
-      <thm15:themeFamily xmlns:thm15="http://schemas.microsoft.com/office/thememl/2012/main" name="Office Theme" id="{2E142A2C-CD16-42D6-873A-C26D2A0506FA}" vid="{1BDDFF52-6CD6-40A5-AB3C-68EB2F1E4D0A}"/>
-    </a:ext>
-  </a:extLst>
-</a:theme>
 </file>
--- a/cours/Module TIC/Département Français/Licence 1/Cours_TIC_02_Informatique_et_Ordinateur_FR.pptx
+++ b/cours/Module TIC/Département Français/Licence 1/Cours_TIC_02_Informatique_et_Ordinateur_FR.pptx
@@ -2850,7 +2850,7 @@
           <a:solidFill>
             <a:schemeClr val="tx1"/>
           </a:solidFill>
-          <a:latin typeface="+mj-lt"/>
+          <a:latin typeface="Poppins"/>
           <a:ea typeface="+mj-ea"/>
           <a:cs typeface="+mj-cs"/>
         </a:defRPr>
@@ -2867,7 +2867,7 @@
           <a:solidFill>
             <a:schemeClr val="tx1"/>
           </a:solidFill>
-          <a:latin typeface="+mn-lt"/>
+          <a:latin typeface="Poppins"/>
           <a:ea typeface="+mn-ea"/>
           <a:cs typeface="+mn-cs"/>
         </a:defRPr>
@@ -2882,7 +2882,7 @@
           <a:solidFill>
             <a:schemeClr val="tx1"/>
           </a:solidFill>
-          <a:latin typeface="+mn-lt"/>
+          <a:latin typeface="Poppins"/>
           <a:ea typeface="+mn-ea"/>
           <a:cs typeface="+mn-cs"/>
         </a:defRPr>
@@ -2897,7 +2897,7 @@
           <a:solidFill>
             <a:schemeClr val="tx1"/>
           </a:solidFill>
-          <a:latin typeface="+mn-lt"/>
+          <a:latin typeface="Poppins"/>
           <a:ea typeface="+mn-ea"/>
           <a:cs typeface="+mn-cs"/>
         </a:defRPr>
@@ -2912,7 +2912,7 @@
           <a:solidFill>
             <a:schemeClr val="tx1"/>
           </a:solidFill>
-          <a:latin typeface="+mn-lt"/>
+          <a:latin typeface="Poppins"/>
           <a:ea typeface="+mn-ea"/>
           <a:cs typeface="+mn-cs"/>
         </a:defRPr>
@@ -2927,7 +2927,7 @@
           <a:solidFill>
             <a:schemeClr val="tx1"/>
           </a:solidFill>
-          <a:latin typeface="+mn-lt"/>
+          <a:latin typeface="Poppins"/>
           <a:ea typeface="+mn-ea"/>
           <a:cs typeface="+mn-cs"/>
         </a:defRPr>
@@ -2942,7 +2942,7 @@
           <a:solidFill>
             <a:schemeClr val="tx1"/>
           </a:solidFill>
-          <a:latin typeface="+mn-lt"/>
+          <a:latin typeface="Poppins"/>
           <a:ea typeface="+mn-ea"/>
           <a:cs typeface="+mn-cs"/>
         </a:defRPr>
@@ -2957,7 +2957,7 @@
           <a:solidFill>
             <a:schemeClr val="tx1"/>
           </a:solidFill>
-          <a:latin typeface="+mn-lt"/>
+          <a:latin typeface="Poppins"/>
           <a:ea typeface="+mn-ea"/>
           <a:cs typeface="+mn-cs"/>
         </a:defRPr>
@@ -2972,7 +2972,7 @@
           <a:solidFill>
             <a:schemeClr val="tx1"/>
           </a:solidFill>
-          <a:latin typeface="+mn-lt"/>
+          <a:latin typeface="Poppins"/>
           <a:ea typeface="+mn-ea"/>
           <a:cs typeface="+mn-cs"/>
         </a:defRPr>
@@ -2987,7 +2987,7 @@
           <a:solidFill>
             <a:schemeClr val="tx1"/>
           </a:solidFill>
-          <a:latin typeface="+mn-lt"/>
+          <a:latin typeface="Poppins"/>
           <a:ea typeface="+mn-ea"/>
           <a:cs typeface="+mn-cs"/>
         </a:defRPr>
@@ -3002,7 +3002,7 @@
           <a:solidFill>
             <a:schemeClr val="tx1"/>
           </a:solidFill>
-          <a:latin typeface="+mn-lt"/>
+          <a:latin typeface="Poppins"/>
           <a:ea typeface="+mn-ea"/>
           <a:cs typeface="+mn-cs"/>
         </a:defRPr>
@@ -3012,7 +3012,7 @@
           <a:solidFill>
             <a:schemeClr val="tx1"/>
           </a:solidFill>
-          <a:latin typeface="+mn-lt"/>
+          <a:latin typeface="Poppins"/>
           <a:ea typeface="+mn-ea"/>
           <a:cs typeface="+mn-cs"/>
         </a:defRPr>
@@ -3022,7 +3022,7 @@
           <a:solidFill>
             <a:schemeClr val="tx1"/>
           </a:solidFill>
-          <a:latin typeface="+mn-lt"/>
+          <a:latin typeface="Poppins"/>
           <a:ea typeface="+mn-ea"/>
           <a:cs typeface="+mn-cs"/>
         </a:defRPr>
@@ -3032,7 +3032,7 @@
           <a:solidFill>
             <a:schemeClr val="tx1"/>
           </a:solidFill>
-          <a:latin typeface="+mn-lt"/>
+          <a:latin typeface="Poppins"/>
           <a:ea typeface="+mn-ea"/>
           <a:cs typeface="+mn-cs"/>
         </a:defRPr>
@@ -3042,7 +3042,7 @@
           <a:solidFill>
             <a:schemeClr val="tx1"/>
           </a:solidFill>
-          <a:latin typeface="+mn-lt"/>
+          <a:latin typeface="Poppins"/>
           <a:ea typeface="+mn-ea"/>
           <a:cs typeface="+mn-cs"/>
         </a:defRPr>
@@ -3052,7 +3052,7 @@
           <a:solidFill>
             <a:schemeClr val="tx1"/>
           </a:solidFill>
-          <a:latin typeface="+mn-lt"/>
+          <a:latin typeface="Poppins"/>
           <a:ea typeface="+mn-ea"/>
           <a:cs typeface="+mn-cs"/>
         </a:defRPr>
@@ -3062,7 +3062,7 @@
           <a:solidFill>
             <a:schemeClr val="tx1"/>
           </a:solidFill>
-          <a:latin typeface="+mn-lt"/>
+          <a:latin typeface="Poppins"/>
           <a:ea typeface="+mn-ea"/>
           <a:cs typeface="+mn-cs"/>
         </a:defRPr>
@@ -3072,7 +3072,7 @@
           <a:solidFill>
             <a:schemeClr val="tx1"/>
           </a:solidFill>
-          <a:latin typeface="+mn-lt"/>
+          <a:latin typeface="Poppins"/>
           <a:ea typeface="+mn-ea"/>
           <a:cs typeface="+mn-cs"/>
         </a:defRPr>
@@ -3082,7 +3082,7 @@
           <a:solidFill>
             <a:schemeClr val="tx1"/>
           </a:solidFill>
-          <a:latin typeface="+mn-lt"/>
+          <a:latin typeface="Poppins"/>
           <a:ea typeface="+mn-ea"/>
           <a:cs typeface="+mn-cs"/>
         </a:defRPr>
@@ -3097,9 +3097,7 @@
   <p:cSld>
     <p:bg>
       <p:bgPr>
-        <a:solidFill>
-          <a:srgbClr val="1A5C33"/>
-        </a:solidFill>
+        <a:solidFill>val="006847"/&gt;</a:solidFill>
         <a:effectLst/>
       </p:bgPr>
     </p:bg>
@@ -3134,9 +3132,7 @@
           <a:p>
             <a:pPr algn="ctr">
               <a:defRPr sz="3200" b="1">
-                <a:solidFill>
-                  <a:srgbClr val="FFFFFF"/>
-                </a:solidFill>
+                <a:solidFill>val="FFFFFF"/&gt;</a:solidFill>
               </a:defRPr>
             </a:pPr>
             <a:r>
@@ -3169,9 +3165,7 @@
           <a:p>
             <a:pPr algn="ctr">
               <a:defRPr sz="2000" b="0">
-                <a:solidFill>
-                  <a:srgbClr val="C5D9C7"/>
-                </a:solidFill>
+                <a:solidFill>val="DFE5EA"/&gt;</a:solidFill>
               </a:defRPr>
             </a:pPr>
             <a:r>
@@ -3204,13 +3198,52 @@
           <a:p>
             <a:pPr algn="ctr">
               <a:defRPr sz="1600" b="0">
+                <a:solidFill>val="B7C9BE"/&gt;</a:solidFill>
+              </a:defRPr>
+            </a:pPr>
+            <a:r>
+              <a:t>Université de Mostaganem — MCB</a:t>
+            </a:r>
+          </a:p>
+        </p:txBody>
+      </p:sp>
+      <p:sp>
+        <p:nvSpPr>
+          <p:cNvPr id="990001" name="Pied de page FLE"/>
+          <p:cNvSpPr>
+            <a:spLocks noGrp="1"/>
+          </p:cNvSpPr>
+          <p:nvPr/>
+        </p:nvSpPr>
+        <p:spPr>
+          <a:xfrm>
+            <a:off x="2880360" y="914400"/>
+            <a:ext cx="4572000" cy="274320"/>
+          </a:xfrm>
+          <a:prstGeom prst="rect">
+            <a:avLst/>
+          </a:prstGeom>
+        </p:spPr>
+        <p:txBody>
+          <a:bodyPr anchor="b"/>
+          <a:lstStyle/>
+          <a:p>
+            <a:pPr algn="r">
+              <a:defRPr sz="900">
                 <a:solidFill>
-                  <a:srgbClr val="A0CFA0"/>
+                  <a:srgbClr val="9AA7B6"/>
                 </a:solidFill>
-              </a:defRPr>
-            </a:pPr>
-            <a:r>
-              <a:t>Université de Mostaganem — MCB</a:t>
+                <a:latin typeface="Poppins"/>
+              </a:defRPr>
+            </a:pPr>
+            <a:r>
+              <a:rPr lang="fr-FR" sz="900">
+                <a:solidFill>
+                  <a:srgbClr val="9AA7B6"/>
+                </a:solidFill>
+                <a:latin typeface="Poppins"/>
+              </a:rPr>
+              <a:t>Université de Mostaganem — Dr. Madani BELACEL</a:t>
             </a:r>
           </a:p>
         </p:txBody>
@@ -3228,9 +3261,7 @@
   <p:cSld>
     <p:bg>
       <p:bgPr>
-        <a:solidFill>
-          <a:srgbClr val="FFFFFF"/>
-        </a:solidFill>
+        <a:solidFill>val="FFFFFF"/&gt;</a:solidFill>
         <a:effectLst/>
       </p:bgPr>
     </p:bg>
@@ -3255,9 +3286,7 @@
           <a:prstGeom prst="rect">
             <a:avLst/>
           </a:prstGeom>
-          <a:solidFill>
-            <a:srgbClr val="2C6E49"/>
-          </a:solidFill>
+          <a:solidFill>val="00875B"/&gt;</a:solidFill>
           <a:ln>
             <a:noFill/>
           </a:ln>
@@ -3308,9 +3337,7 @@
           <a:p>
             <a:pPr algn="l">
               <a:defRPr sz="2200" b="1">
-                <a:solidFill>
-                  <a:srgbClr val="1A5C33"/>
-                </a:solidFill>
+                <a:solidFill>val="006847"/&gt;</a:solidFill>
               </a:defRPr>
             </a:pPr>
             <a:r>
@@ -3346,9 +3373,7 @@
                 <a:spcPts val="600"/>
               </a:spcAft>
               <a:defRPr sz="1400">
-                <a:solidFill>
-                  <a:srgbClr val="222222"/>
-                </a:solidFill>
+                <a:solidFill>val="22344A"/&gt;</a:solidFill>
               </a:defRPr>
             </a:pPr>
             <a:r>
@@ -3361,13 +3386,52 @@
                 <a:spcPts val="600"/>
               </a:spcAft>
               <a:defRPr sz="1400">
+                <a:solidFill>val="22344A"/&gt;</a:solidFill>
+              </a:defRPr>
+            </a:pPr>
+            <a:r>
+              <a:t>• Ce fonctionnement suit lemodèle de von Neumann(1945), toujours utilisé aujourd'hui.</a:t>
+            </a:r>
+          </a:p>
+        </p:txBody>
+      </p:sp>
+      <p:sp>
+        <p:nvSpPr>
+          <p:cNvPr id="990001" name="Pied de page FLE"/>
+          <p:cNvSpPr>
+            <a:spLocks noGrp="1"/>
+          </p:cNvSpPr>
+          <p:nvPr/>
+        </p:nvSpPr>
+        <p:spPr>
+          <a:xfrm>
+            <a:off x="-228600" y="6400800"/>
+            <a:ext cx="109728" cy="274320"/>
+          </a:xfrm>
+          <a:prstGeom prst="rect">
+            <a:avLst/>
+          </a:prstGeom>
+        </p:spPr>
+        <p:txBody>
+          <a:bodyPr anchor="b"/>
+          <a:lstStyle/>
+          <a:p>
+            <a:pPr algn="r">
+              <a:defRPr sz="900">
                 <a:solidFill>
-                  <a:srgbClr val="222222"/>
+                  <a:srgbClr val="9AA7B6"/>
                 </a:solidFill>
-              </a:defRPr>
-            </a:pPr>
-            <a:r>
-              <a:t>• Ce fonctionnement suit lemodèle de von Neumann(1945), toujours utilisé aujourd'hui.</a:t>
+                <a:latin typeface="Poppins"/>
+              </a:defRPr>
+            </a:pPr>
+            <a:r>
+              <a:rPr lang="fr-FR" sz="900">
+                <a:solidFill>
+                  <a:srgbClr val="9AA7B6"/>
+                </a:solidFill>
+                <a:latin typeface="Poppins"/>
+              </a:rPr>
+              <a:t>Université de Mostaganem — Dr. Madani BELACEL</a:t>
             </a:r>
           </a:p>
         </p:txBody>
@@ -3385,9 +3449,7 @@
   <p:cSld>
     <p:bg>
       <p:bgPr>
-        <a:solidFill>
-          <a:srgbClr val="FFFFFF"/>
-        </a:solidFill>
+        <a:solidFill>val="FFFFFF"/&gt;</a:solidFill>
         <a:effectLst/>
       </p:bgPr>
     </p:bg>
@@ -3412,9 +3474,7 @@
           <a:prstGeom prst="rect">
             <a:avLst/>
           </a:prstGeom>
-          <a:solidFill>
-            <a:srgbClr val="2C6E49"/>
-          </a:solidFill>
+          <a:solidFill>val="00875B"/&gt;</a:solidFill>
           <a:ln>
             <a:noFill/>
           </a:ln>
@@ -3465,9 +3525,7 @@
           <a:p>
             <a:pPr algn="l">
               <a:defRPr sz="2200" b="1">
-                <a:solidFill>
-                  <a:srgbClr val="1A5C33"/>
-                </a:solidFill>
+                <a:solidFill>val="006847"/&gt;</a:solidFill>
               </a:defRPr>
             </a:pPr>
             <a:r>
@@ -3503,9 +3561,7 @@
                 <a:spcPts val="600"/>
               </a:spcAft>
               <a:defRPr sz="1400">
-                <a:solidFill>
-                  <a:srgbClr val="222222"/>
-                </a:solidFill>
+                <a:solidFill>val="22344A"/&gt;</a:solidFill>
               </a:defRPr>
             </a:pPr>
             <a:r>
@@ -3518,9 +3574,7 @@
                 <a:spcPts val="600"/>
               </a:spcAft>
               <a:defRPr sz="1400">
-                <a:solidFill>
-                  <a:srgbClr val="222222"/>
-                </a:solidFill>
+                <a:solidFill>val="22344A"/&gt;</a:solidFill>
               </a:defRPr>
             </a:pPr>
             <a:r>
@@ -3533,9 +3587,7 @@
                 <a:spcPts val="600"/>
               </a:spcAft>
               <a:defRPr sz="1400">
-                <a:solidFill>
-                  <a:srgbClr val="222222"/>
-                </a:solidFill>
+                <a:solidFill>val="22344A"/&gt;</a:solidFill>
               </a:defRPr>
             </a:pPr>
             <a:r>
@@ -3548,9 +3600,7 @@
                 <a:spcPts val="600"/>
               </a:spcAft>
               <a:defRPr sz="1400">
-                <a:solidFill>
-                  <a:srgbClr val="222222"/>
-                </a:solidFill>
+                <a:solidFill>val="22344A"/&gt;</a:solidFill>
               </a:defRPr>
             </a:pPr>
             <a:r>
@@ -3563,9 +3613,7 @@
                 <a:spcPts val="600"/>
               </a:spcAft>
               <a:defRPr sz="1400">
-                <a:solidFill>
-                  <a:srgbClr val="222222"/>
-                </a:solidFill>
+                <a:solidFill>val="22344A"/&gt;</a:solidFill>
               </a:defRPr>
             </a:pPr>
             <a:r>
@@ -3578,13 +3626,52 @@
                 <a:spcPts val="600"/>
               </a:spcAft>
               <a:defRPr sz="1400">
+                <a:solidFill>val="22344A"/&gt;</a:solidFill>
+              </a:defRPr>
+            </a:pPr>
+            <a:r>
+              <a:t>• Point important :la RAM perd les données non sauvegardées à l'extinction.</a:t>
+            </a:r>
+          </a:p>
+        </p:txBody>
+      </p:sp>
+      <p:sp>
+        <p:nvSpPr>
+          <p:cNvPr id="990001" name="Pied de page FLE"/>
+          <p:cNvSpPr>
+            <a:spLocks noGrp="1"/>
+          </p:cNvSpPr>
+          <p:nvPr/>
+        </p:nvSpPr>
+        <p:spPr>
+          <a:xfrm>
+            <a:off x="-228600" y="6400800"/>
+            <a:ext cx="109728" cy="274320"/>
+          </a:xfrm>
+          <a:prstGeom prst="rect">
+            <a:avLst/>
+          </a:prstGeom>
+        </p:spPr>
+        <p:txBody>
+          <a:bodyPr anchor="b"/>
+          <a:lstStyle/>
+          <a:p>
+            <a:pPr algn="r">
+              <a:defRPr sz="900">
                 <a:solidFill>
-                  <a:srgbClr val="222222"/>
+                  <a:srgbClr val="9AA7B6"/>
                 </a:solidFill>
-              </a:defRPr>
-            </a:pPr>
-            <a:r>
-              <a:t>• Point important :la RAM perd les données non sauvegardées à l'extinction.</a:t>
+                <a:latin typeface="Poppins"/>
+              </a:defRPr>
+            </a:pPr>
+            <a:r>
+              <a:rPr lang="fr-FR" sz="900">
+                <a:solidFill>
+                  <a:srgbClr val="9AA7B6"/>
+                </a:solidFill>
+                <a:latin typeface="Poppins"/>
+              </a:rPr>
+              <a:t>Université de Mostaganem — Dr. Madani BELACEL</a:t>
             </a:r>
           </a:p>
         </p:txBody>
@@ -3602,9 +3689,7 @@
   <p:cSld>
     <p:bg>
       <p:bgPr>
-        <a:solidFill>
-          <a:srgbClr val="FFFFFF"/>
-        </a:solidFill>
+        <a:solidFill>val="FFFFFF"/&gt;</a:solidFill>
         <a:effectLst/>
       </p:bgPr>
     </p:bg>
@@ -3629,9 +3714,7 @@
           <a:prstGeom prst="rect">
             <a:avLst/>
           </a:prstGeom>
-          <a:solidFill>
-            <a:srgbClr val="2C6E49"/>
-          </a:solidFill>
+          <a:solidFill>val="00875B"/&gt;</a:solidFill>
           <a:ln>
             <a:noFill/>
           </a:ln>
@@ -3682,9 +3765,7 @@
           <a:p>
             <a:pPr algn="l">
               <a:defRPr sz="2200" b="1">
-                <a:solidFill>
-                  <a:srgbClr val="1A5C33"/>
-                </a:solidFill>
+                <a:solidFill>val="006847"/&gt;</a:solidFill>
               </a:defRPr>
             </a:pPr>
             <a:r>
@@ -3720,9 +3801,7 @@
                 <a:spcPts val="600"/>
               </a:spcAft>
               <a:defRPr sz="1400">
-                <a:solidFill>
-                  <a:srgbClr val="222222"/>
-                </a:solidFill>
+                <a:solidFill>val="22344A"/&gt;</a:solidFill>
               </a:defRPr>
             </a:pPr>
             <a:r>
@@ -3735,9 +3814,7 @@
                 <a:spcPts val="600"/>
               </a:spcAft>
               <a:defRPr sz="1400">
-                <a:solidFill>
-                  <a:srgbClr val="222222"/>
-                </a:solidFill>
+                <a:solidFill>val="22344A"/&gt;</a:solidFill>
               </a:defRPr>
             </a:pPr>
             <a:r>
@@ -3750,9 +3827,7 @@
                 <a:spcPts val="600"/>
               </a:spcAft>
               <a:defRPr sz="1400">
-                <a:solidFill>
-                  <a:srgbClr val="222222"/>
-                </a:solidFill>
+                <a:solidFill>val="22344A"/&gt;</a:solidFill>
               </a:defRPr>
             </a:pPr>
             <a:r>
@@ -3765,13 +3840,52 @@
                 <a:spcPts val="600"/>
               </a:spcAft>
               <a:defRPr sz="1400">
+                <a:solidFill>val="22344A"/&gt;</a:solidFill>
+              </a:defRPr>
+            </a:pPr>
+            <a:r>
+              <a:t>• Le hardware est tangible ; le software est intangible mais indispensable.</a:t>
+            </a:r>
+          </a:p>
+        </p:txBody>
+      </p:sp>
+      <p:sp>
+        <p:nvSpPr>
+          <p:cNvPr id="990001" name="Pied de page FLE"/>
+          <p:cNvSpPr>
+            <a:spLocks noGrp="1"/>
+          </p:cNvSpPr>
+          <p:nvPr/>
+        </p:nvSpPr>
+        <p:spPr>
+          <a:xfrm>
+            <a:off x="-228600" y="6400800"/>
+            <a:ext cx="109728" cy="274320"/>
+          </a:xfrm>
+          <a:prstGeom prst="rect">
+            <a:avLst/>
+          </a:prstGeom>
+        </p:spPr>
+        <p:txBody>
+          <a:bodyPr anchor="b"/>
+          <a:lstStyle/>
+          <a:p>
+            <a:pPr algn="r">
+              <a:defRPr sz="900">
                 <a:solidFill>
-                  <a:srgbClr val="222222"/>
+                  <a:srgbClr val="9AA7B6"/>
                 </a:solidFill>
-              </a:defRPr>
-            </a:pPr>
-            <a:r>
-              <a:t>• Le hardware est tangible ; le software est intangible mais indispensable.</a:t>
+                <a:latin typeface="Poppins"/>
+              </a:defRPr>
+            </a:pPr>
+            <a:r>
+              <a:rPr lang="fr-FR" sz="900">
+                <a:solidFill>
+                  <a:srgbClr val="9AA7B6"/>
+                </a:solidFill>
+                <a:latin typeface="Poppins"/>
+              </a:rPr>
+              <a:t>Université de Mostaganem — Dr. Madani BELACEL</a:t>
             </a:r>
           </a:p>
         </p:txBody>
@@ -3789,9 +3903,7 @@
   <p:cSld>
     <p:bg>
       <p:bgPr>
-        <a:solidFill>
-          <a:srgbClr val="E8F0E9"/>
-        </a:solidFill>
+        <a:solidFill>val="F4F6F8"/&gt;</a:solidFill>
         <a:effectLst/>
       </p:bgPr>
     </p:bg>
@@ -3826,9 +3938,7 @@
           <a:p>
             <a:pPr algn="ctr">
               <a:defRPr sz="2600" b="1">
-                <a:solidFill>
-                  <a:srgbClr val="1A5C33"/>
-                </a:solidFill>
+                <a:solidFill>val="006847"/&gt;</a:solidFill>
               </a:defRPr>
             </a:pPr>
             <a:r>
@@ -3864,9 +3974,7 @@
                 <a:spcPts val="600"/>
               </a:spcAft>
               <a:defRPr sz="1600">
-                <a:solidFill>
-                  <a:srgbClr val="222222"/>
-                </a:solidFill>
+                <a:solidFill>val="22344A"/&gt;</a:solidFill>
               </a:defRPr>
             </a:pPr>
             <a:r>
@@ -3879,9 +3987,7 @@
                 <a:spcPts val="600"/>
               </a:spcAft>
               <a:defRPr sz="1600">
-                <a:solidFill>
-                  <a:srgbClr val="222222"/>
-                </a:solidFill>
+                <a:solidFill>val="22344A"/&gt;</a:solidFill>
               </a:defRPr>
             </a:pPr>
             <a:r>
@@ -3902,9 +4008,7 @@
                 <a:spcPts val="600"/>
               </a:spcAft>
               <a:defRPr sz="1600">
-                <a:solidFill>
-                  <a:srgbClr val="222222"/>
-                </a:solidFill>
+                <a:solidFill>val="22344A"/&gt;</a:solidFill>
               </a:defRPr>
             </a:pPr>
             <a:r>
@@ -3917,9 +4021,7 @@
                 <a:spcPts val="600"/>
               </a:spcAft>
               <a:defRPr sz="1600">
-                <a:solidFill>
-                  <a:srgbClr val="222222"/>
-                </a:solidFill>
+                <a:solidFill>val="22344A"/&gt;</a:solidFill>
               </a:defRPr>
             </a:pPr>
             <a:r>
@@ -3932,13 +4034,52 @@
                 <a:spcPts val="600"/>
               </a:spcAft>
               <a:defRPr sz="1600">
+                <a:solidFill>val="22344A"/&gt;</a:solidFill>
+              </a:defRPr>
+            </a:pPr>
+            <a:r>
+              <a:t>• Comprendre le fonctionnement de l'ordinateur est essentiel pour tout étudiant, même en filière Langues. Cela permet de mieux utiliser ses outils (Word, navigateur, Moodle), éviter les pertes de données, diagnostiquer les problèmes simples et organiser efficacement son espace de travail numérique.</a:t>
+            </a:r>
+          </a:p>
+        </p:txBody>
+      </p:sp>
+      <p:sp>
+        <p:nvSpPr>
+          <p:cNvPr id="990001" name="Pied de page FLE"/>
+          <p:cNvSpPr>
+            <a:spLocks noGrp="1"/>
+          </p:cNvSpPr>
+          <p:nvPr/>
+        </p:nvSpPr>
+        <p:spPr>
+          <a:xfrm>
+            <a:off x="2971800" y="182880"/>
+            <a:ext cx="4572000" cy="274320"/>
+          </a:xfrm>
+          <a:prstGeom prst="rect">
+            <a:avLst/>
+          </a:prstGeom>
+        </p:spPr>
+        <p:txBody>
+          <a:bodyPr anchor="b"/>
+          <a:lstStyle/>
+          <a:p>
+            <a:pPr algn="r">
+              <a:defRPr sz="900">
                 <a:solidFill>
-                  <a:srgbClr val="222222"/>
+                  <a:srgbClr val="9AA7B6"/>
                 </a:solidFill>
-              </a:defRPr>
-            </a:pPr>
-            <a:r>
-              <a:t>• Comprendre le fonctionnement de l'ordinateur est essentiel pour tout étudiant, même en filière Langues. Cela permet de mieux utiliser ses outils (Word, navigateur, Moodle), éviter les pertes de données, diagnostiquer les problèmes simples et organiser efficacement son espace de travail numérique.</a:t>
+                <a:latin typeface="Poppins"/>
+              </a:defRPr>
+            </a:pPr>
+            <a:r>
+              <a:rPr lang="fr-FR" sz="900">
+                <a:solidFill>
+                  <a:srgbClr val="9AA7B6"/>
+                </a:solidFill>
+                <a:latin typeface="Poppins"/>
+              </a:rPr>
+              <a:t>Université de Mostaganem — Dr. Madani BELACEL</a:t>
             </a:r>
           </a:p>
         </p:txBody>
@@ -3956,9 +4097,7 @@
   <p:cSld>
     <p:bg>
       <p:bgPr>
-        <a:solidFill>
-          <a:srgbClr val="FFFFFF"/>
-        </a:solidFill>
+        <a:solidFill>val="FFFFFF"/&gt;</a:solidFill>
         <a:effectLst/>
       </p:bgPr>
     </p:bg>
@@ -3993,9 +4132,7 @@
           <a:p>
             <a:pPr algn="ctr">
               <a:defRPr sz="2600" b="1">
-                <a:solidFill>
-                  <a:srgbClr val="1A5C33"/>
-                </a:solidFill>
+                <a:solidFill>val="006847"/&gt;</a:solidFill>
               </a:defRPr>
             </a:pPr>
             <a:r>
@@ -4031,9 +4168,7 @@
                 <a:spcPts val="600"/>
               </a:spcAft>
               <a:defRPr sz="1500">
-                <a:solidFill>
-                  <a:srgbClr val="222222"/>
-                </a:solidFill>
+                <a:solidFill>val="22344A"/&gt;</a:solidFill>
               </a:defRPr>
             </a:pPr>
             <a:r>
@@ -4046,9 +4181,7 @@
                 <a:spcPts val="600"/>
               </a:spcAft>
               <a:defRPr sz="1500">
-                <a:solidFill>
-                  <a:srgbClr val="222222"/>
-                </a:solidFill>
+                <a:solidFill>val="22344A"/&gt;</a:solidFill>
               </a:defRPr>
             </a:pPr>
             <a:r>
@@ -4061,9 +4194,7 @@
                 <a:spcPts val="600"/>
               </a:spcAft>
               <a:defRPr sz="1500">
-                <a:solidFill>
-                  <a:srgbClr val="222222"/>
-                </a:solidFill>
+                <a:solidFill>val="22344A"/&gt;</a:solidFill>
               </a:defRPr>
             </a:pPr>
             <a:r>
@@ -4076,9 +4207,7 @@
                 <a:spcPts val="600"/>
               </a:spcAft>
               <a:defRPr sz="1500">
-                <a:solidFill>
-                  <a:srgbClr val="222222"/>
-                </a:solidFill>
+                <a:solidFill>val="22344A"/&gt;</a:solidFill>
               </a:defRPr>
             </a:pPr>
             <a:r>
@@ -4091,13 +4220,52 @@
                 <a:spcPts val="600"/>
               </a:spcAft>
               <a:defRPr sz="1500">
+                <a:solidFill>val="22344A"/&gt;</a:solidFill>
+              </a:defRPr>
+            </a:pPr>
+            <a:r>
+              <a:t>• Préparer une courte présentation orale</a:t>
+            </a:r>
+          </a:p>
+        </p:txBody>
+      </p:sp>
+      <p:sp>
+        <p:nvSpPr>
+          <p:cNvPr id="990001" name="Pied de page FLE"/>
+          <p:cNvSpPr>
+            <a:spLocks noGrp="1"/>
+          </p:cNvSpPr>
+          <p:nvPr/>
+        </p:nvSpPr>
+        <p:spPr>
+          <a:xfrm>
+            <a:off x="2971800" y="182880"/>
+            <a:ext cx="4572000" cy="274320"/>
+          </a:xfrm>
+          <a:prstGeom prst="rect">
+            <a:avLst/>
+          </a:prstGeom>
+        </p:spPr>
+        <p:txBody>
+          <a:bodyPr anchor="b"/>
+          <a:lstStyle/>
+          <a:p>
+            <a:pPr algn="r">
+              <a:defRPr sz="900">
                 <a:solidFill>
-                  <a:srgbClr val="222222"/>
+                  <a:srgbClr val="9AA7B6"/>
                 </a:solidFill>
-              </a:defRPr>
-            </a:pPr>
-            <a:r>
-              <a:t>• Préparer une courte présentation orale</a:t>
+                <a:latin typeface="Poppins"/>
+              </a:defRPr>
+            </a:pPr>
+            <a:r>
+              <a:rPr lang="fr-FR" sz="900">
+                <a:solidFill>
+                  <a:srgbClr val="9AA7B6"/>
+                </a:solidFill>
+                <a:latin typeface="Poppins"/>
+              </a:rPr>
+              <a:t>Université de Mostaganem — Dr. Madani BELACEL</a:t>
             </a:r>
           </a:p>
         </p:txBody>
@@ -4115,9 +4283,7 @@
   <p:cSld>
     <p:bg>
       <p:bgPr>
-        <a:solidFill>
-          <a:srgbClr val="1A5C33"/>
-        </a:solidFill>
+        <a:solidFill>val="006847"/&gt;</a:solidFill>
         <a:effectLst/>
       </p:bgPr>
     </p:bg>
@@ -4152,9 +4318,7 @@
           <a:p>
             <a:pPr algn="ctr">
               <a:defRPr sz="2800" b="1">
-                <a:solidFill>
-                  <a:srgbClr val="FFFFFF"/>
-                </a:solidFill>
+                <a:solidFill>val="FFFFFF"/&gt;</a:solidFill>
               </a:defRPr>
             </a:pPr>
             <a:r>
@@ -4187,25 +4351,64 @@
           <a:p>
             <a:pPr algn="ctr">
               <a:defRPr sz="1800" b="0">
+                <a:solidFill>val="DFE5EA"/&gt;</a:solidFill>
+              </a:defRPr>
+            </a:pPr>
+            <a:r>
+              <a:t>Dr. BELACEL Madani</a:t>
+            </a:r>
+            <a:br/>
+            <a:r>
+              <a:t>Maître de Conférences B</a:t>
+            </a:r>
+            <a:br/>
+            <a:r>
+              <a:t>Université de Mostaganem</a:t>
+            </a:r>
+            <a:br/>
+            <a:r>
+              <a:t>madani.belacel@univ-mosta.dz</a:t>
+            </a:r>
+          </a:p>
+        </p:txBody>
+      </p:sp>
+      <p:sp>
+        <p:nvSpPr>
+          <p:cNvPr id="990001" name="Pied de page FLE"/>
+          <p:cNvSpPr>
+            <a:spLocks noGrp="1"/>
+          </p:cNvSpPr>
+          <p:nvPr/>
+        </p:nvSpPr>
+        <p:spPr>
+          <a:xfrm>
+            <a:off x="2880360" y="457200"/>
+            <a:ext cx="4572000" cy="274320"/>
+          </a:xfrm>
+          <a:prstGeom prst="rect">
+            <a:avLst/>
+          </a:prstGeom>
+        </p:spPr>
+        <p:txBody>
+          <a:bodyPr anchor="b"/>
+          <a:lstStyle/>
+          <a:p>
+            <a:pPr algn="r">
+              <a:defRPr sz="900">
                 <a:solidFill>
-                  <a:srgbClr val="C5D9C7"/>
+                  <a:srgbClr val="9AA7B6"/>
                 </a:solidFill>
-              </a:defRPr>
-            </a:pPr>
-            <a:r>
-              <a:t>Dr. BELACEL Madani</a:t>
-            </a:r>
-            <a:br/>
-            <a:r>
-              <a:t>Maître de Conférences B</a:t>
-            </a:r>
-            <a:br/>
-            <a:r>
-              <a:t>Université de Mostaganem</a:t>
-            </a:r>
-            <a:br/>
-            <a:r>
-              <a:t>madani.belacel@univ-mosta.dz</a:t>
+                <a:latin typeface="Poppins"/>
+              </a:defRPr>
+            </a:pPr>
+            <a:r>
+              <a:rPr lang="fr-FR" sz="900">
+                <a:solidFill>
+                  <a:srgbClr val="9AA7B6"/>
+                </a:solidFill>
+                <a:latin typeface="Poppins"/>
+              </a:rPr>
+              <a:t>Université de Mostaganem — Dr. Madani BELACEL</a:t>
             </a:r>
           </a:p>
         </p:txBody>
@@ -4223,9 +4426,7 @@
   <p:cSld>
     <p:bg>
       <p:bgPr>
-        <a:solidFill>
-          <a:srgbClr val="FFFFFF"/>
-        </a:solidFill>
+        <a:solidFill>val="FFFFFF"/&gt;</a:solidFill>
         <a:effectLst/>
       </p:bgPr>
     </p:bg>
@@ -4260,9 +4461,7 @@
           <a:p>
             <a:pPr algn="l">
               <a:defRPr sz="2600" b="1">
-                <a:solidFill>
-                  <a:srgbClr val="1A5C33"/>
-                </a:solidFill>
+                <a:solidFill>val="006847"/&gt;</a:solidFill>
               </a:defRPr>
             </a:pPr>
             <a:r>
@@ -4298,9 +4497,7 @@
                 <a:spcPts val="600"/>
               </a:spcAft>
               <a:defRPr sz="1500">
-                <a:solidFill>
-                  <a:srgbClr val="222222"/>
-                </a:solidFill>
+                <a:solidFill>val="22344A"/&gt;</a:solidFill>
               </a:defRPr>
             </a:pPr>
             <a:r>
@@ -4321,9 +4518,7 @@
                 <a:spcPts val="600"/>
               </a:spcAft>
               <a:defRPr sz="1500">
-                <a:solidFill>
-                  <a:srgbClr val="222222"/>
-                </a:solidFill>
+                <a:solidFill>val="22344A"/&gt;</a:solidFill>
               </a:defRPr>
             </a:pPr>
             <a:r>
@@ -4344,9 +4539,7 @@
                 <a:spcPts val="600"/>
               </a:spcAft>
               <a:defRPr sz="1500">
-                <a:solidFill>
-                  <a:srgbClr val="222222"/>
-                </a:solidFill>
+                <a:solidFill>val="22344A"/&gt;</a:solidFill>
               </a:defRPr>
             </a:pPr>
             <a:r>
@@ -4363,13 +4556,52 @@
                 <a:spcPts val="600"/>
               </a:spcAft>
               <a:defRPr sz="1500">
+                <a:solidFill>val="22344A"/&gt;</a:solidFill>
+              </a:defRPr>
+            </a:pPr>
+            <a:r>
+              <a:t>• Mode d'évaluation :TD 40 % + QCM 20 % + mini-projet schéma machine 20 % + examen 20 %</a:t>
+            </a:r>
+          </a:p>
+        </p:txBody>
+      </p:sp>
+      <p:sp>
+        <p:nvSpPr>
+          <p:cNvPr id="990001" name="Pied de page FLE"/>
+          <p:cNvSpPr>
+            <a:spLocks noGrp="1"/>
+          </p:cNvSpPr>
+          <p:nvPr/>
+        </p:nvSpPr>
+        <p:spPr>
+          <a:xfrm>
+            <a:off x="2971800" y="182880"/>
+            <a:ext cx="4572000" cy="274320"/>
+          </a:xfrm>
+          <a:prstGeom prst="rect">
+            <a:avLst/>
+          </a:prstGeom>
+        </p:spPr>
+        <p:txBody>
+          <a:bodyPr anchor="b"/>
+          <a:lstStyle/>
+          <a:p>
+            <a:pPr algn="r">
+              <a:defRPr sz="900">
                 <a:solidFill>
-                  <a:srgbClr val="222222"/>
+                  <a:srgbClr val="9AA7B6"/>
                 </a:solidFill>
-              </a:defRPr>
-            </a:pPr>
-            <a:r>
-              <a:t>• Mode d'évaluation :TD 40 % + QCM 20 % + mini-projet schéma machine 20 % + examen 20 %</a:t>
+                <a:latin typeface="Poppins"/>
+              </a:defRPr>
+            </a:pPr>
+            <a:r>
+              <a:rPr lang="fr-FR" sz="900">
+                <a:solidFill>
+                  <a:srgbClr val="9AA7B6"/>
+                </a:solidFill>
+                <a:latin typeface="Poppins"/>
+              </a:rPr>
+              <a:t>Université de Mostaganem — Dr. Madani BELACEL</a:t>
             </a:r>
           </a:p>
         </p:txBody>
@@ -4387,9 +4619,7 @@
   <p:cSld>
     <p:bg>
       <p:bgPr>
-        <a:solidFill>
-          <a:srgbClr val="FFFFFF"/>
-        </a:solidFill>
+        <a:solidFill>val="FFFFFF"/&gt;</a:solidFill>
         <a:effectLst/>
       </p:bgPr>
     </p:bg>
@@ -4424,9 +4654,7 @@
           <a:p>
             <a:pPr algn="l">
               <a:defRPr sz="2600" b="1">
-                <a:solidFill>
-                  <a:srgbClr val="1A5C33"/>
-                </a:solidFill>
+                <a:solidFill>val="006847"/&gt;</a:solidFill>
               </a:defRPr>
             </a:pPr>
             <a:r>
@@ -4462,9 +4690,7 @@
                 <a:spcPts val="600"/>
               </a:spcAft>
               <a:defRPr sz="1600">
-                <a:solidFill>
-                  <a:srgbClr val="222222"/>
-                </a:solidFill>
+                <a:solidFill>val="22344A"/&gt;</a:solidFill>
               </a:defRPr>
             </a:pPr>
             <a:r>
@@ -4477,9 +4703,7 @@
                 <a:spcPts val="600"/>
               </a:spcAft>
               <a:defRPr sz="1600">
-                <a:solidFill>
-                  <a:srgbClr val="222222"/>
-                </a:solidFill>
+                <a:solidFill>val="22344A"/&gt;</a:solidFill>
               </a:defRPr>
             </a:pPr>
             <a:r>
@@ -4492,9 +4716,7 @@
                 <a:spcPts val="600"/>
               </a:spcAft>
               <a:defRPr sz="1600">
-                <a:solidFill>
-                  <a:srgbClr val="222222"/>
-                </a:solidFill>
+                <a:solidFill>val="22344A"/&gt;</a:solidFill>
               </a:defRPr>
             </a:pPr>
             <a:r>
@@ -4507,9 +4729,7 @@
                 <a:spcPts val="600"/>
               </a:spcAft>
               <a:defRPr sz="1600">
-                <a:solidFill>
-                  <a:srgbClr val="222222"/>
-                </a:solidFill>
+                <a:solidFill>val="22344A"/&gt;</a:solidFill>
               </a:defRPr>
             </a:pPr>
             <a:r>
@@ -4522,9 +4742,7 @@
                 <a:spcPts val="600"/>
               </a:spcAft>
               <a:defRPr sz="1600">
-                <a:solidFill>
-                  <a:srgbClr val="222222"/>
-                </a:solidFill>
+                <a:solidFill>val="22344A"/&gt;</a:solidFill>
               </a:defRPr>
             </a:pPr>
             <a:r>
@@ -4537,9 +4755,7 @@
                 <a:spcPts val="600"/>
               </a:spcAft>
               <a:defRPr sz="1600">
-                <a:solidFill>
-                  <a:srgbClr val="222222"/>
-                </a:solidFill>
+                <a:solidFill>val="22344A"/&gt;</a:solidFill>
               </a:defRPr>
             </a:pPr>
             <a:r>
@@ -4552,9 +4768,7 @@
                 <a:spcPts val="600"/>
               </a:spcAft>
               <a:defRPr sz="1600">
-                <a:solidFill>
-                  <a:srgbClr val="222222"/>
-                </a:solidFill>
+                <a:solidFill>val="22344A"/&gt;</a:solidFill>
               </a:defRPr>
             </a:pPr>
             <a:r>
@@ -4567,9 +4781,7 @@
                 <a:spcPts val="600"/>
               </a:spcAft>
               <a:defRPr sz="1600">
-                <a:solidFill>
-                  <a:srgbClr val="222222"/>
-                </a:solidFill>
+                <a:solidFill>val="22344A"/&gt;</a:solidFill>
               </a:defRPr>
             </a:pPr>
             <a:r>
@@ -4582,9 +4794,7 @@
                 <a:spcPts val="600"/>
               </a:spcAft>
               <a:defRPr sz="1600">
-                <a:solidFill>
-                  <a:srgbClr val="222222"/>
-                </a:solidFill>
+                <a:solidFill>val="22344A"/&gt;</a:solidFill>
               </a:defRPr>
             </a:pPr>
             <a:r>
@@ -4597,13 +4807,52 @@
                 <a:spcPts val="600"/>
               </a:spcAft>
               <a:defRPr sz="1600">
+                <a:solidFill>val="22344A"/&gt;</a:solidFill>
+              </a:defRPr>
+            </a:pPr>
+            <a:r>
+              <a:t>• 6. Interaction Hardware / Software(10 min)</a:t>
+            </a:r>
+          </a:p>
+        </p:txBody>
+      </p:sp>
+      <p:sp>
+        <p:nvSpPr>
+          <p:cNvPr id="990001" name="Pied de page FLE"/>
+          <p:cNvSpPr>
+            <a:spLocks noGrp="1"/>
+          </p:cNvSpPr>
+          <p:nvPr/>
+        </p:nvSpPr>
+        <p:spPr>
+          <a:xfrm>
+            <a:off x="2971800" y="182880"/>
+            <a:ext cx="4572000" cy="274320"/>
+          </a:xfrm>
+          <a:prstGeom prst="rect">
+            <a:avLst/>
+          </a:prstGeom>
+        </p:spPr>
+        <p:txBody>
+          <a:bodyPr anchor="b"/>
+          <a:lstStyle/>
+          <a:p>
+            <a:pPr algn="r">
+              <a:defRPr sz="900">
                 <a:solidFill>
-                  <a:srgbClr val="222222"/>
+                  <a:srgbClr val="9AA7B6"/>
                 </a:solidFill>
-              </a:defRPr>
-            </a:pPr>
-            <a:r>
-              <a:t>• 6. Interaction Hardware / Software(10 min)</a:t>
+                <a:latin typeface="Poppins"/>
+              </a:defRPr>
+            </a:pPr>
+            <a:r>
+              <a:rPr lang="fr-FR" sz="900">
+                <a:solidFill>
+                  <a:srgbClr val="9AA7B6"/>
+                </a:solidFill>
+                <a:latin typeface="Poppins"/>
+              </a:rPr>
+              <a:t>Université de Mostaganem — Dr. Madani BELACEL</a:t>
             </a:r>
           </a:p>
         </p:txBody>
@@ -4621,9 +4870,7 @@
   <p:cSld>
     <p:bg>
       <p:bgPr>
-        <a:solidFill>
-          <a:srgbClr val="FFFFFF"/>
-        </a:solidFill>
+        <a:solidFill>val="FFFFFF"/&gt;</a:solidFill>
         <a:effectLst/>
       </p:bgPr>
     </p:bg>
@@ -4648,9 +4895,7 @@
           <a:prstGeom prst="rect">
             <a:avLst/>
           </a:prstGeom>
-          <a:solidFill>
-            <a:srgbClr val="2C6E49"/>
-          </a:solidFill>
+          <a:solidFill>val="00875B"/&gt;</a:solidFill>
           <a:ln>
             <a:noFill/>
           </a:ln>
@@ -4701,9 +4946,7 @@
           <a:p>
             <a:pPr algn="l">
               <a:defRPr sz="2200" b="1">
-                <a:solidFill>
-                  <a:srgbClr val="1A5C33"/>
-                </a:solidFill>
+                <a:solidFill>val="006847"/&gt;</a:solidFill>
               </a:defRPr>
             </a:pPr>
             <a:r>
@@ -4739,9 +4982,7 @@
                 <a:spcPts val="600"/>
               </a:spcAft>
               <a:defRPr sz="1400">
-                <a:solidFill>
-                  <a:srgbClr val="222222"/>
-                </a:solidFill>
+                <a:solidFill>val="22344A"/&gt;</a:solidFill>
               </a:defRPr>
             </a:pPr>
             <a:r>
@@ -4754,9 +4995,7 @@
                 <a:spcPts val="600"/>
               </a:spcAft>
               <a:defRPr sz="1400">
-                <a:solidFill>
-                  <a:srgbClr val="222222"/>
-                </a:solidFill>
+                <a:solidFill>val="22344A"/&gt;</a:solidFill>
               </a:defRPr>
             </a:pPr>
             <a:r>
@@ -4769,13 +5008,52 @@
                 <a:spcPts val="600"/>
               </a:spcAft>
               <a:defRPr sz="1400">
+                <a:solidFill>val="22344A"/&gt;</a:solidFill>
+              </a:defRPr>
+            </a:pPr>
+            <a:r>
+              <a:t>• Compétences pré-requises :Séance TIC 01 ; notions de fichiers et dossiers</a:t>
+            </a:r>
+          </a:p>
+        </p:txBody>
+      </p:sp>
+      <p:sp>
+        <p:nvSpPr>
+          <p:cNvPr id="990001" name="Pied de page FLE"/>
+          <p:cNvSpPr>
+            <a:spLocks noGrp="1"/>
+          </p:cNvSpPr>
+          <p:nvPr/>
+        </p:nvSpPr>
+        <p:spPr>
+          <a:xfrm>
+            <a:off x="-228600" y="6400800"/>
+            <a:ext cx="109728" cy="274320"/>
+          </a:xfrm>
+          <a:prstGeom prst="rect">
+            <a:avLst/>
+          </a:prstGeom>
+        </p:spPr>
+        <p:txBody>
+          <a:bodyPr anchor="b"/>
+          <a:lstStyle/>
+          <a:p>
+            <a:pPr algn="r">
+              <a:defRPr sz="900">
                 <a:solidFill>
-                  <a:srgbClr val="222222"/>
+                  <a:srgbClr val="9AA7B6"/>
                 </a:solidFill>
-              </a:defRPr>
-            </a:pPr>
-            <a:r>
-              <a:t>• Compétences pré-requises :Séance TIC 01 ; notions de fichiers et dossiers</a:t>
+                <a:latin typeface="Poppins"/>
+              </a:defRPr>
+            </a:pPr>
+            <a:r>
+              <a:rPr lang="fr-FR" sz="900">
+                <a:solidFill>
+                  <a:srgbClr val="9AA7B6"/>
+                </a:solidFill>
+                <a:latin typeface="Poppins"/>
+              </a:rPr>
+              <a:t>Université de Mostaganem — Dr. Madani BELACEL</a:t>
             </a:r>
           </a:p>
         </p:txBody>
@@ -4793,9 +5071,7 @@
   <p:cSld>
     <p:bg>
       <p:bgPr>
-        <a:solidFill>
-          <a:srgbClr val="FFFFFF"/>
-        </a:solidFill>
+        <a:solidFill>val="FFFFFF"/&gt;</a:solidFill>
         <a:effectLst/>
       </p:bgPr>
     </p:bg>
@@ -4820,9 +5096,7 @@
           <a:prstGeom prst="rect">
             <a:avLst/>
           </a:prstGeom>
-          <a:solidFill>
-            <a:srgbClr val="2C6E49"/>
-          </a:solidFill>
+          <a:solidFill>val="00875B"/&gt;</a:solidFill>
           <a:ln>
             <a:noFill/>
           </a:ln>
@@ -4873,9 +5147,7 @@
           <a:p>
             <a:pPr algn="l">
               <a:defRPr sz="2200" b="1">
-                <a:solidFill>
-                  <a:srgbClr val="1A5C33"/>
-                </a:solidFill>
+                <a:solidFill>val="006847"/&gt;</a:solidFill>
               </a:defRPr>
             </a:pPr>
             <a:r>
@@ -4911,9 +5183,7 @@
                 <a:spcPts val="600"/>
               </a:spcAft>
               <a:defRPr sz="1400">
-                <a:solidFill>
-                  <a:srgbClr val="222222"/>
-                </a:solidFill>
+                <a:solidFill>val="22344A"/&gt;</a:solidFill>
               </a:defRPr>
             </a:pPr>
             <a:r>
@@ -4934,9 +5204,7 @@
                 <a:spcPts val="600"/>
               </a:spcAft>
               <a:defRPr sz="1400">
-                <a:solidFill>
-                  <a:srgbClr val="222222"/>
-                </a:solidFill>
+                <a:solidFill>val="22344A"/&gt;</a:solidFill>
               </a:defRPr>
             </a:pPr>
             <a:r>
@@ -4957,9 +5225,7 @@
                 <a:spcPts val="600"/>
               </a:spcAft>
               <a:defRPr sz="1400">
-                <a:solidFill>
-                  <a:srgbClr val="222222"/>
-                </a:solidFill>
+                <a:solidFill>val="22344A"/&gt;</a:solidFill>
               </a:defRPr>
             </a:pPr>
             <a:r>
@@ -4976,13 +5242,52 @@
                 <a:spcPts val="600"/>
               </a:spcAft>
               <a:defRPr sz="1400">
+                <a:solidFill>val="22344A"/&gt;</a:solidFill>
+              </a:defRPr>
+            </a:pPr>
+            <a:r>
+              <a:t>• Mode d'évaluation :TD 40 % + QCM 20 % + mini-projet schéma machine 20 % + examen 20 %</a:t>
+            </a:r>
+          </a:p>
+        </p:txBody>
+      </p:sp>
+      <p:sp>
+        <p:nvSpPr>
+          <p:cNvPr id="990001" name="Pied de page FLE"/>
+          <p:cNvSpPr>
+            <a:spLocks noGrp="1"/>
+          </p:cNvSpPr>
+          <p:nvPr/>
+        </p:nvSpPr>
+        <p:spPr>
+          <a:xfrm>
+            <a:off x="-228600" y="6400800"/>
+            <a:ext cx="109728" cy="274320"/>
+          </a:xfrm>
+          <a:prstGeom prst="rect">
+            <a:avLst/>
+          </a:prstGeom>
+        </p:spPr>
+        <p:txBody>
+          <a:bodyPr anchor="b"/>
+          <a:lstStyle/>
+          <a:p>
+            <a:pPr algn="r">
+              <a:defRPr sz="900">
                 <a:solidFill>
-                  <a:srgbClr val="222222"/>
+                  <a:srgbClr val="9AA7B6"/>
                 </a:solidFill>
-              </a:defRPr>
-            </a:pPr>
-            <a:r>
-              <a:t>• Mode d'évaluation :TD 40 % + QCM 20 % + mini-projet schéma machine 20 % + examen 20 %</a:t>
+                <a:latin typeface="Poppins"/>
+              </a:defRPr>
+            </a:pPr>
+            <a:r>
+              <a:rPr lang="fr-FR" sz="900">
+                <a:solidFill>
+                  <a:srgbClr val="9AA7B6"/>
+                </a:solidFill>
+                <a:latin typeface="Poppins"/>
+              </a:rPr>
+              <a:t>Université de Mostaganem — Dr. Madani BELACEL</a:t>
             </a:r>
           </a:p>
         </p:txBody>
@@ -5000,9 +5305,7 @@
   <p:cSld>
     <p:bg>
       <p:bgPr>
-        <a:solidFill>
-          <a:srgbClr val="FFFFFF"/>
-        </a:solidFill>
+        <a:solidFill>val="FFFFFF"/&gt;</a:solidFill>
         <a:effectLst/>
       </p:bgPr>
     </p:bg>
@@ -5027,9 +5330,7 @@
           <a:prstGeom prst="rect">
             <a:avLst/>
           </a:prstGeom>
-          <a:solidFill>
-            <a:srgbClr val="2C6E49"/>
-          </a:solidFill>
+          <a:solidFill>val="00875B"/&gt;</a:solidFill>
           <a:ln>
             <a:noFill/>
           </a:ln>
@@ -5080,9 +5381,7 @@
           <a:p>
             <a:pPr algn="l">
               <a:defRPr sz="2200" b="1">
-                <a:solidFill>
-                  <a:srgbClr val="1A5C33"/>
-                </a:solidFill>
+                <a:solidFill>val="006847"/&gt;</a:solidFill>
               </a:defRPr>
             </a:pPr>
             <a:r>
@@ -5118,9 +5417,7 @@
                 <a:spcPts val="600"/>
               </a:spcAft>
               <a:defRPr sz="1400">
-                <a:solidFill>
-                  <a:srgbClr val="222222"/>
-                </a:solidFill>
+                <a:solidFill>val="22344A"/&gt;</a:solidFill>
               </a:defRPr>
             </a:pPr>
             <a:r>
@@ -5133,13 +5430,52 @@
                 <a:spcPts val="600"/>
               </a:spcAft>
               <a:defRPr sz="1400">
+                <a:solidFill>val="22344A"/&gt;</a:solidFill>
+              </a:defRPr>
+            </a:pPr>
+            <a:r>
+              <a:t>• Contact enseignant :BELACEL Madani —madani.belacel@univ-mosta.dz</a:t>
+            </a:r>
+          </a:p>
+        </p:txBody>
+      </p:sp>
+      <p:sp>
+        <p:nvSpPr>
+          <p:cNvPr id="990001" name="Pied de page FLE"/>
+          <p:cNvSpPr>
+            <a:spLocks noGrp="1"/>
+          </p:cNvSpPr>
+          <p:nvPr/>
+        </p:nvSpPr>
+        <p:spPr>
+          <a:xfrm>
+            <a:off x="-228600" y="6400800"/>
+            <a:ext cx="109728" cy="274320"/>
+          </a:xfrm>
+          <a:prstGeom prst="rect">
+            <a:avLst/>
+          </a:prstGeom>
+        </p:spPr>
+        <p:txBody>
+          <a:bodyPr anchor="b"/>
+          <a:lstStyle/>
+          <a:p>
+            <a:pPr algn="r">
+              <a:defRPr sz="900">
                 <a:solidFill>
-                  <a:srgbClr val="222222"/>
+                  <a:srgbClr val="9AA7B6"/>
                 </a:solidFill>
-              </a:defRPr>
-            </a:pPr>
-            <a:r>
-              <a:t>• Contact enseignant :BELACEL Madani —madani.belacel@univ-mosta.dz</a:t>
+                <a:latin typeface="Poppins"/>
+              </a:defRPr>
+            </a:pPr>
+            <a:r>
+              <a:rPr lang="fr-FR" sz="900">
+                <a:solidFill>
+                  <a:srgbClr val="9AA7B6"/>
+                </a:solidFill>
+                <a:latin typeface="Poppins"/>
+              </a:rPr>
+              <a:t>Université de Mostaganem — Dr. Madani BELACEL</a:t>
             </a:r>
           </a:p>
         </p:txBody>
@@ -5157,9 +5493,7 @@
   <p:cSld>
     <p:bg>
       <p:bgPr>
-        <a:solidFill>
-          <a:srgbClr val="FFFFFF"/>
-        </a:solidFill>
+        <a:solidFill>val="FFFFFF"/&gt;</a:solidFill>
         <a:effectLst/>
       </p:bgPr>
     </p:bg>
@@ -5184,9 +5518,7 @@
           <a:prstGeom prst="rect">
             <a:avLst/>
           </a:prstGeom>
-          <a:solidFill>
-            <a:srgbClr val="2C6E49"/>
-          </a:solidFill>
+          <a:solidFill>val="00875B"/&gt;</a:solidFill>
           <a:ln>
             <a:noFill/>
           </a:ln>
@@ -5237,9 +5569,7 @@
           <a:p>
             <a:pPr algn="l">
               <a:defRPr sz="2200" b="1">
-                <a:solidFill>
-                  <a:srgbClr val="1A5C33"/>
-                </a:solidFill>
+                <a:solidFill>val="006847"/&gt;</a:solidFill>
               </a:defRPr>
             </a:pPr>
             <a:r>
@@ -5275,9 +5605,7 @@
                 <a:spcPts val="600"/>
               </a:spcAft>
               <a:defRPr sz="1400">
-                <a:solidFill>
-                  <a:srgbClr val="222222"/>
-                </a:solidFill>
+                <a:solidFill>val="22344A"/&gt;</a:solidFill>
               </a:defRPr>
             </a:pPr>
             <a:r>
@@ -5290,9 +5618,7 @@
                 <a:spcPts val="600"/>
               </a:spcAft>
               <a:defRPr sz="1400">
-                <a:solidFill>
-                  <a:srgbClr val="222222"/>
-                </a:solidFill>
+                <a:solidFill>val="22344A"/&gt;</a:solidFill>
               </a:defRPr>
             </a:pPr>
             <a:r>
@@ -5305,9 +5631,7 @@
                 <a:spcPts val="600"/>
               </a:spcAft>
               <a:defRPr sz="1400">
-                <a:solidFill>
-                  <a:srgbClr val="222222"/>
-                </a:solidFill>
+                <a:solidFill>val="22344A"/&gt;</a:solidFill>
               </a:defRPr>
             </a:pPr>
             <a:r>
@@ -5320,9 +5644,7 @@
                 <a:spcPts val="600"/>
               </a:spcAft>
               <a:defRPr sz="1400">
-                <a:solidFill>
-                  <a:srgbClr val="222222"/>
-                </a:solidFill>
+                <a:solidFill>val="22344A"/&gt;</a:solidFill>
               </a:defRPr>
             </a:pPr>
             <a:r>
@@ -5335,9 +5657,7 @@
                 <a:spcPts val="600"/>
               </a:spcAft>
               <a:defRPr sz="1400">
-                <a:solidFill>
-                  <a:srgbClr val="222222"/>
-                </a:solidFill>
+                <a:solidFill>val="22344A"/&gt;</a:solidFill>
               </a:defRPr>
             </a:pPr>
             <a:r>
@@ -5350,9 +5670,7 @@
                 <a:spcPts val="600"/>
               </a:spcAft>
               <a:defRPr sz="1400">
-                <a:solidFill>
-                  <a:srgbClr val="222222"/>
-                </a:solidFill>
+                <a:solidFill>val="22344A"/&gt;</a:solidFill>
               </a:defRPr>
             </a:pPr>
             <a:r>
@@ -5365,9 +5683,7 @@
                 <a:spcPts val="600"/>
               </a:spcAft>
               <a:defRPr sz="1400">
-                <a:solidFill>
-                  <a:srgbClr val="222222"/>
-                </a:solidFill>
+                <a:solidFill>val="22344A"/&gt;</a:solidFill>
               </a:defRPr>
             </a:pPr>
             <a:r>
@@ -5380,13 +5696,52 @@
                 <a:spcPts val="600"/>
               </a:spcAft>
               <a:defRPr sz="1400">
+                <a:solidFill>val="22344A"/&gt;</a:solidFill>
+              </a:defRPr>
+            </a:pPr>
+            <a:r>
+              <a:t>• Conclusion et transition vers Windows</a:t>
+            </a:r>
+          </a:p>
+        </p:txBody>
+      </p:sp>
+      <p:sp>
+        <p:nvSpPr>
+          <p:cNvPr id="990001" name="Pied de page FLE"/>
+          <p:cNvSpPr>
+            <a:spLocks noGrp="1"/>
+          </p:cNvSpPr>
+          <p:nvPr/>
+        </p:nvSpPr>
+        <p:spPr>
+          <a:xfrm>
+            <a:off x="-228600" y="6400800"/>
+            <a:ext cx="109728" cy="274320"/>
+          </a:xfrm>
+          <a:prstGeom prst="rect">
+            <a:avLst/>
+          </a:prstGeom>
+        </p:spPr>
+        <p:txBody>
+          <a:bodyPr anchor="b"/>
+          <a:lstStyle/>
+          <a:p>
+            <a:pPr algn="r">
+              <a:defRPr sz="900">
                 <a:solidFill>
-                  <a:srgbClr val="222222"/>
+                  <a:srgbClr val="9AA7B6"/>
                 </a:solidFill>
-              </a:defRPr>
-            </a:pPr>
-            <a:r>
-              <a:t>• Conclusion et transition vers Windows</a:t>
+                <a:latin typeface="Poppins"/>
+              </a:defRPr>
+            </a:pPr>
+            <a:r>
+              <a:rPr lang="fr-FR" sz="900">
+                <a:solidFill>
+                  <a:srgbClr val="9AA7B6"/>
+                </a:solidFill>
+                <a:latin typeface="Poppins"/>
+              </a:rPr>
+              <a:t>Université de Mostaganem — Dr. Madani BELACEL</a:t>
             </a:r>
           </a:p>
         </p:txBody>
@@ -5404,9 +5759,7 @@
   <p:cSld>
     <p:bg>
       <p:bgPr>
-        <a:solidFill>
-          <a:srgbClr val="FFFFFF"/>
-        </a:solidFill>
+        <a:solidFill>val="FFFFFF"/&gt;</a:solidFill>
         <a:effectLst/>
       </p:bgPr>
     </p:bg>
@@ -5431,9 +5784,7 @@
           <a:prstGeom prst="rect">
             <a:avLst/>
           </a:prstGeom>
-          <a:solidFill>
-            <a:srgbClr val="2C6E49"/>
-          </a:solidFill>
+          <a:solidFill>val="00875B"/&gt;</a:solidFill>
           <a:ln>
             <a:noFill/>
           </a:ln>
@@ -5484,9 +5835,7 @@
           <a:p>
             <a:pPr algn="l">
               <a:defRPr sz="2200" b="1">
-                <a:solidFill>
-                  <a:srgbClr val="1A5C33"/>
-                </a:solidFill>
+                <a:solidFill>val="006847"/&gt;</a:solidFill>
               </a:defRPr>
             </a:pPr>
             <a:r>
@@ -5522,9 +5871,7 @@
                 <a:spcPts val="600"/>
               </a:spcAft>
               <a:defRPr sz="1400">
-                <a:solidFill>
-                  <a:srgbClr val="222222"/>
-                </a:solidFill>
+                <a:solidFill>val="22344A"/&gt;</a:solidFill>
               </a:defRPr>
             </a:pPr>
             <a:r>
@@ -5537,13 +5884,52 @@
                 <a:spcPts val="600"/>
               </a:spcAft>
               <a:defRPr sz="1400">
+                <a:solidFill>val="22344A"/&gt;</a:solidFill>
+              </a:defRPr>
+            </a:pPr>
+            <a:r>
+              <a:t>• L'ordinateur est devenule principal instrument de travail universitaire.</a:t>
+            </a:r>
+          </a:p>
+        </p:txBody>
+      </p:sp>
+      <p:sp>
+        <p:nvSpPr>
+          <p:cNvPr id="990001" name="Pied de page FLE"/>
+          <p:cNvSpPr>
+            <a:spLocks noGrp="1"/>
+          </p:cNvSpPr>
+          <p:nvPr/>
+        </p:nvSpPr>
+        <p:spPr>
+          <a:xfrm>
+            <a:off x="-228600" y="6400800"/>
+            <a:ext cx="109728" cy="274320"/>
+          </a:xfrm>
+          <a:prstGeom prst="rect">
+            <a:avLst/>
+          </a:prstGeom>
+        </p:spPr>
+        <p:txBody>
+          <a:bodyPr anchor="b"/>
+          <a:lstStyle/>
+          <a:p>
+            <a:pPr algn="r">
+              <a:defRPr sz="900">
                 <a:solidFill>
-                  <a:srgbClr val="222222"/>
+                  <a:srgbClr val="9AA7B6"/>
                 </a:solidFill>
-              </a:defRPr>
-            </a:pPr>
-            <a:r>
-              <a:t>• L'ordinateur est devenule principal instrument de travail universitaire.</a:t>
+                <a:latin typeface="Poppins"/>
+              </a:defRPr>
+            </a:pPr>
+            <a:r>
+              <a:rPr lang="fr-FR" sz="900">
+                <a:solidFill>
+                  <a:srgbClr val="9AA7B6"/>
+                </a:solidFill>
+                <a:latin typeface="Poppins"/>
+              </a:rPr>
+              <a:t>Université de Mostaganem — Dr. Madani BELACEL</a:t>
             </a:r>
           </a:p>
         </p:txBody>
@@ -5561,9 +5947,7 @@
   <p:cSld>
     <p:bg>
       <p:bgPr>
-        <a:solidFill>
-          <a:srgbClr val="FFFFFF"/>
-        </a:solidFill>
+        <a:solidFill>val="FFFFFF"/&gt;</a:solidFill>
         <a:effectLst/>
       </p:bgPr>
     </p:bg>
@@ -5588,9 +5972,7 @@
           <a:prstGeom prst="rect">
             <a:avLst/>
           </a:prstGeom>
-          <a:solidFill>
-            <a:srgbClr val="2C6E49"/>
-          </a:solidFill>
+          <a:solidFill>val="00875B"/&gt;</a:solidFill>
           <a:ln>
             <a:noFill/>
           </a:ln>
@@ -5641,9 +6023,7 @@
           <a:p>
             <a:pPr algn="l">
               <a:defRPr sz="2200" b="1">
-                <a:solidFill>
-                  <a:srgbClr val="1A5C33"/>
-                </a:solidFill>
+                <a:solidFill>val="006847"/&gt;</a:solidFill>
               </a:defRPr>
             </a:pPr>
             <a:r>
@@ -5679,9 +6059,7 @@
                 <a:spcPts val="600"/>
               </a:spcAft>
               <a:defRPr sz="1400">
-                <a:solidFill>
-                  <a:srgbClr val="222222"/>
-                </a:solidFill>
+                <a:solidFill>val="22344A"/&gt;</a:solidFill>
               </a:defRPr>
             </a:pPr>
             <a:r>
@@ -5694,13 +6072,52 @@
                 <a:spcPts val="600"/>
               </a:spcAft>
               <a:defRPr sz="1400">
+                <a:solidFill>val="22344A"/&gt;</a:solidFill>
+              </a:defRPr>
+            </a:pPr>
+            <a:r>
+              <a:t>• Approcheutilisateur: comprendre suffisamment pour bien utiliser l'ordinateur dans ses études.</a:t>
+            </a:r>
+          </a:p>
+        </p:txBody>
+      </p:sp>
+      <p:sp>
+        <p:nvSpPr>
+          <p:cNvPr id="990001" name="Pied de page FLE"/>
+          <p:cNvSpPr>
+            <a:spLocks noGrp="1"/>
+          </p:cNvSpPr>
+          <p:nvPr/>
+        </p:nvSpPr>
+        <p:spPr>
+          <a:xfrm>
+            <a:off x="-228600" y="6400800"/>
+            <a:ext cx="109728" cy="274320"/>
+          </a:xfrm>
+          <a:prstGeom prst="rect">
+            <a:avLst/>
+          </a:prstGeom>
+        </p:spPr>
+        <p:txBody>
+          <a:bodyPr anchor="b"/>
+          <a:lstStyle/>
+          <a:p>
+            <a:pPr algn="r">
+              <a:defRPr sz="900">
                 <a:solidFill>
-                  <a:srgbClr val="222222"/>
+                  <a:srgbClr val="9AA7B6"/>
                 </a:solidFill>
-              </a:defRPr>
-            </a:pPr>
-            <a:r>
-              <a:t>• Approcheutilisateur: comprendre suffisamment pour bien utiliser l'ordinateur dans ses études.</a:t>
+                <a:latin typeface="Poppins"/>
+              </a:defRPr>
+            </a:pPr>
+            <a:r>
+              <a:rPr lang="fr-FR" sz="900">
+                <a:solidFill>
+                  <a:srgbClr val="9AA7B6"/>
+                </a:solidFill>
+                <a:latin typeface="Poppins"/>
+              </a:rPr>
+              <a:t>Université de Mostaganem — Dr. Madani BELACEL</a:t>
             </a:r>
           </a:p>
         </p:txBody>
@@ -5756,7 +6173,7 @@
     </a:clrScheme>
     <a:fontScheme name="Office">
       <a:majorFont>
-        <a:latin typeface="Calibri"/>
+        <a:latin typeface="Poppins"/>
         <a:ea typeface=""/>
         <a:cs typeface=""/>
         <a:font script="Jpan" typeface="ＭＳ Ｐゴシック"/>
@@ -5791,7 +6208,7 @@
         <a:font script="Geor" typeface="Sylfaen"/>
       </a:majorFont>
       <a:minorFont>
-        <a:latin typeface="Calibri"/>
+        <a:latin typeface="Poppins"/>
         <a:ea typeface=""/>
         <a:cs typeface=""/>
         <a:font script="Jpan" typeface="ＭＳ Ｐゴシック"/>
